--- a/匠技研工業プロジェクト_オンボーディング計画.pptx
+++ b/匠技研工業プロジェクト_オンボーディング計画.pptx
@@ -19,14 +19,6 @@
     <p:sldId id="267" r:id="rId18"/>
     <p:sldId id="268" r:id="rId19"/>
     <p:sldId id="269" r:id="rId20"/>
-    <p:sldId id="270" r:id="rId21"/>
-    <p:sldId id="271" r:id="rId22"/>
-    <p:sldId id="272" r:id="rId23"/>
-    <p:sldId id="273" r:id="rId24"/>
-    <p:sldId id="274" r:id="rId25"/>
-    <p:sldId id="275" r:id="rId26"/>
-    <p:sldId id="276" r:id="rId27"/>
-    <p:sldId id="277" r:id="rId28"/>
   </p:sldIdLst>
   <p:sldSz cx="9144000" cy="5143500" type="screen4x3"/>
   <p:notesSz cx="6858000" cy="9144000"/>
@@ -3105,7 +3097,7 @@
     <p:bg>
       <p:bgPr>
         <a:solidFill>
-          <a:srgbClr val="1E3A5F"/>
+          <a:srgbClr val="FFFFFF"/>
         </a:solidFill>
         <a:effectLst/>
       </p:bgPr>
@@ -3125,8 +3117,8 @@
         </p:nvSpPr>
         <p:spPr>
           <a:xfrm>
-            <a:off x="457200" y="1645920"/>
-            <a:ext cx="8229600" cy="1371600"/>
+            <a:off x="457200" y="365760"/>
+            <a:ext cx="8229600" cy="731520"/>
           </a:xfrm>
           <a:prstGeom prst="rect">
             <a:avLst/>
@@ -3134,15 +3126,15 @@
           <a:noFill/>
         </p:spPr>
         <p:txBody>
-          <a:bodyPr wrap="square" anchor="ctr">
+          <a:bodyPr wrap="square">
             <a:spAutoFit/>
           </a:bodyPr>
           <a:lstStyle/>
           <a:p>
-            <a:pPr algn="ctr">
-              <a:defRPr sz="4400" b="1">
+            <a:pPr>
+              <a:defRPr sz="4000" b="1">
                 <a:solidFill>
-                  <a:srgbClr val="FFFFFF"/>
+                  <a:srgbClr val="1E3A5F"/>
                 </a:solidFill>
               </a:defRPr>
             </a:pPr>
@@ -3160,8 +3152,8 @@
         </p:nvSpPr>
         <p:spPr>
           <a:xfrm>
-            <a:off x="457200" y="2926080"/>
-            <a:ext cx="8229600" cy="1371600"/>
+            <a:off x="457200" y="1280160"/>
+            <a:ext cx="8229600" cy="3474720"/>
           </a:xfrm>
           <a:prstGeom prst="rect">
             <a:avLst/>
@@ -3174,10 +3166,10 @@
           </a:bodyPr>
           <a:lstStyle/>
           <a:p>
-            <a:pPr algn="ctr">
-              <a:defRPr sz="2400">
+            <a:pPr>
+              <a:defRPr sz="1800">
                 <a:solidFill>
-                  <a:srgbClr val="FFFFFF"/>
+                  <a:srgbClr val="333333"/>
                 </a:solidFill>
               </a:defRPr>
             </a:pPr>
@@ -3221,8 +3213,8 @@
         </p:nvSpPr>
         <p:spPr>
           <a:xfrm>
-            <a:off x="457200" y="274320"/>
-            <a:ext cx="8229600" cy="548640"/>
+            <a:off x="457200" y="365760"/>
+            <a:ext cx="8229600" cy="731520"/>
           </a:xfrm>
           <a:prstGeom prst="rect">
             <a:avLst/>
@@ -3230,20 +3222,20 @@
           <a:noFill/>
         </p:spPr>
         <p:txBody>
-          <a:bodyPr wrap="none">
+          <a:bodyPr wrap="square">
             <a:spAutoFit/>
           </a:bodyPr>
           <a:lstStyle/>
           <a:p>
             <a:pPr>
-              <a:defRPr sz="2400" b="1">
+              <a:defRPr sz="4000" b="1">
                 <a:solidFill>
                   <a:srgbClr val="1E3A5F"/>
                 </a:solidFill>
               </a:defRPr>
             </a:pPr>
             <a:r>
-              <a:t>Week1（3月3日週）</a:t>
+              <a:t>アカウント発行予定</a:t>
             </a:r>
           </a:p>
         </p:txBody>
@@ -3256,8 +3248,8 @@
         </p:nvSpPr>
         <p:spPr>
           <a:xfrm>
-            <a:off x="457200" y="868680"/>
-            <a:ext cx="8229600" cy="457200"/>
+            <a:off x="457200" y="1280160"/>
+            <a:ext cx="8229600" cy="3474720"/>
           </a:xfrm>
           <a:prstGeom prst="rect">
             <a:avLst/>
@@ -3271,91 +3263,26 @@
           <a:lstStyle/>
           <a:p>
             <a:pPr>
-              <a:defRPr sz="1600">
-                <a:solidFill>
-                  <a:srgbClr val="666666"/>
-                </a:solidFill>
-              </a:defRPr>
-            </a:pPr>
-            <a:r>
-              <a:t>必要なキャッチアップ内容を一通り理解</a:t>
-            </a:r>
-          </a:p>
-        </p:txBody>
-      </p:sp>
-      <p:sp>
-        <p:nvSpPr>
-          <p:cNvPr id="4" name="TextBox 3"/>
-          <p:cNvSpPr txBox="1"/>
-          <p:nvPr/>
-        </p:nvSpPr>
-        <p:spPr>
-          <a:xfrm>
-            <a:off x="457200" y="1097280"/>
-            <a:ext cx="8229600" cy="3200400"/>
-          </a:xfrm>
-          <a:prstGeom prst="rect">
-            <a:avLst/>
-          </a:prstGeom>
-          <a:noFill/>
-        </p:spPr>
-        <p:txBody>
-          <a:bodyPr wrap="square">
-            <a:spAutoFit/>
-          </a:bodyPr>
-          <a:lstStyle/>
-          <a:p>
-            <a:pPr>
-              <a:spcBef>
-                <a:spcPts val="600"/>
-              </a:spcBef>
-              <a:spcAft>
-                <a:spcPts val="600"/>
-              </a:spcAft>
-              <a:defRPr sz="1400">
+              <a:defRPr sz="1800">
                 <a:solidFill>
                   <a:srgbClr val="333333"/>
                 </a:solidFill>
               </a:defRPr>
             </a:pPr>
             <a:r>
-              <a:t>各種レクチャーMTGの実施</a:t>
-            </a:r>
-          </a:p>
-          <a:p>
-            <a:pPr>
-              <a:spcBef>
-                <a:spcPts val="600"/>
-              </a:spcBef>
-              <a:spcAft>
-                <a:spcPts val="600"/>
-              </a:spcAft>
-              <a:defRPr sz="1400">
-                <a:solidFill>
-                  <a:srgbClr val="333333"/>
-                </a:solidFill>
-              </a:defRPr>
-            </a:pPr>
-            <a:r>
-              <a:t>ドキュメントによるキャッチアップ</a:t>
-            </a:r>
-          </a:p>
-          <a:p>
-            <a:pPr>
-              <a:spcBef>
-                <a:spcPts val="600"/>
-              </a:spcBef>
-              <a:spcAft>
-                <a:spcPts val="600"/>
-              </a:spcAft>
-              <a:defRPr sz="1400">
-                <a:solidFill>
-                  <a:srgbClr val="333333"/>
-                </a:solidFill>
-              </a:defRPr>
-            </a:pPr>
-            <a:r>
-              <a:t>内容：ドメイン知識、ビジネスモデル、組織図、プロ...</a:t>
+              <a:t>Google Workspace</a:t>
+            </a:r>
+            <a:br/>
+            <a:r>
+              <a:t>Slack</a:t>
+            </a:r>
+            <a:br/>
+            <a:r>
+              <a:t>Notion</a:t>
+            </a:r>
+            <a:br/>
+            <a:r>
+              <a:t>匠フォース（社内システム）</a:t>
             </a:r>
           </a:p>
         </p:txBody>
@@ -3394,8 +3321,8 @@
         </p:nvSpPr>
         <p:spPr>
           <a:xfrm>
-            <a:off x="457200" y="274320"/>
-            <a:ext cx="8229600" cy="548640"/>
+            <a:off x="457200" y="365760"/>
+            <a:ext cx="8229600" cy="731520"/>
           </a:xfrm>
           <a:prstGeom prst="rect">
             <a:avLst/>
@@ -3403,20 +3330,20 @@
           <a:noFill/>
         </p:spPr>
         <p:txBody>
-          <a:bodyPr wrap="none">
+          <a:bodyPr wrap="square">
             <a:spAutoFit/>
           </a:bodyPr>
           <a:lstStyle/>
           <a:p>
             <a:pPr>
-              <a:defRPr sz="2400" b="1">
+              <a:defRPr sz="4000" b="1">
                 <a:solidFill>
                   <a:srgbClr val="1E3A5F"/>
                 </a:solidFill>
               </a:defRPr>
             </a:pPr>
             <a:r>
-              <a:t>Week2（3月10日週）</a:t>
+              <a:t>レクチャー体制</a:t>
             </a:r>
           </a:p>
         </p:txBody>
@@ -3429,8 +3356,8 @@
         </p:nvSpPr>
         <p:spPr>
           <a:xfrm>
-            <a:off x="457200" y="868680"/>
-            <a:ext cx="8229600" cy="457200"/>
+            <a:off x="457200" y="1280160"/>
+            <a:ext cx="8229600" cy="3474720"/>
           </a:xfrm>
           <a:prstGeom prst="rect">
             <a:avLst/>
@@ -3444,73 +3371,22 @@
           <a:lstStyle/>
           <a:p>
             <a:pPr>
-              <a:defRPr sz="1600">
-                <a:solidFill>
-                  <a:srgbClr val="666666"/>
-                </a:solidFill>
-              </a:defRPr>
-            </a:pPr>
-            <a:r>
-              <a:t>部分的にテックエキスパート業務に対応開始</a:t>
-            </a:r>
-          </a:p>
-        </p:txBody>
-      </p:sp>
-      <p:sp>
-        <p:nvSpPr>
-          <p:cNvPr id="4" name="TextBox 3"/>
-          <p:cNvSpPr txBox="1"/>
-          <p:nvPr/>
-        </p:nvSpPr>
-        <p:spPr>
-          <a:xfrm>
-            <a:off x="457200" y="1097280"/>
-            <a:ext cx="8229600" cy="3200400"/>
-          </a:xfrm>
-          <a:prstGeom prst="rect">
-            <a:avLst/>
-          </a:prstGeom>
-          <a:noFill/>
-        </p:spPr>
-        <p:txBody>
-          <a:bodyPr wrap="square">
-            <a:spAutoFit/>
-          </a:bodyPr>
-          <a:lstStyle/>
-          <a:p>
-            <a:pPr>
-              <a:spcBef>
-                <a:spcPts val="600"/>
-              </a:spcBef>
-              <a:spcAft>
-                <a:spcPts val="600"/>
-              </a:spcAft>
-              <a:defRPr sz="1400">
+              <a:defRPr sz="1800">
                 <a:solidFill>
                   <a:srgbClr val="333333"/>
                 </a:solidFill>
               </a:defRPr>
             </a:pPr>
             <a:r>
-              <a:t>既存顧客の修正対応：1日1～2件程度</a:t>
-            </a:r>
-          </a:p>
-          <a:p>
-            <a:pPr>
-              <a:spcBef>
-                <a:spcPts val="600"/>
-              </a:spcBef>
-              <a:spcAft>
-                <a:spcPts val="600"/>
-              </a:spcAft>
-              <a:defRPr sz="1400">
-                <a:solidFill>
-                  <a:srgbClr val="333333"/>
-                </a:solidFill>
-              </a:defRPr>
-            </a:pPr>
-            <a:r>
-              <a:t>基本的な対応フローの習得開始</a:t>
+              <a:t>メイン: 原様</a:t>
+            </a:r>
+            <a:br/>
+            <a:r>
+              <a:t>サブサポート: 高木さん、中野さん</a:t>
+            </a:r>
+            <a:br/>
+            <a:r>
+              <a:t>体系化: レクチャー内容の整理・ドキュメント化</a:t>
             </a:r>
           </a:p>
         </p:txBody>
@@ -3549,8 +3425,8 @@
         </p:nvSpPr>
         <p:spPr>
           <a:xfrm>
-            <a:off x="457200" y="274320"/>
-            <a:ext cx="8229600" cy="548640"/>
+            <a:off x="457200" y="365760"/>
+            <a:ext cx="8229600" cy="731520"/>
           </a:xfrm>
           <a:prstGeom prst="rect">
             <a:avLst/>
@@ -3558,20 +3434,20 @@
           <a:noFill/>
         </p:spPr>
         <p:txBody>
-          <a:bodyPr wrap="none">
+          <a:bodyPr wrap="square">
             <a:spAutoFit/>
           </a:bodyPr>
           <a:lstStyle/>
           <a:p>
             <a:pPr>
-              <a:defRPr sz="2400" b="1">
+              <a:defRPr sz="4000" b="1">
                 <a:solidFill>
                   <a:srgbClr val="1E3A5F"/>
                 </a:solidFill>
               </a:defRPr>
             </a:pPr>
             <a:r>
-              <a:t>Week3（3月17日週）</a:t>
+              <a:t>重要な確認事項</a:t>
             </a:r>
           </a:p>
         </p:txBody>
@@ -3584,8 +3460,8 @@
         </p:nvSpPr>
         <p:spPr>
           <a:xfrm>
-            <a:off x="457200" y="868680"/>
-            <a:ext cx="8229600" cy="457200"/>
+            <a:off x="457200" y="1280160"/>
+            <a:ext cx="8229600" cy="3474720"/>
           </a:xfrm>
           <a:prstGeom prst="rect">
             <a:avLst/>
@@ -3599,73 +3475,27 @@
           <a:lstStyle/>
           <a:p>
             <a:pPr>
-              <a:defRPr sz="1600">
-                <a:solidFill>
-                  <a:srgbClr val="666666"/>
-                </a:solidFill>
-              </a:defRPr>
-            </a:pPr>
-            <a:r>
-              <a:t>一通りのテックエキスパート業務に対応可...</a:t>
-            </a:r>
-          </a:p>
-        </p:txBody>
-      </p:sp>
-      <p:sp>
-        <p:nvSpPr>
-          <p:cNvPr id="4" name="TextBox 3"/>
-          <p:cNvSpPr txBox="1"/>
-          <p:nvPr/>
-        </p:nvSpPr>
-        <p:spPr>
-          <a:xfrm>
-            <a:off x="457200" y="1097280"/>
-            <a:ext cx="8229600" cy="3200400"/>
-          </a:xfrm>
-          <a:prstGeom prst="rect">
-            <a:avLst/>
-          </a:prstGeom>
-          <a:noFill/>
-        </p:spPr>
-        <p:txBody>
-          <a:bodyPr wrap="square">
-            <a:spAutoFit/>
-          </a:bodyPr>
-          <a:lstStyle/>
-          <a:p>
-            <a:pPr>
-              <a:spcBef>
-                <a:spcPts val="600"/>
-              </a:spcBef>
-              <a:spcAft>
-                <a:spcPts val="600"/>
-              </a:spcAft>
-              <a:defRPr sz="1400">
+              <a:defRPr sz="1800">
                 <a:solidFill>
                   <a:srgbClr val="333333"/>
                 </a:solidFill>
               </a:defRPr>
             </a:pPr>
             <a:r>
-              <a:t>新規顧客対応：1週間で1～2件</a:t>
-            </a:r>
-          </a:p>
-          <a:p>
-            <a:pPr>
-              <a:spcBef>
-                <a:spcPts val="600"/>
-              </a:spcBef>
-              <a:spcAft>
-                <a:spcPts val="600"/>
-              </a:spcAft>
-              <a:defRPr sz="1400">
-                <a:solidFill>
-                  <a:srgbClr val="333333"/>
-                </a:solidFill>
-              </a:defRPr>
-            </a:pPr>
-            <a:r>
-              <a:t>人材要件と4月以降のリソース見極め実施</a:t>
+              <a:t>Q: Slackチャンネル参加範囲は？</a:t>
+            </a:r>
+            <a:br/>
+            <a:r>
+              <a:t>A: 現状のみか他チャンネルも確認要</a:t>
+            </a:r>
+            <a:br/>
+            <a:br/>
+            <a:r>
+              <a:t>Q: アカウント発行タイムライン？</a:t>
+            </a:r>
+            <a:br/>
+            <a:r>
+              <a:t>A: 契約後速やかに実施</a:t>
             </a:r>
           </a:p>
         </p:txBody>
@@ -3704,8 +3534,8 @@
         </p:nvSpPr>
         <p:spPr>
           <a:xfrm>
-            <a:off x="457200" y="274320"/>
-            <a:ext cx="8229600" cy="548640"/>
+            <a:off x="457200" y="365760"/>
+            <a:ext cx="8229600" cy="731520"/>
           </a:xfrm>
           <a:prstGeom prst="rect">
             <a:avLst/>
@@ -3713,20 +3543,20 @@
           <a:noFill/>
         </p:spPr>
         <p:txBody>
-          <a:bodyPr wrap="none">
+          <a:bodyPr wrap="square">
             <a:spAutoFit/>
           </a:bodyPr>
           <a:lstStyle/>
           <a:p>
             <a:pPr>
-              <a:defRPr sz="2400" b="1">
+              <a:defRPr sz="4000" b="1">
                 <a:solidFill>
                   <a:srgbClr val="1E3A5F"/>
                 </a:solidFill>
               </a:defRPr>
             </a:pPr>
             <a:r>
-              <a:t>Week4（3月24日週）</a:t>
+              <a:t>アクションアイテム</a:t>
             </a:r>
           </a:p>
         </p:txBody>
@@ -3739,8 +3569,8 @@
         </p:nvSpPr>
         <p:spPr>
           <a:xfrm>
-            <a:off x="457200" y="868680"/>
-            <a:ext cx="8229600" cy="457200"/>
+            <a:off x="457200" y="1280160"/>
+            <a:ext cx="8229600" cy="3474720"/>
           </a:xfrm>
           <a:prstGeom prst="rect">
             <a:avLst/>
@@ -3754,73 +3584,22 @@
           <a:lstStyle/>
           <a:p>
             <a:pPr>
-              <a:defRPr sz="1600">
-                <a:solidFill>
-                  <a:srgbClr val="666666"/>
-                </a:solidFill>
-              </a:defRPr>
-            </a:pPr>
-            <a:r>
-              <a:t>実働メンバーへのレクチャー実施可能に</a:t>
-            </a:r>
-          </a:p>
-        </p:txBody>
-      </p:sp>
-      <p:sp>
-        <p:nvSpPr>
-          <p:cNvPr id="4" name="TextBox 3"/>
-          <p:cNvSpPr txBox="1"/>
-          <p:nvPr/>
-        </p:nvSpPr>
-        <p:spPr>
-          <a:xfrm>
-            <a:off x="457200" y="1097280"/>
-            <a:ext cx="8229600" cy="3200400"/>
-          </a:xfrm>
-          <a:prstGeom prst="rect">
-            <a:avLst/>
-          </a:prstGeom>
-          <a:noFill/>
-        </p:spPr>
-        <p:txBody>
-          <a:bodyPr wrap="square">
-            <a:spAutoFit/>
-          </a:bodyPr>
-          <a:lstStyle/>
-          <a:p>
-            <a:pPr>
-              <a:spcBef>
-                <a:spcPts val="600"/>
-              </a:spcBef>
-              <a:spcAft>
-                <a:spcPts val="600"/>
-              </a:spcAft>
-              <a:defRPr sz="1400">
+              <a:defRPr sz="1800">
                 <a:solidFill>
                   <a:srgbClr val="333333"/>
                 </a:solidFill>
               </a:defRPr>
             </a:pPr>
             <a:r>
-              <a:t>他メンバーへの指導開始</a:t>
-            </a:r>
-          </a:p>
-          <a:p>
-            <a:pPr>
-              <a:spcBef>
-                <a:spcPts val="600"/>
-              </a:spcBef>
-              <a:spcAft>
-                <a:spcPts val="600"/>
-              </a:spcAft>
-              <a:defRPr sz="1400">
-                <a:solidFill>
-                  <a:srgbClr val="333333"/>
-                </a:solidFill>
-              </a:defRPr>
-            </a:pPr>
-            <a:r>
-              <a:t>4月以降の本格運用体制構築</a:t>
+              <a:t>匠技研工業様: アカウント準備、Slack確認</a:t>
+            </a:r>
+            <a:br/>
+            <a:r>
+              <a:t>KOMMONS: 契約手続き、アカウント発行</a:t>
+            </a:r>
+            <a:br/>
+            <a:r>
+              <a:t>レクチャー資料の整備</a:t>
             </a:r>
           </a:p>
         </p:txBody>
@@ -3859,8 +3638,8 @@
         </p:nvSpPr>
         <p:spPr>
           <a:xfrm>
-            <a:off x="457200" y="274320"/>
-            <a:ext cx="8229600" cy="548640"/>
+            <a:off x="457200" y="365760"/>
+            <a:ext cx="8229600" cy="731520"/>
           </a:xfrm>
           <a:prstGeom prst="rect">
             <a:avLst/>
@@ -3868,20 +3647,20 @@
           <a:noFill/>
         </p:spPr>
         <p:txBody>
-          <a:bodyPr wrap="none">
+          <a:bodyPr wrap="square">
             <a:spAutoFit/>
           </a:bodyPr>
           <a:lstStyle/>
           <a:p>
             <a:pPr>
-              <a:defRPr sz="2400" b="1">
+              <a:defRPr sz="4000" b="1">
                 <a:solidFill>
                   <a:srgbClr val="1E3A5F"/>
                 </a:solidFill>
               </a:defRPr>
             </a:pPr>
             <a:r>
-              <a:t>オンボーディング進捗表</a:t>
+              <a:t>ネクストアクション</a:t>
             </a:r>
           </a:p>
         </p:txBody>
@@ -3894,8 +3673,8 @@
         </p:nvSpPr>
         <p:spPr>
           <a:xfrm>
-            <a:off x="457200" y="868680"/>
-            <a:ext cx="8229600" cy="457200"/>
+            <a:off x="457200" y="1280160"/>
+            <a:ext cx="8229600" cy="3474720"/>
           </a:xfrm>
           <a:prstGeom prst="rect">
             <a:avLst/>
@@ -3909,452 +3688,26 @@
           <a:lstStyle/>
           <a:p>
             <a:pPr>
-              <a:defRPr sz="1600">
+              <a:defRPr sz="1800">
                 <a:solidFill>
-                  <a:srgbClr val="666666"/>
+                  <a:srgbClr val="333333"/>
                 </a:solidFill>
               </a:defRPr>
             </a:pPr>
             <a:r>
-              <a:t>4週間で段階的にスキルアップ</a:t>
-            </a:r>
-          </a:p>
-        </p:txBody>
-      </p:sp>
-      <p:graphicFrame>
-        <p:nvGraphicFramePr>
-          <p:cNvPr id="4" name="Table 3"/>
-          <p:cNvGraphicFramePr>
-            <a:graphicFrameLocks noGrp="1"/>
-          </p:cNvGraphicFramePr>
-          <p:nvPr/>
-        </p:nvGraphicFramePr>
-        <p:xfrm>
-          <a:off x="731520" y="1097280"/>
-          <a:ext cx="7772400" cy="3200400"/>
-        </p:xfrm>
-        <a:graphic>
-          <a:graphicData uri="http://schemas.openxmlformats.org/drawingml/2006/table">
-            <a:tbl>
-              <a:tblPr firstRow="1" bandRow="1">
-                <a:tableStyleId>{5C22544A-7EE6-4342-B048-85BDC9FD1C3A}</a:tableStyleId>
-              </a:tblPr>
-              <a:tblGrid>
-                <a:gridCol w="1943100"/>
-                <a:gridCol w="1943100"/>
-                <a:gridCol w="1943100"/>
-                <a:gridCol w="1943100"/>
-              </a:tblGrid>
-              <a:tr h="640080">
-                <a:tc>
-                  <a:txBody>
-                    <a:bodyPr/>
-                    <a:lstStyle/>
-                    <a:p>
-                      <a:pPr>
-                        <a:defRPr sz="1100" b="1">
-                          <a:solidFill>
-                            <a:srgbClr val="FFFFFF"/>
-                          </a:solidFill>
-                        </a:defRPr>
-                      </a:pPr>
-                      <a:r>
-                        <a:t>週</a:t>
-                      </a:r>
-                    </a:p>
-                  </a:txBody>
-                  <a:tcPr>
-                    <a:solidFill>
-                      <a:srgbClr val="4A6FA5"/>
-                    </a:solidFill>
-                  </a:tcPr>
-                </a:tc>
-                <a:tc>
-                  <a:txBody>
-                    <a:bodyPr/>
-                    <a:lstStyle/>
-                    <a:p>
-                      <a:pPr>
-                        <a:defRPr sz="1100" b="1">
-                          <a:solidFill>
-                            <a:srgbClr val="FFFFFF"/>
-                          </a:solidFill>
-                        </a:defRPr>
-                      </a:pPr>
-                      <a:r>
-                        <a:t>期間</a:t>
-                      </a:r>
-                    </a:p>
-                  </a:txBody>
-                  <a:tcPr>
-                    <a:solidFill>
-                      <a:srgbClr val="4A6FA5"/>
-                    </a:solidFill>
-                  </a:tcPr>
-                </a:tc>
-                <a:tc>
-                  <a:txBody>
-                    <a:bodyPr/>
-                    <a:lstStyle/>
-                    <a:p>
-                      <a:pPr>
-                        <a:defRPr sz="1100" b="1">
-                          <a:solidFill>
-                            <a:srgbClr val="FFFFFF"/>
-                          </a:solidFill>
-                        </a:defRPr>
-                      </a:pPr>
-                      <a:r>
-                        <a:t>対応内容</a:t>
-                      </a:r>
-                    </a:p>
-                  </a:txBody>
-                  <a:tcPr>
-                    <a:solidFill>
-                      <a:srgbClr val="4A6FA5"/>
-                    </a:solidFill>
-                  </a:tcPr>
-                </a:tc>
-                <a:tc>
-                  <a:txBody>
-                    <a:bodyPr/>
-                    <a:lstStyle/>
-                    <a:p>
-                      <a:pPr>
-                        <a:defRPr sz="1100" b="1">
-                          <a:solidFill>
-                            <a:srgbClr val="FFFFFF"/>
-                          </a:solidFill>
-                        </a:defRPr>
-                      </a:pPr>
-                      <a:r>
-                        <a:t>目標</a:t>
-                      </a:r>
-                    </a:p>
-                  </a:txBody>
-                  <a:tcPr>
-                    <a:solidFill>
-                      <a:srgbClr val="4A6FA5"/>
-                    </a:solidFill>
-                  </a:tcPr>
-                </a:tc>
-              </a:tr>
-              <a:tr h="640080">
-                <a:tc>
-                  <a:txBody>
-                    <a:bodyPr/>
-                    <a:lstStyle/>
-                    <a:p>
-                      <a:pPr>
-                        <a:defRPr sz="1000">
-                          <a:solidFill>
-                            <a:srgbClr val="333333"/>
-                          </a:solidFill>
-                        </a:defRPr>
-                      </a:pPr>
-                      <a:r>
-                        <a:t>1</a:t>
-                      </a:r>
-                    </a:p>
-                  </a:txBody>
-                  <a:tcPr/>
-                </a:tc>
-                <a:tc>
-                  <a:txBody>
-                    <a:bodyPr/>
-                    <a:lstStyle/>
-                    <a:p>
-                      <a:pPr>
-                        <a:defRPr sz="1000">
-                          <a:solidFill>
-                            <a:srgbClr val="333333"/>
-                          </a:solidFill>
-                        </a:defRPr>
-                      </a:pPr>
-                      <a:r>
-                        <a:t>3/3週</a:t>
-                      </a:r>
-                    </a:p>
-                  </a:txBody>
-                  <a:tcPr/>
-                </a:tc>
-                <a:tc>
-                  <a:txBody>
-                    <a:bodyPr/>
-                    <a:lstStyle/>
-                    <a:p>
-                      <a:pPr>
-                        <a:defRPr sz="1000">
-                          <a:solidFill>
-                            <a:srgbClr val="333333"/>
-                          </a:solidFill>
-                        </a:defRPr>
-                      </a:pPr>
-                      <a:r>
-                        <a:t>レクチャーMTG</a:t>
-                      </a:r>
-                    </a:p>
-                  </a:txBody>
-                  <a:tcPr/>
-                </a:tc>
-                <a:tc>
-                  <a:txBody>
-                    <a:bodyPr/>
-                    <a:lstStyle/>
-                    <a:p>
-                      <a:pPr>
-                        <a:defRPr sz="1000">
-                          <a:solidFill>
-                            <a:srgbClr val="333333"/>
-                          </a:solidFill>
-                        </a:defRPr>
-                      </a:pPr>
-                      <a:r>
-                        <a:t>基礎知識習得</a:t>
-                      </a:r>
-                    </a:p>
-                  </a:txBody>
-                  <a:tcPr/>
-                </a:tc>
-              </a:tr>
-              <a:tr h="640080">
-                <a:tc>
-                  <a:txBody>
-                    <a:bodyPr/>
-                    <a:lstStyle/>
-                    <a:p>
-                      <a:pPr>
-                        <a:defRPr sz="1000">
-                          <a:solidFill>
-                            <a:srgbClr val="333333"/>
-                          </a:solidFill>
-                        </a:defRPr>
-                      </a:pPr>
-                      <a:r>
-                        <a:t>2</a:t>
-                      </a:r>
-                    </a:p>
-                  </a:txBody>
-                  <a:tcPr/>
-                </a:tc>
-                <a:tc>
-                  <a:txBody>
-                    <a:bodyPr/>
-                    <a:lstStyle/>
-                    <a:p>
-                      <a:pPr>
-                        <a:defRPr sz="1000">
-                          <a:solidFill>
-                            <a:srgbClr val="333333"/>
-                          </a:solidFill>
-                        </a:defRPr>
-                      </a:pPr>
-                      <a:r>
-                        <a:t>3/10週</a:t>
-                      </a:r>
-                    </a:p>
-                  </a:txBody>
-                  <a:tcPr/>
-                </a:tc>
-                <a:tc>
-                  <a:txBody>
-                    <a:bodyPr/>
-                    <a:lstStyle/>
-                    <a:p>
-                      <a:pPr>
-                        <a:defRPr sz="1000">
-                          <a:solidFill>
-                            <a:srgbClr val="333333"/>
-                          </a:solidFill>
-                        </a:defRPr>
-                      </a:pPr>
-                      <a:r>
-                        <a:t>修正対応</a:t>
-                      </a:r>
-                    </a:p>
-                  </a:txBody>
-                  <a:tcPr/>
-                </a:tc>
-                <a:tc>
-                  <a:txBody>
-                    <a:bodyPr/>
-                    <a:lstStyle/>
-                    <a:p>
-                      <a:pPr>
-                        <a:defRPr sz="1000">
-                          <a:solidFill>
-                            <a:srgbClr val="333333"/>
-                          </a:solidFill>
-                        </a:defRPr>
-                      </a:pPr>
-                      <a:r>
-                        <a:t>既存対応開始</a:t>
-                      </a:r>
-                    </a:p>
-                  </a:txBody>
-                  <a:tcPr/>
-                </a:tc>
-              </a:tr>
-              <a:tr h="640080">
-                <a:tc>
-                  <a:txBody>
-                    <a:bodyPr/>
-                    <a:lstStyle/>
-                    <a:p>
-                      <a:pPr>
-                        <a:defRPr sz="1000">
-                          <a:solidFill>
-                            <a:srgbClr val="333333"/>
-                          </a:solidFill>
-                        </a:defRPr>
-                      </a:pPr>
-                      <a:r>
-                        <a:t>3</a:t>
-                      </a:r>
-                    </a:p>
-                  </a:txBody>
-                  <a:tcPr/>
-                </a:tc>
-                <a:tc>
-                  <a:txBody>
-                    <a:bodyPr/>
-                    <a:lstStyle/>
-                    <a:p>
-                      <a:pPr>
-                        <a:defRPr sz="1000">
-                          <a:solidFill>
-                            <a:srgbClr val="333333"/>
-                          </a:solidFill>
-                        </a:defRPr>
-                      </a:pPr>
-                      <a:r>
-                        <a:t>3/17週</a:t>
-                      </a:r>
-                    </a:p>
-                  </a:txBody>
-                  <a:tcPr/>
-                </a:tc>
-                <a:tc>
-                  <a:txBody>
-                    <a:bodyPr/>
-                    <a:lstStyle/>
-                    <a:p>
-                      <a:pPr>
-                        <a:defRPr sz="1000">
-                          <a:solidFill>
-                            <a:srgbClr val="333333"/>
-                          </a:solidFill>
-                        </a:defRPr>
-                      </a:pPr>
-                      <a:r>
-                        <a:t>新規対応</a:t>
-                      </a:r>
-                    </a:p>
-                  </a:txBody>
-                  <a:tcPr/>
-                </a:tc>
-                <a:tc>
-                  <a:txBody>
-                    <a:bodyPr/>
-                    <a:lstStyle/>
-                    <a:p>
-                      <a:pPr>
-                        <a:defRPr sz="1000">
-                          <a:solidFill>
-                            <a:srgbClr val="333333"/>
-                          </a:solidFill>
-                        </a:defRPr>
-                      </a:pPr>
-                      <a:r>
-                        <a:t>本格対応開始</a:t>
-                      </a:r>
-                    </a:p>
-                  </a:txBody>
-                  <a:tcPr/>
-                </a:tc>
-              </a:tr>
-              <a:tr h="640080">
-                <a:tc>
-                  <a:txBody>
-                    <a:bodyPr/>
-                    <a:lstStyle/>
-                    <a:p>
-                      <a:pPr>
-                        <a:defRPr sz="1000">
-                          <a:solidFill>
-                            <a:srgbClr val="333333"/>
-                          </a:solidFill>
-                        </a:defRPr>
-                      </a:pPr>
-                      <a:r>
-                        <a:t>4</a:t>
-                      </a:r>
-                    </a:p>
-                  </a:txBody>
-                  <a:tcPr/>
-                </a:tc>
-                <a:tc>
-                  <a:txBody>
-                    <a:bodyPr/>
-                    <a:lstStyle/>
-                    <a:p>
-                      <a:pPr>
-                        <a:defRPr sz="1000">
-                          <a:solidFill>
-                            <a:srgbClr val="333333"/>
-                          </a:solidFill>
-                        </a:defRPr>
-                      </a:pPr>
-                      <a:r>
-                        <a:t>3/24週</a:t>
-                      </a:r>
-                    </a:p>
-                  </a:txBody>
-                  <a:tcPr/>
-                </a:tc>
-                <a:tc>
-                  <a:txBody>
-                    <a:bodyPr/>
-                    <a:lstStyle/>
-                    <a:p>
-                      <a:pPr>
-                        <a:defRPr sz="1000">
-                          <a:solidFill>
-                            <a:srgbClr val="333333"/>
-                          </a:solidFill>
-                        </a:defRPr>
-                      </a:pPr>
-                      <a:r>
-                        <a:t>他メンバー指導</a:t>
-                      </a:r>
-                    </a:p>
-                  </a:txBody>
-                  <a:tcPr/>
-                </a:tc>
-                <a:tc>
-                  <a:txBody>
-                    <a:bodyPr/>
-                    <a:lstStyle/>
-                    <a:p>
-                      <a:pPr>
-                        <a:defRPr sz="1000">
-                          <a:solidFill>
-                            <a:srgbClr val="333333"/>
-                          </a:solidFill>
-                        </a:defRPr>
-                      </a:pPr>
-                      <a:r>
-                        <a:t>リーダー育成</a:t>
-                      </a:r>
-                    </a:p>
-                  </a:txBody>
-                  <a:tcPr/>
-                </a:tc>
-              </a:tr>
-            </a:tbl>
-          </a:graphicData>
-        </a:graphic>
-      </p:graphicFrame>
+              <a:t>ご契約・アカウント準備を急ぎ進め</a:t>
+            </a:r>
+            <a:br/>
+            <a:r>
+              <a:t>3月3日稼働開始に向けて準備を加速</a:t>
+            </a:r>
+            <a:br/>
+            <a:r>
+              <a:t>スケジュール確定までの関係者調整</a:t>
+            </a:r>
+          </a:p>
+        </p:txBody>
+      </p:sp>
     </p:spTree>
   </p:cSld>
   <p:clrMapOvr>
@@ -4363,68 +3716,7 @@
 </p:sld>
 </file>
 
-<file path=ppt/slides/slide15.xml><?xml version="1.0" encoding="utf-8"?>
-<p:sld xmlns:a="http://schemas.openxmlformats.org/drawingml/2006/main" xmlns:p="http://schemas.openxmlformats.org/presentationml/2006/main" xmlns:r="http://schemas.openxmlformats.org/officeDocument/2006/relationships">
-  <p:cSld>
-    <p:bg>
-      <p:bgPr>
-        <a:solidFill>
-          <a:srgbClr val="F5F5F5"/>
-        </a:solidFill>
-        <a:effectLst/>
-      </p:bgPr>
-    </p:bg>
-    <p:spTree>
-      <p:nvGrpSpPr>
-        <p:cNvPr id="1" name=""/>
-        <p:cNvGrpSpPr/>
-        <p:nvPr/>
-      </p:nvGrpSpPr>
-      <p:grpSpPr/>
-      <p:sp>
-        <p:nvSpPr>
-          <p:cNvPr id="2" name="TextBox 1"/>
-          <p:cNvSpPr txBox="1"/>
-          <p:nvPr/>
-        </p:nvSpPr>
-        <p:spPr>
-          <a:xfrm>
-            <a:off x="457200" y="2011680"/>
-            <a:ext cx="8229600" cy="1371600"/>
-          </a:xfrm>
-          <a:prstGeom prst="rect">
-            <a:avLst/>
-          </a:prstGeom>
-          <a:noFill/>
-        </p:spPr>
-        <p:txBody>
-          <a:bodyPr wrap="square">
-            <a:spAutoFit/>
-          </a:bodyPr>
-          <a:lstStyle/>
-          <a:p>
-            <a:pPr algn="l">
-              <a:defRPr sz="3600" b="1">
-                <a:solidFill>
-                  <a:srgbClr val="333333"/>
-                </a:solidFill>
-              </a:defRPr>
-            </a:pPr>
-            <a:r>
-              <a:t>キャッチアップ内容</a:t>
-            </a:r>
-          </a:p>
-        </p:txBody>
-      </p:sp>
-    </p:spTree>
-  </p:cSld>
-  <p:clrMapOvr>
-    <a:masterClrMapping/>
-  </p:clrMapOvr>
-</p:sld>
-</file>
-
-<file path=ppt/slides/slide16.xml><?xml version="1.0" encoding="utf-8"?>
+<file path=ppt/slides/slide2.xml><?xml version="1.0" encoding="utf-8"?>
 <p:sld xmlns:a="http://schemas.openxmlformats.org/drawingml/2006/main" xmlns:p="http://schemas.openxmlformats.org/presentationml/2006/main" xmlns:r="http://schemas.openxmlformats.org/officeDocument/2006/relationships">
   <p:cSld>
     <p:bg>
@@ -4450,8 +3742,8 @@
         </p:nvSpPr>
         <p:spPr>
           <a:xfrm>
-            <a:off x="457200" y="274320"/>
-            <a:ext cx="8229600" cy="548640"/>
+            <a:off x="457200" y="365760"/>
+            <a:ext cx="8229600" cy="731520"/>
           </a:xfrm>
           <a:prstGeom prst="rect">
             <a:avLst/>
@@ -4459,20 +3751,20 @@
           <a:noFill/>
         </p:spPr>
         <p:txBody>
-          <a:bodyPr wrap="none">
+          <a:bodyPr wrap="square">
             <a:spAutoFit/>
           </a:bodyPr>
           <a:lstStyle/>
           <a:p>
             <a:pPr>
-              <a:defRPr sz="2400" b="1">
+              <a:defRPr sz="4000" b="1">
                 <a:solidFill>
                   <a:srgbClr val="1E3A5F"/>
                 </a:solidFill>
               </a:defRPr>
             </a:pPr>
             <a:r>
-              <a:t>準備すべきドキュメント</a:t>
+              <a:t>実施概要</a:t>
             </a:r>
           </a:p>
         </p:txBody>
@@ -4485,8 +3777,8 @@
         </p:nvSpPr>
         <p:spPr>
           <a:xfrm>
-            <a:off x="457200" y="868680"/>
-            <a:ext cx="8229600" cy="457200"/>
+            <a:off x="457200" y="1280160"/>
+            <a:ext cx="8229600" cy="3474720"/>
           </a:xfrm>
           <a:prstGeom prst="rect">
             <a:avLst/>
@@ -4500,1008 +3792,22 @@
           <a:lstStyle/>
           <a:p>
             <a:pPr>
-              <a:defRPr sz="1600">
-                <a:solidFill>
-                  <a:srgbClr val="666666"/>
-                </a:solidFill>
-              </a:defRPr>
-            </a:pPr>
-            <a:r>
-              <a:t>段階的に提供予定</a:t>
-            </a:r>
-          </a:p>
-        </p:txBody>
-      </p:sp>
-      <p:sp>
-        <p:nvSpPr>
-          <p:cNvPr id="4" name="TextBox 3"/>
-          <p:cNvSpPr txBox="1"/>
-          <p:nvPr/>
-        </p:nvSpPr>
-        <p:spPr>
-          <a:xfrm>
-            <a:off x="457200" y="1097280"/>
-            <a:ext cx="8229600" cy="3200400"/>
-          </a:xfrm>
-          <a:prstGeom prst="rect">
-            <a:avLst/>
-          </a:prstGeom>
-          <a:noFill/>
-        </p:spPr>
-        <p:txBody>
-          <a:bodyPr wrap="square">
-            <a:spAutoFit/>
-          </a:bodyPr>
-          <a:lstStyle/>
-          <a:p>
-            <a:pPr>
-              <a:spcBef>
-                <a:spcPts val="600"/>
-              </a:spcBef>
-              <a:spcAft>
-                <a:spcPts val="600"/>
-              </a:spcAft>
-              <a:defRPr sz="1400">
+              <a:defRPr sz="1800">
                 <a:solidFill>
                   <a:srgbClr val="333333"/>
                 </a:solidFill>
               </a:defRPr>
             </a:pPr>
             <a:r>
-              <a:t>**ドメイン知識**: 業界・市場知識</a:t>
-            </a:r>
-          </a:p>
-          <a:p>
-            <a:pPr>
-              <a:spcBef>
-                <a:spcPts val="600"/>
-              </a:spcBef>
-              <a:spcAft>
-                <a:spcPts val="600"/>
-              </a:spcAft>
-              <a:defRPr sz="1400">
-                <a:solidFill>
-                  <a:srgbClr val="333333"/>
-                </a:solidFill>
-              </a:defRPr>
-            </a:pPr>
-            <a:r>
-              <a:t>**ビジネスモデル**: 商流・営業体系</a:t>
-            </a:r>
-          </a:p>
-          <a:p>
-            <a:pPr>
-              <a:spcBef>
-                <a:spcPts val="600"/>
-              </a:spcBef>
-              <a:spcAft>
-                <a:spcPts val="600"/>
-              </a:spcAft>
-              <a:defRPr sz="1400">
-                <a:solidFill>
-                  <a:srgbClr val="333333"/>
-                </a:solidFill>
-              </a:defRPr>
-            </a:pPr>
-            <a:r>
-              <a:t>**組織図**: 部門構成・人間関係</a:t>
-            </a:r>
-          </a:p>
-          <a:p>
-            <a:pPr>
-              <a:spcBef>
-                <a:spcPts val="600"/>
-              </a:spcBef>
-              <a:spcAft>
-                <a:spcPts val="600"/>
-              </a:spcAft>
-              <a:defRPr sz="1400">
-                <a:solidFill>
-                  <a:srgbClr val="333333"/>
-                </a:solidFill>
-              </a:defRPr>
-            </a:pPr>
-            <a:r>
-              <a:t>**プロダクト**: 機能・仕様・操作方法</a:t>
-            </a:r>
-          </a:p>
-          <a:p>
-            <a:pPr>
-              <a:spcBef>
-                <a:spcPts val="600"/>
-              </a:spcBef>
-              <a:spcAft>
-                <a:spcPts val="600"/>
-              </a:spcAft>
-              <a:defRPr sz="1400">
-                <a:solidFill>
-                  <a:srgbClr val="333333"/>
-                </a:solidFill>
-              </a:defRPr>
-            </a:pPr>
-            <a:r>
-              <a:t>**CS業務フロー**: 顧客対応プロセス</a:t>
-            </a:r>
-          </a:p>
-          <a:p>
-            <a:pPr>
-              <a:spcBef>
-                <a:spcPts val="600"/>
-              </a:spcBef>
-              <a:spcAft>
-                <a:spcPts val="600"/>
-              </a:spcAft>
-              <a:defRPr sz="1400">
-                <a:solidFill>
-                  <a:srgbClr val="333333"/>
-                </a:solidFill>
-              </a:defRPr>
-            </a:pPr>
-            <a:r>
-              <a:t>**テックエキスパート業務**: 対応内容・手順</a:t>
-            </a:r>
-          </a:p>
-        </p:txBody>
-      </p:sp>
-    </p:spTree>
-  </p:cSld>
-  <p:clrMapOvr>
-    <a:masterClrMapping/>
-  </p:clrMapOvr>
-</p:sld>
-</file>
-
-<file path=ppt/slides/slide17.xml><?xml version="1.0" encoding="utf-8"?>
-<p:sld xmlns:a="http://schemas.openxmlformats.org/drawingml/2006/main" xmlns:p="http://schemas.openxmlformats.org/presentationml/2006/main" xmlns:r="http://schemas.openxmlformats.org/officeDocument/2006/relationships">
-  <p:cSld>
-    <p:bg>
-      <p:bgPr>
-        <a:solidFill>
-          <a:srgbClr val="FFFFFF"/>
-        </a:solidFill>
-        <a:effectLst/>
-      </p:bgPr>
-    </p:bg>
-    <p:spTree>
-      <p:nvGrpSpPr>
-        <p:cNvPr id="1" name=""/>
-        <p:cNvGrpSpPr/>
-        <p:nvPr/>
-      </p:nvGrpSpPr>
-      <p:grpSpPr/>
-      <p:sp>
-        <p:nvSpPr>
-          <p:cNvPr id="2" name="TextBox 1"/>
-          <p:cNvSpPr txBox="1"/>
-          <p:nvPr/>
-        </p:nvSpPr>
-        <p:spPr>
-          <a:xfrm>
-            <a:off x="457200" y="274320"/>
-            <a:ext cx="8229600" cy="548640"/>
-          </a:xfrm>
-          <a:prstGeom prst="rect">
-            <a:avLst/>
-          </a:prstGeom>
-          <a:noFill/>
-        </p:spPr>
-        <p:txBody>
-          <a:bodyPr wrap="none">
-            <a:spAutoFit/>
-          </a:bodyPr>
-          <a:lstStyle/>
-          <a:p>
-            <a:pPr>
-              <a:defRPr sz="2400" b="1">
-                <a:solidFill>
-                  <a:srgbClr val="1E3A5F"/>
-                </a:solidFill>
-              </a:defRPr>
-            </a:pPr>
-            <a:r>
-              <a:t>アカウント発行予定</a:t>
-            </a:r>
-          </a:p>
-        </p:txBody>
-      </p:sp>
-      <p:sp>
-        <p:nvSpPr>
-          <p:cNvPr id="3" name="TextBox 2"/>
-          <p:cNvSpPr txBox="1"/>
-          <p:nvPr/>
-        </p:nvSpPr>
-        <p:spPr>
-          <a:xfrm>
-            <a:off x="457200" y="868680"/>
-            <a:ext cx="8229600" cy="457200"/>
-          </a:xfrm>
-          <a:prstGeom prst="rect">
-            <a:avLst/>
-          </a:prstGeom>
-          <a:noFill/>
-        </p:spPr>
-        <p:txBody>
-          <a:bodyPr wrap="square">
-            <a:spAutoFit/>
-          </a:bodyPr>
-          <a:lstStyle/>
-          <a:p>
-            <a:pPr>
-              <a:defRPr sz="1600">
-                <a:solidFill>
-                  <a:srgbClr val="666666"/>
-                </a:solidFill>
-              </a:defRPr>
-            </a:pPr>
-            <a:r>
-              <a:t>ご契約次第で実施</a:t>
-            </a:r>
-          </a:p>
-        </p:txBody>
-      </p:sp>
-      <p:sp>
-        <p:nvSpPr>
-          <p:cNvPr id="4" name="TextBox 3"/>
-          <p:cNvSpPr txBox="1"/>
-          <p:nvPr/>
-        </p:nvSpPr>
-        <p:spPr>
-          <a:xfrm>
-            <a:off x="457200" y="1097280"/>
-            <a:ext cx="8229600" cy="3200400"/>
-          </a:xfrm>
-          <a:prstGeom prst="rect">
-            <a:avLst/>
-          </a:prstGeom>
-          <a:noFill/>
-        </p:spPr>
-        <p:txBody>
-          <a:bodyPr wrap="square">
-            <a:spAutoFit/>
-          </a:bodyPr>
-          <a:lstStyle/>
-          <a:p>
-            <a:pPr>
-              <a:spcBef>
-                <a:spcPts val="600"/>
-              </a:spcBef>
-              <a:spcAft>
-                <a:spcPts val="600"/>
-              </a:spcAft>
-              <a:defRPr sz="1400">
-                <a:solidFill>
-                  <a:srgbClr val="333333"/>
-                </a:solidFill>
-              </a:defRPr>
-            </a:pPr>
-            <a:r>
-              <a:t>Google Workspace</a:t>
-            </a:r>
-          </a:p>
-          <a:p>
-            <a:pPr>
-              <a:spcBef>
-                <a:spcPts val="600"/>
-              </a:spcBef>
-              <a:spcAft>
-                <a:spcPts val="600"/>
-              </a:spcAft>
-              <a:defRPr sz="1400">
-                <a:solidFill>
-                  <a:srgbClr val="333333"/>
-                </a:solidFill>
-              </a:defRPr>
-            </a:pPr>
-            <a:r>
-              <a:t>Slack</a:t>
-            </a:r>
-          </a:p>
-          <a:p>
-            <a:pPr>
-              <a:spcBef>
-                <a:spcPts val="600"/>
-              </a:spcBef>
-              <a:spcAft>
-                <a:spcPts val="600"/>
-              </a:spcAft>
-              <a:defRPr sz="1400">
-                <a:solidFill>
-                  <a:srgbClr val="333333"/>
-                </a:solidFill>
-              </a:defRPr>
-            </a:pPr>
-            <a:r>
-              <a:t>Notion</a:t>
-            </a:r>
-          </a:p>
-          <a:p>
-            <a:pPr>
-              <a:spcBef>
-                <a:spcPts val="600"/>
-              </a:spcBef>
-              <a:spcAft>
-                <a:spcPts val="600"/>
-              </a:spcAft>
-              <a:defRPr sz="1400">
-                <a:solidFill>
-                  <a:srgbClr val="333333"/>
-                </a:solidFill>
-              </a:defRPr>
-            </a:pPr>
-            <a:r>
-              <a:t>匠フォース（社内システム）</a:t>
-            </a:r>
-          </a:p>
-        </p:txBody>
-      </p:sp>
-    </p:spTree>
-  </p:cSld>
-  <p:clrMapOvr>
-    <a:masterClrMapping/>
-  </p:clrMapOvr>
-</p:sld>
-</file>
-
-<file path=ppt/slides/slide18.xml><?xml version="1.0" encoding="utf-8"?>
-<p:sld xmlns:a="http://schemas.openxmlformats.org/drawingml/2006/main" xmlns:p="http://schemas.openxmlformats.org/presentationml/2006/main" xmlns:r="http://schemas.openxmlformats.org/officeDocument/2006/relationships">
-  <p:cSld>
-    <p:bg>
-      <p:bgPr>
-        <a:solidFill>
-          <a:srgbClr val="FFFFFF"/>
-        </a:solidFill>
-        <a:effectLst/>
-      </p:bgPr>
-    </p:bg>
-    <p:spTree>
-      <p:nvGrpSpPr>
-        <p:cNvPr id="1" name=""/>
-        <p:cNvGrpSpPr/>
-        <p:nvPr/>
-      </p:nvGrpSpPr>
-      <p:grpSpPr/>
-      <p:sp>
-        <p:nvSpPr>
-          <p:cNvPr id="2" name="TextBox 1"/>
-          <p:cNvSpPr txBox="1"/>
-          <p:nvPr/>
-        </p:nvSpPr>
-        <p:spPr>
-          <a:xfrm>
-            <a:off x="457200" y="274320"/>
-            <a:ext cx="8229600" cy="548640"/>
-          </a:xfrm>
-          <a:prstGeom prst="rect">
-            <a:avLst/>
-          </a:prstGeom>
-          <a:noFill/>
-        </p:spPr>
-        <p:txBody>
-          <a:bodyPr wrap="none">
-            <a:spAutoFit/>
-          </a:bodyPr>
-          <a:lstStyle/>
-          <a:p>
-            <a:pPr>
-              <a:defRPr sz="2400" b="1">
-                <a:solidFill>
-                  <a:srgbClr val="1E3A5F"/>
-                </a:solidFill>
-              </a:defRPr>
-            </a:pPr>
-            <a:r>
-              <a:t>レクチャー体制</a:t>
-            </a:r>
-          </a:p>
-        </p:txBody>
-      </p:sp>
-      <p:sp>
-        <p:nvSpPr>
-          <p:cNvPr id="3" name="TextBox 2"/>
-          <p:cNvSpPr txBox="1"/>
-          <p:nvPr/>
-        </p:nvSpPr>
-        <p:spPr>
-          <a:xfrm>
-            <a:off x="457200" y="868680"/>
-            <a:ext cx="8229600" cy="457200"/>
-          </a:xfrm>
-          <a:prstGeom prst="rect">
-            <a:avLst/>
-          </a:prstGeom>
-          <a:noFill/>
-        </p:spPr>
-        <p:txBody>
-          <a:bodyPr wrap="square">
-            <a:spAutoFit/>
-          </a:bodyPr>
-          <a:lstStyle/>
-          <a:p>
-            <a:pPr>
-              <a:defRPr sz="1600">
-                <a:solidFill>
-                  <a:srgbClr val="666666"/>
-                </a:solidFill>
-              </a:defRPr>
-            </a:pPr>
-            <a:r>
-              <a:t>原様を中心にサポート体制を構築</a:t>
-            </a:r>
-          </a:p>
-        </p:txBody>
-      </p:sp>
-      <p:sp>
-        <p:nvSpPr>
-          <p:cNvPr id="4" name="TextBox 3"/>
-          <p:cNvSpPr txBox="1"/>
-          <p:nvPr/>
-        </p:nvSpPr>
-        <p:spPr>
-          <a:xfrm>
-            <a:off x="457200" y="1097280"/>
-            <a:ext cx="8229600" cy="3200400"/>
-          </a:xfrm>
-          <a:prstGeom prst="rect">
-            <a:avLst/>
-          </a:prstGeom>
-          <a:noFill/>
-        </p:spPr>
-        <p:txBody>
-          <a:bodyPr wrap="square">
-            <a:spAutoFit/>
-          </a:bodyPr>
-          <a:lstStyle/>
-          <a:p>
-            <a:pPr>
-              <a:spcBef>
-                <a:spcPts val="600"/>
-              </a:spcBef>
-              <a:spcAft>
-                <a:spcPts val="600"/>
-              </a:spcAft>
-              <a:defRPr sz="1400">
-                <a:solidFill>
-                  <a:srgbClr val="333333"/>
-                </a:solidFill>
-              </a:defRPr>
-            </a:pPr>
-            <a:r>
-              <a:t>**メインレクチャー**: 原様</a:t>
-            </a:r>
-          </a:p>
-          <a:p>
-            <a:pPr>
-              <a:spcBef>
-                <a:spcPts val="600"/>
-              </a:spcBef>
-              <a:spcAft>
-                <a:spcPts val="600"/>
-              </a:spcAft>
-              <a:defRPr sz="1400">
-                <a:solidFill>
-                  <a:srgbClr val="333333"/>
-                </a:solidFill>
-              </a:defRPr>
-            </a:pPr>
-            <a:r>
-              <a:t>**サブサポート**: 高木さん、中野さん（原様が多忙...</a:t>
-            </a:r>
-          </a:p>
-          <a:p>
-            <a:pPr>
-              <a:spcBef>
-                <a:spcPts val="600"/>
-              </a:spcBef>
-              <a:spcAft>
-                <a:spcPts val="600"/>
-              </a:spcAft>
-              <a:defRPr sz="1400">
-                <a:solidFill>
-                  <a:srgbClr val="333333"/>
-                </a:solidFill>
-              </a:defRPr>
-            </a:pPr>
-            <a:r>
-              <a:t>**体系化**: レクチャー内容を整理・ドキュメント化</a:t>
-            </a:r>
-          </a:p>
-        </p:txBody>
-      </p:sp>
-    </p:spTree>
-  </p:cSld>
-  <p:clrMapOvr>
-    <a:masterClrMapping/>
-  </p:clrMapOvr>
-</p:sld>
-</file>
-
-<file path=ppt/slides/slide19.xml><?xml version="1.0" encoding="utf-8"?>
-<p:sld xmlns:a="http://schemas.openxmlformats.org/drawingml/2006/main" xmlns:p="http://schemas.openxmlformats.org/presentationml/2006/main" xmlns:r="http://schemas.openxmlformats.org/officeDocument/2006/relationships">
-  <p:cSld>
-    <p:bg>
-      <p:bgPr>
-        <a:solidFill>
-          <a:srgbClr val="F5F5F5"/>
-        </a:solidFill>
-        <a:effectLst/>
-      </p:bgPr>
-    </p:bg>
-    <p:spTree>
-      <p:nvGrpSpPr>
-        <p:cNvPr id="1" name=""/>
-        <p:cNvGrpSpPr/>
-        <p:nvPr/>
-      </p:nvGrpSpPr>
-      <p:grpSpPr/>
-      <p:sp>
-        <p:nvSpPr>
-          <p:cNvPr id="2" name="TextBox 1"/>
-          <p:cNvSpPr txBox="1"/>
-          <p:nvPr/>
-        </p:nvSpPr>
-        <p:spPr>
-          <a:xfrm>
-            <a:off x="457200" y="2011680"/>
-            <a:ext cx="8229600" cy="1371600"/>
-          </a:xfrm>
-          <a:prstGeom prst="rect">
-            <a:avLst/>
-          </a:prstGeom>
-          <a:noFill/>
-        </p:spPr>
-        <p:txBody>
-          <a:bodyPr wrap="square">
-            <a:spAutoFit/>
-          </a:bodyPr>
-          <a:lstStyle/>
-          <a:p>
-            <a:pPr algn="l">
-              <a:defRPr sz="3600" b="1">
-                <a:solidFill>
-                  <a:srgbClr val="333333"/>
-                </a:solidFill>
-              </a:defRPr>
-            </a:pPr>
-            <a:r>
-              <a:t>ネクストアクション</a:t>
-            </a:r>
-          </a:p>
-        </p:txBody>
-      </p:sp>
-    </p:spTree>
-  </p:cSld>
-  <p:clrMapOvr>
-    <a:masterClrMapping/>
-  </p:clrMapOvr>
-</p:sld>
-</file>
-
-<file path=ppt/slides/slide2.xml><?xml version="1.0" encoding="utf-8"?>
-<p:sld xmlns:a="http://schemas.openxmlformats.org/drawingml/2006/main" xmlns:p="http://schemas.openxmlformats.org/presentationml/2006/main" xmlns:r="http://schemas.openxmlformats.org/officeDocument/2006/relationships">
-  <p:cSld>
-    <p:bg>
-      <p:bgPr>
-        <a:solidFill>
-          <a:srgbClr val="F5F5F5"/>
-        </a:solidFill>
-        <a:effectLst/>
-      </p:bgPr>
-    </p:bg>
-    <p:spTree>
-      <p:nvGrpSpPr>
-        <p:cNvPr id="1" name=""/>
-        <p:cNvGrpSpPr/>
-        <p:nvPr/>
-      </p:nvGrpSpPr>
-      <p:grpSpPr/>
-      <p:sp>
-        <p:nvSpPr>
-          <p:cNvPr id="2" name="TextBox 1"/>
-          <p:cNvSpPr txBox="1"/>
-          <p:nvPr/>
-        </p:nvSpPr>
-        <p:spPr>
-          <a:xfrm>
-            <a:off x="457200" y="2011680"/>
-            <a:ext cx="8229600" cy="1371600"/>
-          </a:xfrm>
-          <a:prstGeom prst="rect">
-            <a:avLst/>
-          </a:prstGeom>
-          <a:noFill/>
-        </p:spPr>
-        <p:txBody>
-          <a:bodyPr wrap="square">
-            <a:spAutoFit/>
-          </a:bodyPr>
-          <a:lstStyle/>
-          <a:p>
-            <a:pPr algn="l">
-              <a:defRPr sz="3600" b="1">
-                <a:solidFill>
-                  <a:srgbClr val="333333"/>
-                </a:solidFill>
-              </a:defRPr>
-            </a:pPr>
-            <a:r>
-              <a:t>実施概要</a:t>
-            </a:r>
-          </a:p>
-        </p:txBody>
-      </p:sp>
-    </p:spTree>
-  </p:cSld>
-  <p:clrMapOvr>
-    <a:masterClrMapping/>
-  </p:clrMapOvr>
-</p:sld>
-</file>
-
-<file path=ppt/slides/slide20.xml><?xml version="1.0" encoding="utf-8"?>
-<p:sld xmlns:a="http://schemas.openxmlformats.org/drawingml/2006/main" xmlns:p="http://schemas.openxmlformats.org/presentationml/2006/main" xmlns:r="http://schemas.openxmlformats.org/officeDocument/2006/relationships">
-  <p:cSld>
-    <p:bg>
-      <p:bgPr>
-        <a:solidFill>
-          <a:srgbClr val="FFFFFF"/>
-        </a:solidFill>
-        <a:effectLst/>
-      </p:bgPr>
-    </p:bg>
-    <p:spTree>
-      <p:nvGrpSpPr>
-        <p:cNvPr id="1" name=""/>
-        <p:cNvGrpSpPr/>
-        <p:nvPr/>
-      </p:nvGrpSpPr>
-      <p:grpSpPr/>
-      <p:sp>
-        <p:nvSpPr>
-          <p:cNvPr id="2" name="TextBox 1"/>
-          <p:cNvSpPr txBox="1"/>
-          <p:nvPr/>
-        </p:nvSpPr>
-        <p:spPr>
-          <a:xfrm>
-            <a:off x="457200" y="274320"/>
-            <a:ext cx="8229600" cy="548640"/>
-          </a:xfrm>
-          <a:prstGeom prst="rect">
-            <a:avLst/>
-          </a:prstGeom>
-          <a:noFill/>
-        </p:spPr>
-        <p:txBody>
-          <a:bodyPr wrap="none">
-            <a:spAutoFit/>
-          </a:bodyPr>
-          <a:lstStyle/>
-          <a:p>
-            <a:pPr>
-              <a:defRPr sz="2400" b="1">
-                <a:solidFill>
-                  <a:srgbClr val="1E3A5F"/>
-                </a:solidFill>
-              </a:defRPr>
-            </a:pPr>
-            <a:r>
-              <a:t>重要な確認事項</a:t>
-            </a:r>
-          </a:p>
-        </p:txBody>
-      </p:sp>
-      <p:sp>
-        <p:nvSpPr>
-          <p:cNvPr id="3" name="TextBox 2"/>
-          <p:cNvSpPr txBox="1"/>
-          <p:nvPr/>
-        </p:nvSpPr>
-        <p:spPr>
-          <a:xfrm>
-            <a:off x="457200" y="914400"/>
-            <a:ext cx="8229600" cy="3840480"/>
-          </a:xfrm>
-          <a:prstGeom prst="rect">
-            <a:avLst/>
-          </a:prstGeom>
-          <a:noFill/>
-        </p:spPr>
-        <p:txBody>
-          <a:bodyPr wrap="square">
-            <a:spAutoFit/>
-          </a:bodyPr>
-          <a:lstStyle/>
-          <a:p>
-            <a:pPr>
-              <a:spcBef>
-                <a:spcPts val="600"/>
-              </a:spcBef>
-              <a:defRPr sz="1200" b="1">
-                <a:solidFill>
-                  <a:srgbClr val="3AA899"/>
-                </a:solidFill>
-              </a:defRPr>
-            </a:pPr>
-            <a:r>
-              <a:t>Slackチャンネルの参加範囲は？</a:t>
-            </a:r>
-          </a:p>
-          <a:p>
-            <a:pPr lvl="1">
-              <a:spcAft>
-                <a:spcPts val="600"/>
-              </a:spcAft>
-              <a:defRPr sz="1100">
-                <a:solidFill>
-                  <a:srgbClr val="333333"/>
-                </a:solidFill>
-              </a:defRPr>
-            </a:pPr>
-            <a:r>
-              <a:t>現状の「#9135-匠技研工業-kommons」のみか、匠様内の他チャンネルへの参加も確認要</a:t>
-            </a:r>
-          </a:p>
-        </p:txBody>
-      </p:sp>
-    </p:spTree>
-  </p:cSld>
-  <p:clrMapOvr>
-    <a:masterClrMapping/>
-  </p:clrMapOvr>
-</p:sld>
-</file>
-
-<file path=ppt/slides/slide21.xml><?xml version="1.0" encoding="utf-8"?>
-<p:sld xmlns:a="http://schemas.openxmlformats.org/drawingml/2006/main" xmlns:p="http://schemas.openxmlformats.org/presentationml/2006/main" xmlns:r="http://schemas.openxmlformats.org/officeDocument/2006/relationships">
-  <p:cSld>
-    <p:bg>
-      <p:bgPr>
-        <a:solidFill>
-          <a:srgbClr val="FFFFFF"/>
-        </a:solidFill>
-        <a:effectLst/>
-      </p:bgPr>
-    </p:bg>
-    <p:spTree>
-      <p:nvGrpSpPr>
-        <p:cNvPr id="1" name=""/>
-        <p:cNvGrpSpPr/>
-        <p:nvPr/>
-      </p:nvGrpSpPr>
-      <p:grpSpPr/>
-      <p:sp>
-        <p:nvSpPr>
-          <p:cNvPr id="2" name="TextBox 1"/>
-          <p:cNvSpPr txBox="1"/>
-          <p:nvPr/>
-        </p:nvSpPr>
-        <p:spPr>
-          <a:xfrm>
-            <a:off x="457200" y="274320"/>
-            <a:ext cx="8229600" cy="548640"/>
-          </a:xfrm>
-          <a:prstGeom prst="rect">
-            <a:avLst/>
-          </a:prstGeom>
-          <a:noFill/>
-        </p:spPr>
-        <p:txBody>
-          <a:bodyPr wrap="none">
-            <a:spAutoFit/>
-          </a:bodyPr>
-          <a:lstStyle/>
-          <a:p>
-            <a:pPr>
-              <a:defRPr sz="2400" b="1">
-                <a:solidFill>
-                  <a:srgbClr val="1E3A5F"/>
-                </a:solidFill>
-              </a:defRPr>
-            </a:pPr>
-            <a:r>
-              <a:t>アクションアイテム</a:t>
-            </a:r>
-          </a:p>
-        </p:txBody>
-      </p:sp>
-      <p:sp>
-        <p:nvSpPr>
-          <p:cNvPr id="3" name="TextBox 2"/>
-          <p:cNvSpPr txBox="1"/>
-          <p:nvPr/>
-        </p:nvSpPr>
-        <p:spPr>
-          <a:xfrm>
-            <a:off x="457200" y="868680"/>
-            <a:ext cx="8229600" cy="457200"/>
-          </a:xfrm>
-          <a:prstGeom prst="rect">
-            <a:avLst/>
-          </a:prstGeom>
-          <a:noFill/>
-        </p:spPr>
-        <p:txBody>
-          <a:bodyPr wrap="square">
-            <a:spAutoFit/>
-          </a:bodyPr>
-          <a:lstStyle/>
-          <a:p>
-            <a:pPr>
-              <a:defRPr sz="1600">
-                <a:solidFill>
-                  <a:srgbClr val="666666"/>
-                </a:solidFill>
-              </a:defRPr>
-            </a:pPr>
-            <a:r>
-              <a:t>両社で実施すべき項目</a:t>
-            </a:r>
-          </a:p>
-        </p:txBody>
-      </p:sp>
-      <p:sp>
-        <p:nvSpPr>
-          <p:cNvPr id="4" name="TextBox 3"/>
-          <p:cNvSpPr txBox="1"/>
-          <p:nvPr/>
-        </p:nvSpPr>
-        <p:spPr>
-          <a:xfrm>
-            <a:off x="457200" y="1097280"/>
-            <a:ext cx="8229600" cy="3200400"/>
-          </a:xfrm>
-          <a:prstGeom prst="rect">
-            <a:avLst/>
-          </a:prstGeom>
-          <a:noFill/>
-        </p:spPr>
-        <p:txBody>
-          <a:bodyPr wrap="square">
-            <a:spAutoFit/>
-          </a:bodyPr>
-          <a:lstStyle/>
-          <a:p>
-            <a:pPr>
-              <a:defRPr sz="1300" b="1">
-                <a:solidFill>
-                  <a:srgbClr val="3AA899"/>
-                </a:solidFill>
-              </a:defRPr>
-            </a:pPr>
-            <a:r>
-              <a:t>1. **匠技研工業...</a:t>
-            </a:r>
-          </a:p>
-          <a:p>
-            <a:pPr lvl="1">
-              <a:defRPr sz="1100">
-                <a:solidFill>
-                  <a:srgbClr val="333333"/>
-                </a:solidFill>
-              </a:defRPr>
-            </a:pPr>
-            <a:r>
-              <a:t>- 各種アカウント準備（Google、Slack、Notion、匠...</a:t>
-            </a:r>
-          </a:p>
-          <a:p>
-            <a:pPr>
-              <a:defRPr sz="1300" b="1">
-                <a:solidFill>
-                  <a:srgbClr val="3AA899"/>
-                </a:solidFill>
-              </a:defRPr>
-            </a:pPr>
-            <a:r>
-              <a:t>2. **KOMMONS対応**</a:t>
-            </a:r>
-          </a:p>
-          <a:p>
-            <a:pPr lvl="1">
-              <a:defRPr sz="1100">
-                <a:solidFill>
-                  <a:srgbClr val="333333"/>
-                </a:solidFill>
-              </a:defRPr>
-            </a:pPr>
-            <a:r>
-              <a:t>- ご契約手続き完了</a:t>
-            </a:r>
-          </a:p>
-        </p:txBody>
-      </p:sp>
-    </p:spTree>
-  </p:cSld>
-  <p:clrMapOvr>
-    <a:masterClrMapping/>
-  </p:clrMapOvr>
-</p:sld>
-</file>
-
-<file path=ppt/slides/slide22.xml><?xml version="1.0" encoding="utf-8"?>
-<p:sld xmlns:a="http://schemas.openxmlformats.org/drawingml/2006/main" xmlns:p="http://schemas.openxmlformats.org/presentationml/2006/main" xmlns:r="http://schemas.openxmlformats.org/officeDocument/2006/relationships">
-  <p:cSld>
-    <p:bg>
-      <p:bgPr>
-        <a:solidFill>
-          <a:srgbClr val="F5F5F5"/>
-        </a:solidFill>
-        <a:effectLst/>
-      </p:bgPr>
-    </p:bg>
-    <p:spTree>
-      <p:nvGrpSpPr>
-        <p:cNvPr id="1" name=""/>
-        <p:cNvGrpSpPr/>
-        <p:nvPr/>
-      </p:nvGrpSpPr>
-      <p:grpSpPr/>
-      <p:sp>
-        <p:nvSpPr>
-          <p:cNvPr id="2" name="TextBox 1"/>
-          <p:cNvSpPr txBox="1"/>
-          <p:nvPr/>
-        </p:nvSpPr>
-        <p:spPr>
-          <a:xfrm>
-            <a:off x="457200" y="1371600"/>
-            <a:ext cx="8229600" cy="914400"/>
-          </a:xfrm>
-          <a:prstGeom prst="rect">
-            <a:avLst/>
-          </a:prstGeom>
-          <a:noFill/>
-        </p:spPr>
-        <p:txBody>
-          <a:bodyPr wrap="square">
-            <a:spAutoFit/>
-          </a:bodyPr>
-          <a:lstStyle/>
-          <a:p>
-            <a:pPr algn="ctr">
-              <a:defRPr sz="3200" b="1">
-                <a:solidFill>
-                  <a:srgbClr val="333333"/>
-                </a:solidFill>
-              </a:defRPr>
-            </a:pPr>
-            <a:r>
-              <a:t>ご契約・アカウント準備を急ぎ進め、3月3日稼働開始に向けて準備を加速</a:t>
-            </a:r>
-          </a:p>
-        </p:txBody>
-      </p:sp>
-      <p:sp>
-        <p:nvSpPr>
-          <p:cNvPr id="3" name="TextBox 2"/>
-          <p:cNvSpPr txBox="1"/>
-          <p:nvPr/>
-        </p:nvSpPr>
-        <p:spPr>
-          <a:xfrm>
-            <a:off x="457200" y="2286000"/>
-            <a:ext cx="8229600" cy="914400"/>
-          </a:xfrm>
-          <a:prstGeom prst="rect">
-            <a:avLst/>
-          </a:prstGeom>
-          <a:noFill/>
-        </p:spPr>
-        <p:txBody>
-          <a:bodyPr wrap="square">
-            <a:spAutoFit/>
-          </a:bodyPr>
-          <a:lstStyle/>
-          <a:p>
-            <a:pPr algn="ctr">
-              <a:defRPr sz="1400">
-                <a:solidFill>
-                  <a:srgbClr val="333333"/>
-                </a:solidFill>
-              </a:defRPr>
-            </a:pPr>
-            <a:r>
-              <a:t>スケジュール確定までの関係者調整をお願いします</a:t>
+              <a:t>2025年2月21日に実施概要確認MTGを開催</a:t>
+            </a:r>
+            <a:br/>
+            <a:r>
+              <a:t>日時: 2月21日 16:00-17:00</a:t>
+            </a:r>
+            <a:br/>
+            <a:r>
+              <a:t>出席: 匠技研工業様（原様）、KOMMONS（津野）</a:t>
             </a:r>
           </a:p>
         </p:txBody>
@@ -5540,8 +3846,8 @@
         </p:nvSpPr>
         <p:spPr>
           <a:xfrm>
-            <a:off x="457200" y="274320"/>
-            <a:ext cx="8229600" cy="548640"/>
+            <a:off x="457200" y="365760"/>
+            <a:ext cx="8229600" cy="731520"/>
           </a:xfrm>
           <a:prstGeom prst="rect">
             <a:avLst/>
@@ -5549,20 +3855,20 @@
           <a:noFill/>
         </p:spPr>
         <p:txBody>
-          <a:bodyPr wrap="none">
+          <a:bodyPr wrap="square">
             <a:spAutoFit/>
           </a:bodyPr>
           <a:lstStyle/>
           <a:p>
             <a:pPr>
-              <a:defRPr sz="2400" b="1">
+              <a:defRPr sz="4000" b="1">
                 <a:solidFill>
                   <a:srgbClr val="1E3A5F"/>
                 </a:solidFill>
               </a:defRPr>
             </a:pPr>
             <a:r>
-              <a:t>プロジェクト概要</a:t>
+              <a:t>稼働条件</a:t>
             </a:r>
           </a:p>
         </p:txBody>
@@ -5575,8 +3881,8 @@
         </p:nvSpPr>
         <p:spPr>
           <a:xfrm>
-            <a:off x="457200" y="868680"/>
-            <a:ext cx="8229600" cy="457200"/>
+            <a:off x="457200" y="1280160"/>
+            <a:ext cx="8229600" cy="3474720"/>
           </a:xfrm>
           <a:prstGeom prst="rect">
             <a:avLst/>
@@ -5590,91 +3896,26 @@
           <a:lstStyle/>
           <a:p>
             <a:pPr>
-              <a:defRPr sz="1600">
-                <a:solidFill>
-                  <a:srgbClr val="666666"/>
-                </a:solidFill>
-              </a:defRPr>
-            </a:pPr>
-            <a:r>
-              <a:t>2025年2月21日に実施概要確認MTGを開催</a:t>
-            </a:r>
-          </a:p>
-        </p:txBody>
-      </p:sp>
-      <p:sp>
-        <p:nvSpPr>
-          <p:cNvPr id="4" name="TextBox 3"/>
-          <p:cNvSpPr txBox="1"/>
-          <p:nvPr/>
-        </p:nvSpPr>
-        <p:spPr>
-          <a:xfrm>
-            <a:off x="457200" y="1097280"/>
-            <a:ext cx="8229600" cy="3200400"/>
-          </a:xfrm>
-          <a:prstGeom prst="rect">
-            <a:avLst/>
-          </a:prstGeom>
-          <a:noFill/>
-        </p:spPr>
-        <p:txBody>
-          <a:bodyPr wrap="square">
-            <a:spAutoFit/>
-          </a:bodyPr>
-          <a:lstStyle/>
-          <a:p>
-            <a:pPr>
-              <a:spcBef>
-                <a:spcPts val="600"/>
-              </a:spcBef>
-              <a:spcAft>
-                <a:spcPts val="600"/>
-              </a:spcAft>
-              <a:defRPr sz="1400">
+              <a:defRPr sz="1800">
                 <a:solidFill>
                   <a:srgbClr val="333333"/>
                 </a:solidFill>
               </a:defRPr>
             </a:pPr>
             <a:r>
-              <a:t>**日時**: 2025年2月21日(金) 16:00～17:00</a:t>
-            </a:r>
-          </a:p>
-          <a:p>
-            <a:pPr>
-              <a:spcBef>
-                <a:spcPts val="600"/>
-              </a:spcBef>
-              <a:spcAft>
-                <a:spcPts val="600"/>
-              </a:spcAft>
-              <a:defRPr sz="1400">
-                <a:solidFill>
-                  <a:srgbClr val="333333"/>
-                </a:solidFill>
-              </a:defRPr>
-            </a:pPr>
-            <a:r>
-              <a:t>**出席**: 匠技研工業様（原様）、KOMMONS（津野）</a:t>
-            </a:r>
-          </a:p>
-          <a:p>
-            <a:pPr>
-              <a:spcBef>
-                <a:spcPts val="600"/>
-              </a:spcBef>
-              <a:spcAft>
-                <a:spcPts val="600"/>
-              </a:spcAft>
-              <a:defRPr sz="1400">
-                <a:solidFill>
-                  <a:srgbClr val="333333"/>
-                </a:solidFill>
-              </a:defRPr>
-            </a:pPr>
-            <a:r>
-              <a:t>**目的**: プロジェクト内容と進め方の確認</a:t>
+              <a:t>稼働時間: 80時間</a:t>
+            </a:r>
+            <a:br/>
+            <a:r>
+              <a:t>PM: 定額課金</a:t>
+            </a:r>
+            <a:br/>
+            <a:r>
+              <a:t>実働: 従量課金</a:t>
+            </a:r>
+            <a:br/>
+            <a:r>
+              <a:t>勤務: リモート（毎日4時間）</a:t>
             </a:r>
           </a:p>
         </p:txBody>
@@ -5713,8 +3954,8 @@
         </p:nvSpPr>
         <p:spPr>
           <a:xfrm>
-            <a:off x="457200" y="274320"/>
-            <a:ext cx="8229600" cy="548640"/>
+            <a:off x="457200" y="365760"/>
+            <a:ext cx="8229600" cy="731520"/>
           </a:xfrm>
           <a:prstGeom prst="rect">
             <a:avLst/>
@@ -5722,20 +3963,20 @@
           <a:noFill/>
         </p:spPr>
         <p:txBody>
-          <a:bodyPr wrap="none">
+          <a:bodyPr wrap="square">
             <a:spAutoFit/>
           </a:bodyPr>
           <a:lstStyle/>
           <a:p>
             <a:pPr>
-              <a:defRPr sz="2400" b="1">
+              <a:defRPr sz="4000" b="1">
                 <a:solidFill>
                   <a:srgbClr val="1E3A5F"/>
                 </a:solidFill>
               </a:defRPr>
             </a:pPr>
             <a:r>
-              <a:t>稼働条件</a:t>
+              <a:t>スケジュール</a:t>
             </a:r>
           </a:p>
         </p:txBody>
@@ -5748,8 +3989,8 @@
         </p:nvSpPr>
         <p:spPr>
           <a:xfrm>
-            <a:off x="457200" y="868680"/>
-            <a:ext cx="8229600" cy="457200"/>
+            <a:off x="457200" y="1280160"/>
+            <a:ext cx="8229600" cy="3474720"/>
           </a:xfrm>
           <a:prstGeom prst="rect">
             <a:avLst/>
@@ -5763,154 +4004,26 @@
           <a:lstStyle/>
           <a:p>
             <a:pPr>
-              <a:defRPr sz="1600">
-                <a:solidFill>
-                  <a:srgbClr val="666666"/>
-                </a:solidFill>
-              </a:defRPr>
-            </a:pPr>
-            <a:r>
-              <a:t>実働メンバーは人数調達状況に応じて決定</a:t>
-            </a:r>
-          </a:p>
-        </p:txBody>
-      </p:sp>
-      <p:sp>
-        <p:nvSpPr>
-          <p:cNvPr id="4" name="TextBox 3"/>
-          <p:cNvSpPr txBox="1"/>
-          <p:nvPr/>
-        </p:nvSpPr>
-        <p:spPr>
-          <a:xfrm>
-            <a:off x="457200" y="1188720"/>
-            <a:ext cx="4023360" cy="365760"/>
-          </a:xfrm>
-          <a:prstGeom prst="rect">
-            <a:avLst/>
-          </a:prstGeom>
-          <a:noFill/>
-        </p:spPr>
-        <p:txBody>
-          <a:bodyPr wrap="none">
-            <a:spAutoFit/>
-          </a:bodyPr>
-          <a:lstStyle/>
-          <a:p>
-            <a:pPr>
-              <a:defRPr sz="1200" b="1">
-                <a:solidFill>
-                  <a:srgbClr val="1E3A5F"/>
-                </a:solidFill>
-              </a:defRPr>
-            </a:pPr>
-            <a:r>
-              <a:t>稼働時間...</a:t>
-            </a:r>
-          </a:p>
-        </p:txBody>
-      </p:sp>
-      <p:sp>
-        <p:nvSpPr>
-          <p:cNvPr id="5" name="TextBox 4"/>
-          <p:cNvSpPr txBox="1"/>
-          <p:nvPr/>
-        </p:nvSpPr>
-        <p:spPr>
-          <a:xfrm>
-            <a:off x="457200" y="1600200"/>
-            <a:ext cx="4023360" cy="2788920"/>
-          </a:xfrm>
-          <a:prstGeom prst="rect">
-            <a:avLst/>
-          </a:prstGeom>
-          <a:noFill/>
-        </p:spPr>
-        <p:txBody>
-          <a:bodyPr wrap="square">
-            <a:spAutoFit/>
-          </a:bodyPr>
-          <a:lstStyle/>
-          <a:p>
-            <a:pPr>
-              <a:defRPr sz="1100">
+              <a:defRPr sz="1800">
                 <a:solidFill>
                   <a:srgbClr val="333333"/>
                 </a:solidFill>
               </a:defRPr>
             </a:pPr>
             <a:r>
-              <a:t>想定80時間での実装</a:t>
-            </a:r>
-          </a:p>
-        </p:txBody>
-      </p:sp>
-      <p:sp>
-        <p:nvSpPr>
-          <p:cNvPr id="6" name="TextBox 5"/>
-          <p:cNvSpPr txBox="1"/>
-          <p:nvPr/>
-        </p:nvSpPr>
-        <p:spPr>
-          <a:xfrm>
-            <a:off x="4663440" y="1188720"/>
-            <a:ext cx="4023360" cy="365760"/>
-          </a:xfrm>
-          <a:prstGeom prst="rect">
-            <a:avLst/>
-          </a:prstGeom>
-          <a:noFill/>
-        </p:spPr>
-        <p:txBody>
-          <a:bodyPr wrap="none">
-            <a:spAutoFit/>
-          </a:bodyPr>
-          <a:lstStyle/>
-          <a:p>
-            <a:pPr>
-              <a:defRPr sz="1200" b="1">
-                <a:solidFill>
-                  <a:srgbClr val="1E3A5F"/>
-                </a:solidFill>
-              </a:defRPr>
-            </a:pPr>
-            <a:r>
-              <a:t>稼働時間...</a:t>
-            </a:r>
-          </a:p>
-        </p:txBody>
-      </p:sp>
-      <p:sp>
-        <p:nvSpPr>
-          <p:cNvPr id="7" name="TextBox 6"/>
-          <p:cNvSpPr txBox="1"/>
-          <p:nvPr/>
-        </p:nvSpPr>
-        <p:spPr>
-          <a:xfrm>
-            <a:off x="4663440" y="1600200"/>
-            <a:ext cx="4023360" cy="2788920"/>
-          </a:xfrm>
-          <a:prstGeom prst="rect">
-            <a:avLst/>
-          </a:prstGeom>
-          <a:noFill/>
-        </p:spPr>
-        <p:txBody>
-          <a:bodyPr wrap="square">
-            <a:spAutoFit/>
-          </a:bodyPr>
-          <a:lstStyle/>
-          <a:p>
-            <a:pPr>
-              <a:defRPr sz="1100">
-                <a:solidFill>
-                  <a:srgbClr val="333333"/>
-                </a:solidFill>
-              </a:defRPr>
-            </a:pPr>
-            <a:r>
-              <a:t>PM：定額課金</a:t>
+              <a:t>稼働開始: 3月3日（月）13:00</a:t>
+            </a:r>
+            <a:br/>
+            <a:r>
+              <a:t>1. 稼働条件すり合わせ</a:t>
+            </a:r>
+            <a:br/>
+            <a:r>
+              <a:t>2. 稼働準備</a:t>
+            </a:r>
+            <a:br/>
+            <a:r>
+              <a:t>3. キックオフMTG開催</a:t>
             </a:r>
           </a:p>
         </p:txBody>
@@ -5929,7 +4042,7 @@
     <p:bg>
       <p:bgPr>
         <a:solidFill>
-          <a:srgbClr val="F5F5F5"/>
+          <a:srgbClr val="FFFFFF"/>
         </a:solidFill>
         <a:effectLst/>
       </p:bgPr>
@@ -5949,8 +4062,8 @@
         </p:nvSpPr>
         <p:spPr>
           <a:xfrm>
-            <a:off x="457200" y="2011680"/>
-            <a:ext cx="8229600" cy="1371600"/>
+            <a:off x="457200" y="365760"/>
+            <a:ext cx="8229600" cy="731520"/>
           </a:xfrm>
           <a:prstGeom prst="rect">
             <a:avLst/>
@@ -5963,15 +4076,58 @@
           </a:bodyPr>
           <a:lstStyle/>
           <a:p>
-            <a:pPr algn="l">
-              <a:defRPr sz="3600" b="1">
+            <a:pPr>
+              <a:defRPr sz="4000" b="1">
+                <a:solidFill>
+                  <a:srgbClr val="1E3A5F"/>
+                </a:solidFill>
+              </a:defRPr>
+            </a:pPr>
+            <a:r>
+              <a:t>Week1（3/3週）</a:t>
+            </a:r>
+          </a:p>
+        </p:txBody>
+      </p:sp>
+      <p:sp>
+        <p:nvSpPr>
+          <p:cNvPr id="3" name="TextBox 2"/>
+          <p:cNvSpPr txBox="1"/>
+          <p:nvPr/>
+        </p:nvSpPr>
+        <p:spPr>
+          <a:xfrm>
+            <a:off x="457200" y="1280160"/>
+            <a:ext cx="8229600" cy="3474720"/>
+          </a:xfrm>
+          <a:prstGeom prst="rect">
+            <a:avLst/>
+          </a:prstGeom>
+          <a:noFill/>
+        </p:spPr>
+        <p:txBody>
+          <a:bodyPr wrap="square">
+            <a:spAutoFit/>
+          </a:bodyPr>
+          <a:lstStyle/>
+          <a:p>
+            <a:pPr>
+              <a:defRPr sz="1800">
                 <a:solidFill>
                   <a:srgbClr val="333333"/>
                 </a:solidFill>
               </a:defRPr>
             </a:pPr>
             <a:r>
-              <a:t>スケジュール</a:t>
+              <a:t>必要なキャッチアップ内容を一通り理解</a:t>
+            </a:r>
+            <a:br/>
+            <a:r>
+              <a:t>・各種レクチャーMTG実施</a:t>
+            </a:r>
+            <a:br/>
+            <a:r>
+              <a:t>・ドメイン知識、ビジネスモデル習得</a:t>
             </a:r>
           </a:p>
         </p:txBody>
@@ -6010,8 +4166,8 @@
         </p:nvSpPr>
         <p:spPr>
           <a:xfrm>
-            <a:off x="457200" y="274320"/>
-            <a:ext cx="8229600" cy="548640"/>
+            <a:off x="457200" y="365760"/>
+            <a:ext cx="8229600" cy="731520"/>
           </a:xfrm>
           <a:prstGeom prst="rect">
             <a:avLst/>
@@ -6019,20 +4175,20 @@
           <a:noFill/>
         </p:spPr>
         <p:txBody>
-          <a:bodyPr wrap="none">
+          <a:bodyPr wrap="square">
             <a:spAutoFit/>
           </a:bodyPr>
           <a:lstStyle/>
           <a:p>
             <a:pPr>
-              <a:defRPr sz="2400" b="1">
+              <a:defRPr sz="4000" b="1">
                 <a:solidFill>
                   <a:srgbClr val="1E3A5F"/>
                 </a:solidFill>
               </a:defRPr>
             </a:pPr>
             <a:r>
-              <a:t>稼働開始までのステップ</a:t>
+              <a:t>Week2（3/10週）</a:t>
             </a:r>
           </a:p>
         </p:txBody>
@@ -6045,8 +4201,8 @@
         </p:nvSpPr>
         <p:spPr>
           <a:xfrm>
-            <a:off x="457200" y="868680"/>
-            <a:ext cx="8229600" cy="457200"/>
+            <a:off x="457200" y="1280160"/>
+            <a:ext cx="8229600" cy="3474720"/>
           </a:xfrm>
           <a:prstGeom prst="rect">
             <a:avLst/>
@@ -6060,109 +4216,22 @@
           <a:lstStyle/>
           <a:p>
             <a:pPr>
-              <a:defRPr sz="1600">
-                <a:solidFill>
-                  <a:srgbClr val="666666"/>
-                </a:solidFill>
-              </a:defRPr>
-            </a:pPr>
-            <a:r>
-              <a:t>契約締結後に以下を実施</a:t>
-            </a:r>
-          </a:p>
-        </p:txBody>
-      </p:sp>
-      <p:sp>
-        <p:nvSpPr>
-          <p:cNvPr id="4" name="TextBox 3"/>
-          <p:cNvSpPr txBox="1"/>
-          <p:nvPr/>
-        </p:nvSpPr>
-        <p:spPr>
-          <a:xfrm>
-            <a:off x="457200" y="1097280"/>
-            <a:ext cx="8229600" cy="3200400"/>
-          </a:xfrm>
-          <a:prstGeom prst="rect">
-            <a:avLst/>
-          </a:prstGeom>
-          <a:noFill/>
-        </p:spPr>
-        <p:txBody>
-          <a:bodyPr wrap="square">
-            <a:spAutoFit/>
-          </a:bodyPr>
-          <a:lstStyle/>
-          <a:p>
-            <a:pPr>
-              <a:defRPr sz="1300" b="1">
-                <a:solidFill>
-                  <a:srgbClr val="3AA899"/>
-                </a:solidFill>
-              </a:defRPr>
-            </a:pPr>
-            <a:r>
-              <a:t>1. **稼働条件の...</a:t>
-            </a:r>
-          </a:p>
-          <a:p>
-            <a:pPr lvl="1">
-              <a:defRPr sz="1100">
+              <a:defRPr sz="1800">
                 <a:solidFill>
                   <a:srgbClr val="333333"/>
                 </a:solidFill>
               </a:defRPr>
             </a:pPr>
             <a:r>
-              <a:t>稼働時間、課金体系、勤務体系を確定</a:t>
-            </a:r>
-          </a:p>
-          <a:p>
-            <a:pPr>
-              <a:defRPr sz="1300" b="1">
-                <a:solidFill>
-                  <a:srgbClr val="3AA899"/>
-                </a:solidFill>
-              </a:defRPr>
-            </a:pPr>
-            <a:r>
-              <a:t>2. **稼働準備**</a:t>
-            </a:r>
-          </a:p>
-          <a:p>
-            <a:pPr lvl="1">
-              <a:defRPr sz="1100">
-                <a:solidFill>
-                  <a:srgbClr val="333333"/>
-                </a:solidFill>
-              </a:defRPr>
-            </a:pPr>
-            <a:r>
-              <a:t>各種アカウント発行、レクチャー準備</a:t>
-            </a:r>
-          </a:p>
-          <a:p>
-            <a:pPr>
-              <a:defRPr sz="1300" b="1">
-                <a:solidFill>
-                  <a:srgbClr val="3AA899"/>
-                </a:solidFill>
-              </a:defRPr>
-            </a:pPr>
-            <a:r>
-              <a:t>3. **稼働開始**</a:t>
-            </a:r>
-          </a:p>
-          <a:p>
-            <a:pPr lvl="1">
-              <a:defRPr sz="1100">
-                <a:solidFill>
-                  <a:srgbClr val="333333"/>
-                </a:solidFill>
-              </a:defRPr>
-            </a:pPr>
-            <a:r>
-              <a:t>キックオフMTG開催（3月3日）</a:t>
+              <a:t>部分的にテックエキスパート業務に対応開始</a:t>
+            </a:r>
+            <a:br/>
+            <a:r>
+              <a:t>・既存顧客修正対応: 1日1-2件</a:t>
+            </a:r>
+            <a:br/>
+            <a:r>
+              <a:t>・基本的な対応フロー習得</a:t>
             </a:r>
           </a:p>
         </p:txBody>
@@ -6201,8 +4270,8 @@
         </p:nvSpPr>
         <p:spPr>
           <a:xfrm>
-            <a:off x="457200" y="274320"/>
-            <a:ext cx="8229600" cy="548640"/>
+            <a:off x="457200" y="365760"/>
+            <a:ext cx="8229600" cy="731520"/>
           </a:xfrm>
           <a:prstGeom prst="rect">
             <a:avLst/>
@@ -6210,20 +4279,20 @@
           <a:noFill/>
         </p:spPr>
         <p:txBody>
-          <a:bodyPr wrap="none">
+          <a:bodyPr wrap="square">
             <a:spAutoFit/>
           </a:bodyPr>
           <a:lstStyle/>
           <a:p>
             <a:pPr>
-              <a:defRPr sz="2400" b="1">
+              <a:defRPr sz="4000" b="1">
                 <a:solidFill>
                   <a:srgbClr val="1E3A5F"/>
                 </a:solidFill>
               </a:defRPr>
             </a:pPr>
             <a:r>
-              <a:t>稼働開始日程</a:t>
+              <a:t>Week3（3/17週）</a:t>
             </a:r>
           </a:p>
         </p:txBody>
@@ -6236,8 +4305,8 @@
         </p:nvSpPr>
         <p:spPr>
           <a:xfrm>
-            <a:off x="457200" y="868680"/>
-            <a:ext cx="8229600" cy="457200"/>
+            <a:off x="457200" y="1280160"/>
+            <a:ext cx="8229600" cy="3474720"/>
           </a:xfrm>
           <a:prstGeom prst="rect">
             <a:avLst/>
@@ -6251,224 +4320,22 @@
           <a:lstStyle/>
           <a:p>
             <a:pPr>
-              <a:defRPr sz="1600">
-                <a:solidFill>
-                  <a:srgbClr val="666666"/>
-                </a:solidFill>
-              </a:defRPr>
-            </a:pPr>
-            <a:r>
-              <a:t>3月3日（月）より本格稼働開始</a:t>
-            </a:r>
-          </a:p>
-        </p:txBody>
-      </p:sp>
-      <p:sp>
-        <p:nvSpPr>
-          <p:cNvPr id="4" name="TextBox 3"/>
-          <p:cNvSpPr txBox="1"/>
-          <p:nvPr/>
-        </p:nvSpPr>
-        <p:spPr>
-          <a:xfrm>
-            <a:off x="457200" y="1188720"/>
-            <a:ext cx="1828800" cy="548640"/>
-          </a:xfrm>
-          <a:prstGeom prst="rect">
-            <a:avLst/>
-          </a:prstGeom>
-          <a:noFill/>
-        </p:spPr>
-        <p:txBody>
-          <a:bodyPr wrap="none">
-            <a:spAutoFit/>
-          </a:bodyPr>
-          <a:lstStyle/>
-          <a:p>
-            <a:pPr>
-              <a:defRPr sz="3600" b="1">
-                <a:solidFill>
-                  <a:srgbClr val="3AA899"/>
-                </a:solidFill>
-              </a:defRPr>
-            </a:pPr>
-            <a:r>
-              <a:t>開始日時</a:t>
-            </a:r>
-          </a:p>
-        </p:txBody>
-      </p:sp>
-      <p:sp>
-        <p:nvSpPr>
-          <p:cNvPr id="5" name="TextBox 4"/>
-          <p:cNvSpPr txBox="1"/>
-          <p:nvPr/>
-        </p:nvSpPr>
-        <p:spPr>
-          <a:xfrm>
-            <a:off x="2011680" y="1325880"/>
-            <a:ext cx="6400800" cy="457200"/>
-          </a:xfrm>
-          <a:prstGeom prst="rect">
-            <a:avLst/>
-          </a:prstGeom>
-          <a:noFill/>
-        </p:spPr>
-        <p:txBody>
-          <a:bodyPr wrap="none">
-            <a:spAutoFit/>
-          </a:bodyPr>
-          <a:lstStyle/>
-          <a:p>
-            <a:pPr>
-              <a:defRPr sz="1200">
+              <a:defRPr sz="1800">
                 <a:solidFill>
                   <a:srgbClr val="333333"/>
                 </a:solidFill>
               </a:defRPr>
             </a:pPr>
             <a:r>
-              <a:t>13:00（出社）</a:t>
-            </a:r>
-          </a:p>
-        </p:txBody>
-      </p:sp>
-      <p:sp>
-        <p:nvSpPr>
-          <p:cNvPr id="6" name="TextBox 5"/>
-          <p:cNvSpPr txBox="1"/>
-          <p:nvPr/>
-        </p:nvSpPr>
-        <p:spPr>
-          <a:xfrm>
-            <a:off x="457200" y="1920240"/>
-            <a:ext cx="1828800" cy="548640"/>
-          </a:xfrm>
-          <a:prstGeom prst="rect">
-            <a:avLst/>
-          </a:prstGeom>
-          <a:noFill/>
-        </p:spPr>
-        <p:txBody>
-          <a:bodyPr wrap="none">
-            <a:spAutoFit/>
-          </a:bodyPr>
-          <a:lstStyle/>
-          <a:p>
-            <a:pPr>
-              <a:defRPr sz="3600" b="1">
-                <a:solidFill>
-                  <a:srgbClr val="3AA899"/>
-                </a:solidFill>
-              </a:defRPr>
-            </a:pPr>
-            <a:r>
-              <a:t>実働時間</a:t>
-            </a:r>
-          </a:p>
-        </p:txBody>
-      </p:sp>
-      <p:sp>
-        <p:nvSpPr>
-          <p:cNvPr id="7" name="TextBox 6"/>
-          <p:cNvSpPr txBox="1"/>
-          <p:nvPr/>
-        </p:nvSpPr>
-        <p:spPr>
-          <a:xfrm>
-            <a:off x="2011680" y="2057400"/>
-            <a:ext cx="6400800" cy="457200"/>
-          </a:xfrm>
-          <a:prstGeom prst="rect">
-            <a:avLst/>
-          </a:prstGeom>
-          <a:noFill/>
-        </p:spPr>
-        <p:txBody>
-          <a:bodyPr wrap="none">
-            <a:spAutoFit/>
-          </a:bodyPr>
-          <a:lstStyle/>
-          <a:p>
-            <a:pPr>
-              <a:defRPr sz="1200">
-                <a:solidFill>
-                  <a:srgbClr val="333333"/>
-                </a:solidFill>
-              </a:defRPr>
-            </a:pPr>
-            <a:r>
-              <a:t>約80時間</a:t>
-            </a:r>
-          </a:p>
-        </p:txBody>
-      </p:sp>
-      <p:sp>
-        <p:nvSpPr>
-          <p:cNvPr id="8" name="TextBox 7"/>
-          <p:cNvSpPr txBox="1"/>
-          <p:nvPr/>
-        </p:nvSpPr>
-        <p:spPr>
-          <a:xfrm>
-            <a:off x="457200" y="2651760"/>
-            <a:ext cx="1828800" cy="548640"/>
-          </a:xfrm>
-          <a:prstGeom prst="rect">
-            <a:avLst/>
-          </a:prstGeom>
-          <a:noFill/>
-        </p:spPr>
-        <p:txBody>
-          <a:bodyPr wrap="none">
-            <a:spAutoFit/>
-          </a:bodyPr>
-          <a:lstStyle/>
-          <a:p>
-            <a:pPr>
-              <a:defRPr sz="3600" b="1">
-                <a:solidFill>
-                  <a:srgbClr val="3AA899"/>
-                </a:solidFill>
-              </a:defRPr>
-            </a:pPr>
-            <a:r>
-              <a:t>勤務体系</a:t>
-            </a:r>
-          </a:p>
-        </p:txBody>
-      </p:sp>
-      <p:sp>
-        <p:nvSpPr>
-          <p:cNvPr id="9" name="TextBox 8"/>
-          <p:cNvSpPr txBox="1"/>
-          <p:nvPr/>
-        </p:nvSpPr>
-        <p:spPr>
-          <a:xfrm>
-            <a:off x="2011680" y="2788920"/>
-            <a:ext cx="6400800" cy="457200"/>
-          </a:xfrm>
-          <a:prstGeom prst="rect">
-            <a:avLst/>
-          </a:prstGeom>
-          <a:noFill/>
-        </p:spPr>
-        <p:txBody>
-          <a:bodyPr wrap="none">
-            <a:spAutoFit/>
-          </a:bodyPr>
-          <a:lstStyle/>
-          <a:p>
-            <a:pPr>
-              <a:defRPr sz="1200">
-                <a:solidFill>
-                  <a:srgbClr val="333333"/>
-                </a:solidFill>
-              </a:defRPr>
-            </a:pPr>
-            <a:r>
-              <a:t>リモート＋毎日...</a:t>
+              <a:t>一通りのテックエキスパート業務に対応可能</a:t>
+            </a:r>
+            <a:br/>
+            <a:r>
+              <a:t>・新規顧客対応: 1週間1-2件</a:t>
+            </a:r>
+            <a:br/>
+            <a:r>
+              <a:t>・人材要件見極め実施</a:t>
             </a:r>
           </a:p>
         </p:txBody>
@@ -6507,8 +4374,8 @@
         </p:nvSpPr>
         <p:spPr>
           <a:xfrm>
-            <a:off x="457200" y="274320"/>
-            <a:ext cx="8229600" cy="548640"/>
+            <a:off x="457200" y="365760"/>
+            <a:ext cx="8229600" cy="731520"/>
           </a:xfrm>
           <a:prstGeom prst="rect">
             <a:avLst/>
@@ -6516,20 +4383,20 @@
           <a:noFill/>
         </p:spPr>
         <p:txBody>
-          <a:bodyPr wrap="none">
+          <a:bodyPr wrap="square">
             <a:spAutoFit/>
           </a:bodyPr>
           <a:lstStyle/>
           <a:p>
             <a:pPr>
-              <a:defRPr sz="2400" b="1">
+              <a:defRPr sz="4000" b="1">
                 <a:solidFill>
                   <a:srgbClr val="1E3A5F"/>
                 </a:solidFill>
               </a:defRPr>
             </a:pPr>
             <a:r>
-              <a:t>キックオフMTG内容</a:t>
+              <a:t>Week4（3/24週）</a:t>
             </a:r>
           </a:p>
         </p:txBody>
@@ -6542,8 +4409,8 @@
         </p:nvSpPr>
         <p:spPr>
           <a:xfrm>
-            <a:off x="457200" y="868680"/>
-            <a:ext cx="8229600" cy="457200"/>
+            <a:off x="457200" y="1280160"/>
+            <a:ext cx="8229600" cy="3474720"/>
           </a:xfrm>
           <a:prstGeom prst="rect">
             <a:avLst/>
@@ -6557,127 +4424,22 @@
           <a:lstStyle/>
           <a:p>
             <a:pPr>
-              <a:defRPr sz="1600">
-                <a:solidFill>
-                  <a:srgbClr val="666666"/>
-                </a:solidFill>
-              </a:defRPr>
-            </a:pPr>
-            <a:r>
-              <a:t>3月3日13時から実施</a:t>
-            </a:r>
-          </a:p>
-        </p:txBody>
-      </p:sp>
-      <p:sp>
-        <p:nvSpPr>
-          <p:cNvPr id="4" name="TextBox 3"/>
-          <p:cNvSpPr txBox="1"/>
-          <p:nvPr/>
-        </p:nvSpPr>
-        <p:spPr>
-          <a:xfrm>
-            <a:off x="457200" y="1097280"/>
-            <a:ext cx="8229600" cy="3200400"/>
-          </a:xfrm>
-          <a:prstGeom prst="rect">
-            <a:avLst/>
-          </a:prstGeom>
-          <a:noFill/>
-        </p:spPr>
-        <p:txBody>
-          <a:bodyPr wrap="square">
-            <a:spAutoFit/>
-          </a:bodyPr>
-          <a:lstStyle/>
-          <a:p>
-            <a:pPr>
-              <a:spcBef>
-                <a:spcPts val="600"/>
-              </a:spcBef>
-              <a:spcAft>
-                <a:spcPts val="600"/>
-              </a:spcAft>
-              <a:defRPr sz="1400">
+              <a:defRPr sz="1800">
                 <a:solidFill>
                   <a:srgbClr val="333333"/>
                 </a:solidFill>
               </a:defRPr>
             </a:pPr>
             <a:r>
-              <a:t>キックオフMTG（本格稼働開始宣言）</a:t>
-            </a:r>
-          </a:p>
-          <a:p>
-            <a:pPr>
-              <a:spcBef>
-                <a:spcPts val="600"/>
-              </a:spcBef>
-              <a:spcAft>
-                <a:spcPts val="600"/>
-              </a:spcAft>
-              <a:defRPr sz="1400">
-                <a:solidFill>
-                  <a:srgbClr val="333333"/>
-                </a:solidFill>
-              </a:defRPr>
-            </a:pPr>
-            <a:r>
-              <a:t>各種システムセットアップ</a:t>
-            </a:r>
-          </a:p>
-          <a:p>
-            <a:pPr>
-              <a:spcBef>
-                <a:spcPts val="600"/>
-              </a:spcBef>
-              <a:spcAft>
-                <a:spcPts val="600"/>
-              </a:spcAft>
-              <a:defRPr sz="1400">
-                <a:solidFill>
-                  <a:srgbClr val="333333"/>
-                </a:solidFill>
-              </a:defRPr>
-            </a:pPr>
-            <a:r>
-              <a:t>プロダクトキャッチアップ</a:t>
-            </a:r>
-          </a:p>
-          <a:p>
-            <a:pPr>
-              <a:spcBef>
-                <a:spcPts val="600"/>
-              </a:spcBef>
-              <a:spcAft>
-                <a:spcPts val="600"/>
-              </a:spcAft>
-              <a:defRPr sz="1400">
-                <a:solidFill>
-                  <a:srgbClr val="333333"/>
-                </a:solidFill>
-              </a:defRPr>
-            </a:pPr>
-            <a:r>
-              <a:t>テックエキスパート業務キャッチアップ</a:t>
-            </a:r>
-          </a:p>
-          <a:p>
-            <a:pPr>
-              <a:spcBef>
-                <a:spcPts val="600"/>
-              </a:spcBef>
-              <a:spcAft>
-                <a:spcPts val="600"/>
-              </a:spcAft>
-              <a:defRPr sz="1400">
-                <a:solidFill>
-                  <a:srgbClr val="333333"/>
-                </a:solidFill>
-              </a:defRPr>
-            </a:pPr>
-            <a:r>
-              <a:t>振り返りMTG（16:15-16:45）</a:t>
+              <a:t>実働メンバーへのレクチャー実施可能</a:t>
+            </a:r>
+            <a:br/>
+            <a:r>
+              <a:t>・他メンバーへの指導開始</a:t>
+            </a:r>
+            <a:br/>
+            <a:r>
+              <a:t>・4月以降の本格運用体制構築</a:t>
             </a:r>
           </a:p>
         </p:txBody>
@@ -6696,7 +4458,7 @@
     <p:bg>
       <p:bgPr>
         <a:solidFill>
-          <a:srgbClr val="F5F5F5"/>
+          <a:srgbClr val="FFFFFF"/>
         </a:solidFill>
         <a:effectLst/>
       </p:bgPr>
@@ -6716,8 +4478,8 @@
         </p:nvSpPr>
         <p:spPr>
           <a:xfrm>
-            <a:off x="457200" y="2011680"/>
-            <a:ext cx="8229600" cy="1371600"/>
+            <a:off x="457200" y="365760"/>
+            <a:ext cx="8229600" cy="731520"/>
           </a:xfrm>
           <a:prstGeom prst="rect">
             <a:avLst/>
@@ -6730,15 +4492,58 @@
           </a:bodyPr>
           <a:lstStyle/>
           <a:p>
-            <a:pPr algn="l">
-              <a:defRPr sz="3600" b="1">
+            <a:pPr>
+              <a:defRPr sz="4000" b="1">
+                <a:solidFill>
+                  <a:srgbClr val="1E3A5F"/>
+                </a:solidFill>
+              </a:defRPr>
+            </a:pPr>
+            <a:r>
+              <a:t>キャッチアップ内容</a:t>
+            </a:r>
+          </a:p>
+        </p:txBody>
+      </p:sp>
+      <p:sp>
+        <p:nvSpPr>
+          <p:cNvPr id="3" name="TextBox 2"/>
+          <p:cNvSpPr txBox="1"/>
+          <p:nvPr/>
+        </p:nvSpPr>
+        <p:spPr>
+          <a:xfrm>
+            <a:off x="457200" y="1280160"/>
+            <a:ext cx="8229600" cy="3474720"/>
+          </a:xfrm>
+          <a:prstGeom prst="rect">
+            <a:avLst/>
+          </a:prstGeom>
+          <a:noFill/>
+        </p:spPr>
+        <p:txBody>
+          <a:bodyPr wrap="square">
+            <a:spAutoFit/>
+          </a:bodyPr>
+          <a:lstStyle/>
+          <a:p>
+            <a:pPr>
+              <a:defRPr sz="1800">
                 <a:solidFill>
                   <a:srgbClr val="333333"/>
                 </a:solidFill>
               </a:defRPr>
             </a:pPr>
             <a:r>
-              <a:t>オンボーディング計画</a:t>
+              <a:t>ドメイン知識、ビジネスモデル</a:t>
+            </a:r>
+            <a:br/>
+            <a:r>
+              <a:t>組織図、プロダクト</a:t>
+            </a:r>
+            <a:br/>
+            <a:r>
+              <a:t>CS業務フロー、テックエキスパート業務</a:t>
             </a:r>
           </a:p>
         </p:txBody>

--- a/匠技研工業プロジェクト_オンボーディング計画.pptx
+++ b/匠技研工業プロジェクト_オンボーディング計画.pptx
@@ -3111,28 +3111,21 @@
       <p:grpSpPr/>
       <p:sp>
         <p:nvSpPr>
-          <p:cNvPr id="2" name="TextBox 1"/>
-          <p:cNvSpPr txBox="1"/>
-          <p:nvPr/>
-        </p:nvSpPr>
-        <p:spPr>
-          <a:xfrm>
-            <a:off x="457200" y="365760"/>
-            <a:ext cx="8229600" cy="731520"/>
-          </a:xfrm>
-          <a:prstGeom prst="rect">
-            <a:avLst/>
-          </a:prstGeom>
-          <a:noFill/>
-        </p:spPr>
-        <p:txBody>
-          <a:bodyPr wrap="square">
-            <a:spAutoFit/>
-          </a:bodyPr>
-          <a:lstStyle/>
-          <a:p>
-            <a:pPr>
-              <a:defRPr sz="4000" b="1">
+          <p:cNvPr id="2" name="Title 1"/>
+          <p:cNvSpPr>
+            <a:spLocks noGrp="1"/>
+          </p:cNvSpPr>
+          <p:nvPr>
+            <p:ph type="ctrTitle"/>
+          </p:nvPr>
+        </p:nvSpPr>
+        <p:spPr/>
+        <p:txBody>
+          <a:bodyPr/>
+          <a:lstStyle/>
+          <a:p>
+            <a:pPr>
+              <a:defRPr sz="4400" b="1">
                 <a:solidFill>
                   <a:srgbClr val="1E3A5F"/>
                 </a:solidFill>
@@ -3146,37 +3139,19 @@
       </p:sp>
       <p:sp>
         <p:nvSpPr>
-          <p:cNvPr id="3" name="TextBox 2"/>
-          <p:cNvSpPr txBox="1"/>
-          <p:nvPr/>
-        </p:nvSpPr>
-        <p:spPr>
-          <a:xfrm>
-            <a:off x="457200" y="1280160"/>
-            <a:ext cx="8229600" cy="3474720"/>
-          </a:xfrm>
-          <a:prstGeom prst="rect">
-            <a:avLst/>
-          </a:prstGeom>
-          <a:noFill/>
-        </p:spPr>
-        <p:txBody>
-          <a:bodyPr wrap="square">
-            <a:spAutoFit/>
-          </a:bodyPr>
-          <a:lstStyle/>
-          <a:p>
-            <a:pPr>
-              <a:defRPr sz="1800">
-                <a:solidFill>
-                  <a:srgbClr val="333333"/>
-                </a:solidFill>
-              </a:defRPr>
-            </a:pPr>
-            <a:r>
-              <a:t>オンボーディング計画とスケジュール</a:t>
-            </a:r>
-          </a:p>
+          <p:cNvPr id="3" name="Subtitle 2"/>
+          <p:cNvSpPr>
+            <a:spLocks noGrp="1"/>
+          </p:cNvSpPr>
+          <p:nvPr>
+            <p:ph type="subTitle" idx="1"/>
+          </p:nvPr>
+        </p:nvSpPr>
+        <p:spPr/>
+        <p:txBody>
+          <a:bodyPr/>
+          <a:lstStyle/>
+          <a:p/>
         </p:txBody>
       </p:sp>
     </p:spTree>
@@ -3207,28 +3182,21 @@
       <p:grpSpPr/>
       <p:sp>
         <p:nvSpPr>
-          <p:cNvPr id="2" name="TextBox 1"/>
-          <p:cNvSpPr txBox="1"/>
-          <p:nvPr/>
-        </p:nvSpPr>
-        <p:spPr>
-          <a:xfrm>
-            <a:off x="457200" y="365760"/>
-            <a:ext cx="8229600" cy="731520"/>
-          </a:xfrm>
-          <a:prstGeom prst="rect">
-            <a:avLst/>
-          </a:prstGeom>
-          <a:noFill/>
-        </p:spPr>
-        <p:txBody>
-          <a:bodyPr wrap="square">
-            <a:spAutoFit/>
-          </a:bodyPr>
-          <a:lstStyle/>
-          <a:p>
-            <a:pPr>
-              <a:defRPr sz="4000" b="1">
+          <p:cNvPr id="2" name="Title 1"/>
+          <p:cNvSpPr>
+            <a:spLocks noGrp="1"/>
+          </p:cNvSpPr>
+          <p:nvPr>
+            <p:ph type="title"/>
+          </p:nvPr>
+        </p:nvSpPr>
+        <p:spPr/>
+        <p:txBody>
+          <a:bodyPr/>
+          <a:lstStyle/>
+          <a:p>
+            <a:pPr>
+              <a:defRPr sz="4400" b="1">
                 <a:solidFill>
                   <a:srgbClr val="1E3A5F"/>
                 </a:solidFill>
@@ -3242,24 +3210,17 @@
       </p:sp>
       <p:sp>
         <p:nvSpPr>
-          <p:cNvPr id="3" name="TextBox 2"/>
-          <p:cNvSpPr txBox="1"/>
-          <p:nvPr/>
-        </p:nvSpPr>
-        <p:spPr>
-          <a:xfrm>
-            <a:off x="457200" y="1280160"/>
-            <a:ext cx="8229600" cy="3474720"/>
-          </a:xfrm>
-          <a:prstGeom prst="rect">
-            <a:avLst/>
-          </a:prstGeom>
-          <a:noFill/>
-        </p:spPr>
-        <p:txBody>
-          <a:bodyPr wrap="square">
-            <a:spAutoFit/>
-          </a:bodyPr>
+          <p:cNvPr id="3" name="Content Placeholder 2"/>
+          <p:cNvSpPr>
+            <a:spLocks noGrp="1"/>
+          </p:cNvSpPr>
+          <p:nvPr>
+            <p:ph idx="1"/>
+          </p:nvPr>
+        </p:nvSpPr>
+        <p:spPr/>
+        <p:txBody>
+          <a:bodyPr/>
           <a:lstStyle/>
           <a:p>
             <a:pPr>
@@ -3272,15 +3233,39 @@
             <a:r>
               <a:t>Google Workspace</a:t>
             </a:r>
-            <a:br/>
+          </a:p>
+          <a:p>
+            <a:pPr>
+              <a:defRPr sz="1800">
+                <a:solidFill>
+                  <a:srgbClr val="333333"/>
+                </a:solidFill>
+              </a:defRPr>
+            </a:pPr>
             <a:r>
               <a:t>Slack</a:t>
             </a:r>
-            <a:br/>
+          </a:p>
+          <a:p>
+            <a:pPr>
+              <a:defRPr sz="1800">
+                <a:solidFill>
+                  <a:srgbClr val="333333"/>
+                </a:solidFill>
+              </a:defRPr>
+            </a:pPr>
             <a:r>
               <a:t>Notion</a:t>
             </a:r>
-            <a:br/>
+          </a:p>
+          <a:p>
+            <a:pPr>
+              <a:defRPr sz="1800">
+                <a:solidFill>
+                  <a:srgbClr val="333333"/>
+                </a:solidFill>
+              </a:defRPr>
+            </a:pPr>
             <a:r>
               <a:t>匠フォース（社内システム）</a:t>
             </a:r>
@@ -3315,28 +3300,21 @@
       <p:grpSpPr/>
       <p:sp>
         <p:nvSpPr>
-          <p:cNvPr id="2" name="TextBox 1"/>
-          <p:cNvSpPr txBox="1"/>
-          <p:nvPr/>
-        </p:nvSpPr>
-        <p:spPr>
-          <a:xfrm>
-            <a:off x="457200" y="365760"/>
-            <a:ext cx="8229600" cy="731520"/>
-          </a:xfrm>
-          <a:prstGeom prst="rect">
-            <a:avLst/>
-          </a:prstGeom>
-          <a:noFill/>
-        </p:spPr>
-        <p:txBody>
-          <a:bodyPr wrap="square">
-            <a:spAutoFit/>
-          </a:bodyPr>
-          <a:lstStyle/>
-          <a:p>
-            <a:pPr>
-              <a:defRPr sz="4000" b="1">
+          <p:cNvPr id="2" name="Title 1"/>
+          <p:cNvSpPr>
+            <a:spLocks noGrp="1"/>
+          </p:cNvSpPr>
+          <p:nvPr>
+            <p:ph type="title"/>
+          </p:nvPr>
+        </p:nvSpPr>
+        <p:spPr/>
+        <p:txBody>
+          <a:bodyPr/>
+          <a:lstStyle/>
+          <a:p>
+            <a:pPr>
+              <a:defRPr sz="4400" b="1">
                 <a:solidFill>
                   <a:srgbClr val="1E3A5F"/>
                 </a:solidFill>
@@ -3350,24 +3328,17 @@
       </p:sp>
       <p:sp>
         <p:nvSpPr>
-          <p:cNvPr id="3" name="TextBox 2"/>
-          <p:cNvSpPr txBox="1"/>
-          <p:nvPr/>
-        </p:nvSpPr>
-        <p:spPr>
-          <a:xfrm>
-            <a:off x="457200" y="1280160"/>
-            <a:ext cx="8229600" cy="3474720"/>
-          </a:xfrm>
-          <a:prstGeom prst="rect">
-            <a:avLst/>
-          </a:prstGeom>
-          <a:noFill/>
-        </p:spPr>
-        <p:txBody>
-          <a:bodyPr wrap="square">
-            <a:spAutoFit/>
-          </a:bodyPr>
+          <p:cNvPr id="3" name="Content Placeholder 2"/>
+          <p:cNvSpPr>
+            <a:spLocks noGrp="1"/>
+          </p:cNvSpPr>
+          <p:nvPr>
+            <p:ph idx="1"/>
+          </p:nvPr>
+        </p:nvSpPr>
+        <p:spPr/>
+        <p:txBody>
+          <a:bodyPr/>
           <a:lstStyle/>
           <a:p>
             <a:pPr>
@@ -3380,11 +3351,27 @@
             <a:r>
               <a:t>メイン: 原様</a:t>
             </a:r>
-            <a:br/>
+          </a:p>
+          <a:p>
+            <a:pPr>
+              <a:defRPr sz="1800">
+                <a:solidFill>
+                  <a:srgbClr val="333333"/>
+                </a:solidFill>
+              </a:defRPr>
+            </a:pPr>
             <a:r>
               <a:t>サブサポート: 高木さん、中野さん</a:t>
             </a:r>
-            <a:br/>
+          </a:p>
+          <a:p>
+            <a:pPr>
+              <a:defRPr sz="1800">
+                <a:solidFill>
+                  <a:srgbClr val="333333"/>
+                </a:solidFill>
+              </a:defRPr>
+            </a:pPr>
             <a:r>
               <a:t>体系化: レクチャー内容の整理・ドキュメント化</a:t>
             </a:r>
@@ -3419,28 +3406,21 @@
       <p:grpSpPr/>
       <p:sp>
         <p:nvSpPr>
-          <p:cNvPr id="2" name="TextBox 1"/>
-          <p:cNvSpPr txBox="1"/>
-          <p:nvPr/>
-        </p:nvSpPr>
-        <p:spPr>
-          <a:xfrm>
-            <a:off x="457200" y="365760"/>
-            <a:ext cx="8229600" cy="731520"/>
-          </a:xfrm>
-          <a:prstGeom prst="rect">
-            <a:avLst/>
-          </a:prstGeom>
-          <a:noFill/>
-        </p:spPr>
-        <p:txBody>
-          <a:bodyPr wrap="square">
-            <a:spAutoFit/>
-          </a:bodyPr>
-          <a:lstStyle/>
-          <a:p>
-            <a:pPr>
-              <a:defRPr sz="4000" b="1">
+          <p:cNvPr id="2" name="Title 1"/>
+          <p:cNvSpPr>
+            <a:spLocks noGrp="1"/>
+          </p:cNvSpPr>
+          <p:nvPr>
+            <p:ph type="title"/>
+          </p:nvPr>
+        </p:nvSpPr>
+        <p:spPr/>
+        <p:txBody>
+          <a:bodyPr/>
+          <a:lstStyle/>
+          <a:p>
+            <a:pPr>
+              <a:defRPr sz="4400" b="1">
                 <a:solidFill>
                   <a:srgbClr val="1E3A5F"/>
                 </a:solidFill>
@@ -3454,24 +3434,17 @@
       </p:sp>
       <p:sp>
         <p:nvSpPr>
-          <p:cNvPr id="3" name="TextBox 2"/>
-          <p:cNvSpPr txBox="1"/>
-          <p:nvPr/>
-        </p:nvSpPr>
-        <p:spPr>
-          <a:xfrm>
-            <a:off x="457200" y="1280160"/>
-            <a:ext cx="8229600" cy="3474720"/>
-          </a:xfrm>
-          <a:prstGeom prst="rect">
-            <a:avLst/>
-          </a:prstGeom>
-          <a:noFill/>
-        </p:spPr>
-        <p:txBody>
-          <a:bodyPr wrap="square">
-            <a:spAutoFit/>
-          </a:bodyPr>
+          <p:cNvPr id="3" name="Content Placeholder 2"/>
+          <p:cNvSpPr>
+            <a:spLocks noGrp="1"/>
+          </p:cNvSpPr>
+          <p:nvPr>
+            <p:ph idx="1"/>
+          </p:nvPr>
+        </p:nvSpPr>
+        <p:spPr/>
+        <p:txBody>
+          <a:bodyPr/>
           <a:lstStyle/>
           <a:p>
             <a:pPr>
@@ -3484,16 +3457,48 @@
             <a:r>
               <a:t>Q: Slackチャンネル参加範囲は？</a:t>
             </a:r>
-            <a:br/>
+          </a:p>
+          <a:p>
+            <a:pPr>
+              <a:defRPr sz="1800">
+                <a:solidFill>
+                  <a:srgbClr val="333333"/>
+                </a:solidFill>
+              </a:defRPr>
+            </a:pPr>
             <a:r>
               <a:t>A: 現状のみか他チャンネルも確認要</a:t>
             </a:r>
-            <a:br/>
-            <a:br/>
+          </a:p>
+          <a:p>
+            <a:pPr>
+              <a:defRPr sz="1800">
+                <a:solidFill>
+                  <a:srgbClr val="333333"/>
+                </a:solidFill>
+              </a:defRPr>
+            </a:pPr>
+          </a:p>
+          <a:p>
+            <a:pPr>
+              <a:defRPr sz="1800">
+                <a:solidFill>
+                  <a:srgbClr val="333333"/>
+                </a:solidFill>
+              </a:defRPr>
+            </a:pPr>
             <a:r>
               <a:t>Q: アカウント発行タイムライン？</a:t>
             </a:r>
-            <a:br/>
+          </a:p>
+          <a:p>
+            <a:pPr>
+              <a:defRPr sz="1800">
+                <a:solidFill>
+                  <a:srgbClr val="333333"/>
+                </a:solidFill>
+              </a:defRPr>
+            </a:pPr>
             <a:r>
               <a:t>A: 契約後速やかに実施</a:t>
             </a:r>
@@ -3528,28 +3533,21 @@
       <p:grpSpPr/>
       <p:sp>
         <p:nvSpPr>
-          <p:cNvPr id="2" name="TextBox 1"/>
-          <p:cNvSpPr txBox="1"/>
-          <p:nvPr/>
-        </p:nvSpPr>
-        <p:spPr>
-          <a:xfrm>
-            <a:off x="457200" y="365760"/>
-            <a:ext cx="8229600" cy="731520"/>
-          </a:xfrm>
-          <a:prstGeom prst="rect">
-            <a:avLst/>
-          </a:prstGeom>
-          <a:noFill/>
-        </p:spPr>
-        <p:txBody>
-          <a:bodyPr wrap="square">
-            <a:spAutoFit/>
-          </a:bodyPr>
-          <a:lstStyle/>
-          <a:p>
-            <a:pPr>
-              <a:defRPr sz="4000" b="1">
+          <p:cNvPr id="2" name="Title 1"/>
+          <p:cNvSpPr>
+            <a:spLocks noGrp="1"/>
+          </p:cNvSpPr>
+          <p:nvPr>
+            <p:ph type="title"/>
+          </p:nvPr>
+        </p:nvSpPr>
+        <p:spPr/>
+        <p:txBody>
+          <a:bodyPr/>
+          <a:lstStyle/>
+          <a:p>
+            <a:pPr>
+              <a:defRPr sz="4400" b="1">
                 <a:solidFill>
                   <a:srgbClr val="1E3A5F"/>
                 </a:solidFill>
@@ -3563,24 +3561,17 @@
       </p:sp>
       <p:sp>
         <p:nvSpPr>
-          <p:cNvPr id="3" name="TextBox 2"/>
-          <p:cNvSpPr txBox="1"/>
-          <p:nvPr/>
-        </p:nvSpPr>
-        <p:spPr>
-          <a:xfrm>
-            <a:off x="457200" y="1280160"/>
-            <a:ext cx="8229600" cy="3474720"/>
-          </a:xfrm>
-          <a:prstGeom prst="rect">
-            <a:avLst/>
-          </a:prstGeom>
-          <a:noFill/>
-        </p:spPr>
-        <p:txBody>
-          <a:bodyPr wrap="square">
-            <a:spAutoFit/>
-          </a:bodyPr>
+          <p:cNvPr id="3" name="Content Placeholder 2"/>
+          <p:cNvSpPr>
+            <a:spLocks noGrp="1"/>
+          </p:cNvSpPr>
+          <p:nvPr>
+            <p:ph idx="1"/>
+          </p:nvPr>
+        </p:nvSpPr>
+        <p:spPr/>
+        <p:txBody>
+          <a:bodyPr/>
           <a:lstStyle/>
           <a:p>
             <a:pPr>
@@ -3593,11 +3584,27 @@
             <a:r>
               <a:t>匠技研工業様: アカウント準備、Slack確認</a:t>
             </a:r>
-            <a:br/>
+          </a:p>
+          <a:p>
+            <a:pPr>
+              <a:defRPr sz="1800">
+                <a:solidFill>
+                  <a:srgbClr val="333333"/>
+                </a:solidFill>
+              </a:defRPr>
+            </a:pPr>
             <a:r>
               <a:t>KOMMONS: 契約手続き、アカウント発行</a:t>
             </a:r>
-            <a:br/>
+          </a:p>
+          <a:p>
+            <a:pPr>
+              <a:defRPr sz="1800">
+                <a:solidFill>
+                  <a:srgbClr val="333333"/>
+                </a:solidFill>
+              </a:defRPr>
+            </a:pPr>
             <a:r>
               <a:t>レクチャー資料の整備</a:t>
             </a:r>
@@ -3632,28 +3639,21 @@
       <p:grpSpPr/>
       <p:sp>
         <p:nvSpPr>
-          <p:cNvPr id="2" name="TextBox 1"/>
-          <p:cNvSpPr txBox="1"/>
-          <p:nvPr/>
-        </p:nvSpPr>
-        <p:spPr>
-          <a:xfrm>
-            <a:off x="457200" y="365760"/>
-            <a:ext cx="8229600" cy="731520"/>
-          </a:xfrm>
-          <a:prstGeom prst="rect">
-            <a:avLst/>
-          </a:prstGeom>
-          <a:noFill/>
-        </p:spPr>
-        <p:txBody>
-          <a:bodyPr wrap="square">
-            <a:spAutoFit/>
-          </a:bodyPr>
-          <a:lstStyle/>
-          <a:p>
-            <a:pPr>
-              <a:defRPr sz="4000" b="1">
+          <p:cNvPr id="2" name="Title 1"/>
+          <p:cNvSpPr>
+            <a:spLocks noGrp="1"/>
+          </p:cNvSpPr>
+          <p:nvPr>
+            <p:ph type="title"/>
+          </p:nvPr>
+        </p:nvSpPr>
+        <p:spPr/>
+        <p:txBody>
+          <a:bodyPr/>
+          <a:lstStyle/>
+          <a:p>
+            <a:pPr>
+              <a:defRPr sz="4400" b="1">
                 <a:solidFill>
                   <a:srgbClr val="1E3A5F"/>
                 </a:solidFill>
@@ -3667,24 +3667,17 @@
       </p:sp>
       <p:sp>
         <p:nvSpPr>
-          <p:cNvPr id="3" name="TextBox 2"/>
-          <p:cNvSpPr txBox="1"/>
-          <p:nvPr/>
-        </p:nvSpPr>
-        <p:spPr>
-          <a:xfrm>
-            <a:off x="457200" y="1280160"/>
-            <a:ext cx="8229600" cy="3474720"/>
-          </a:xfrm>
-          <a:prstGeom prst="rect">
-            <a:avLst/>
-          </a:prstGeom>
-          <a:noFill/>
-        </p:spPr>
-        <p:txBody>
-          <a:bodyPr wrap="square">
-            <a:spAutoFit/>
-          </a:bodyPr>
+          <p:cNvPr id="3" name="Content Placeholder 2"/>
+          <p:cNvSpPr>
+            <a:spLocks noGrp="1"/>
+          </p:cNvSpPr>
+          <p:nvPr>
+            <p:ph idx="1"/>
+          </p:nvPr>
+        </p:nvSpPr>
+        <p:spPr/>
+        <p:txBody>
+          <a:bodyPr/>
           <a:lstStyle/>
           <a:p>
             <a:pPr>
@@ -3697,11 +3690,27 @@
             <a:r>
               <a:t>ご契約・アカウント準備を急ぎ進め</a:t>
             </a:r>
-            <a:br/>
+          </a:p>
+          <a:p>
+            <a:pPr>
+              <a:defRPr sz="1800">
+                <a:solidFill>
+                  <a:srgbClr val="333333"/>
+                </a:solidFill>
+              </a:defRPr>
+            </a:pPr>
             <a:r>
               <a:t>3月3日稼働開始に向けて準備を加速</a:t>
             </a:r>
-            <a:br/>
+          </a:p>
+          <a:p>
+            <a:pPr>
+              <a:defRPr sz="1800">
+                <a:solidFill>
+                  <a:srgbClr val="333333"/>
+                </a:solidFill>
+              </a:defRPr>
+            </a:pPr>
             <a:r>
               <a:t>スケジュール確定までの関係者調整</a:t>
             </a:r>
@@ -3736,28 +3745,21 @@
       <p:grpSpPr/>
       <p:sp>
         <p:nvSpPr>
-          <p:cNvPr id="2" name="TextBox 1"/>
-          <p:cNvSpPr txBox="1"/>
-          <p:nvPr/>
-        </p:nvSpPr>
-        <p:spPr>
-          <a:xfrm>
-            <a:off x="457200" y="365760"/>
-            <a:ext cx="8229600" cy="731520"/>
-          </a:xfrm>
-          <a:prstGeom prst="rect">
-            <a:avLst/>
-          </a:prstGeom>
-          <a:noFill/>
-        </p:spPr>
-        <p:txBody>
-          <a:bodyPr wrap="square">
-            <a:spAutoFit/>
-          </a:bodyPr>
-          <a:lstStyle/>
-          <a:p>
-            <a:pPr>
-              <a:defRPr sz="4000" b="1">
+          <p:cNvPr id="2" name="Title 1"/>
+          <p:cNvSpPr>
+            <a:spLocks noGrp="1"/>
+          </p:cNvSpPr>
+          <p:nvPr>
+            <p:ph type="title"/>
+          </p:nvPr>
+        </p:nvSpPr>
+        <p:spPr/>
+        <p:txBody>
+          <a:bodyPr/>
+          <a:lstStyle/>
+          <a:p>
+            <a:pPr>
+              <a:defRPr sz="4400" b="1">
                 <a:solidFill>
                   <a:srgbClr val="1E3A5F"/>
                 </a:solidFill>
@@ -3771,24 +3773,17 @@
       </p:sp>
       <p:sp>
         <p:nvSpPr>
-          <p:cNvPr id="3" name="TextBox 2"/>
-          <p:cNvSpPr txBox="1"/>
-          <p:nvPr/>
-        </p:nvSpPr>
-        <p:spPr>
-          <a:xfrm>
-            <a:off x="457200" y="1280160"/>
-            <a:ext cx="8229600" cy="3474720"/>
-          </a:xfrm>
-          <a:prstGeom prst="rect">
-            <a:avLst/>
-          </a:prstGeom>
-          <a:noFill/>
-        </p:spPr>
-        <p:txBody>
-          <a:bodyPr wrap="square">
-            <a:spAutoFit/>
-          </a:bodyPr>
+          <p:cNvPr id="3" name="Content Placeholder 2"/>
+          <p:cNvSpPr>
+            <a:spLocks noGrp="1"/>
+          </p:cNvSpPr>
+          <p:nvPr>
+            <p:ph idx="1"/>
+          </p:nvPr>
+        </p:nvSpPr>
+        <p:spPr/>
+        <p:txBody>
+          <a:bodyPr/>
           <a:lstStyle/>
           <a:p>
             <a:pPr>
@@ -3801,11 +3796,27 @@
             <a:r>
               <a:t>2025年2月21日に実施概要確認MTGを開催</a:t>
             </a:r>
-            <a:br/>
+          </a:p>
+          <a:p>
+            <a:pPr>
+              <a:defRPr sz="1800">
+                <a:solidFill>
+                  <a:srgbClr val="333333"/>
+                </a:solidFill>
+              </a:defRPr>
+            </a:pPr>
             <a:r>
               <a:t>日時: 2月21日 16:00-17:00</a:t>
             </a:r>
-            <a:br/>
+          </a:p>
+          <a:p>
+            <a:pPr>
+              <a:defRPr sz="1800">
+                <a:solidFill>
+                  <a:srgbClr val="333333"/>
+                </a:solidFill>
+              </a:defRPr>
+            </a:pPr>
             <a:r>
               <a:t>出席: 匠技研工業様（原様）、KOMMONS（津野）</a:t>
             </a:r>
@@ -3840,28 +3851,21 @@
       <p:grpSpPr/>
       <p:sp>
         <p:nvSpPr>
-          <p:cNvPr id="2" name="TextBox 1"/>
-          <p:cNvSpPr txBox="1"/>
-          <p:nvPr/>
-        </p:nvSpPr>
-        <p:spPr>
-          <a:xfrm>
-            <a:off x="457200" y="365760"/>
-            <a:ext cx="8229600" cy="731520"/>
-          </a:xfrm>
-          <a:prstGeom prst="rect">
-            <a:avLst/>
-          </a:prstGeom>
-          <a:noFill/>
-        </p:spPr>
-        <p:txBody>
-          <a:bodyPr wrap="square">
-            <a:spAutoFit/>
-          </a:bodyPr>
-          <a:lstStyle/>
-          <a:p>
-            <a:pPr>
-              <a:defRPr sz="4000" b="1">
+          <p:cNvPr id="2" name="Title 1"/>
+          <p:cNvSpPr>
+            <a:spLocks noGrp="1"/>
+          </p:cNvSpPr>
+          <p:nvPr>
+            <p:ph type="title"/>
+          </p:nvPr>
+        </p:nvSpPr>
+        <p:spPr/>
+        <p:txBody>
+          <a:bodyPr/>
+          <a:lstStyle/>
+          <a:p>
+            <a:pPr>
+              <a:defRPr sz="4400" b="1">
                 <a:solidFill>
                   <a:srgbClr val="1E3A5F"/>
                 </a:solidFill>
@@ -3875,24 +3879,17 @@
       </p:sp>
       <p:sp>
         <p:nvSpPr>
-          <p:cNvPr id="3" name="TextBox 2"/>
-          <p:cNvSpPr txBox="1"/>
-          <p:nvPr/>
-        </p:nvSpPr>
-        <p:spPr>
-          <a:xfrm>
-            <a:off x="457200" y="1280160"/>
-            <a:ext cx="8229600" cy="3474720"/>
-          </a:xfrm>
-          <a:prstGeom prst="rect">
-            <a:avLst/>
-          </a:prstGeom>
-          <a:noFill/>
-        </p:spPr>
-        <p:txBody>
-          <a:bodyPr wrap="square">
-            <a:spAutoFit/>
-          </a:bodyPr>
+          <p:cNvPr id="3" name="Content Placeholder 2"/>
+          <p:cNvSpPr>
+            <a:spLocks noGrp="1"/>
+          </p:cNvSpPr>
+          <p:nvPr>
+            <p:ph idx="1"/>
+          </p:nvPr>
+        </p:nvSpPr>
+        <p:spPr/>
+        <p:txBody>
+          <a:bodyPr/>
           <a:lstStyle/>
           <a:p>
             <a:pPr>
@@ -3905,15 +3902,39 @@
             <a:r>
               <a:t>稼働時間: 80時間</a:t>
             </a:r>
-            <a:br/>
+          </a:p>
+          <a:p>
+            <a:pPr>
+              <a:defRPr sz="1800">
+                <a:solidFill>
+                  <a:srgbClr val="333333"/>
+                </a:solidFill>
+              </a:defRPr>
+            </a:pPr>
             <a:r>
               <a:t>PM: 定額課金</a:t>
             </a:r>
-            <a:br/>
+          </a:p>
+          <a:p>
+            <a:pPr>
+              <a:defRPr sz="1800">
+                <a:solidFill>
+                  <a:srgbClr val="333333"/>
+                </a:solidFill>
+              </a:defRPr>
+            </a:pPr>
             <a:r>
               <a:t>実働: 従量課金</a:t>
             </a:r>
-            <a:br/>
+          </a:p>
+          <a:p>
+            <a:pPr>
+              <a:defRPr sz="1800">
+                <a:solidFill>
+                  <a:srgbClr val="333333"/>
+                </a:solidFill>
+              </a:defRPr>
+            </a:pPr>
             <a:r>
               <a:t>勤務: リモート（毎日4時間）</a:t>
             </a:r>
@@ -3948,28 +3969,21 @@
       <p:grpSpPr/>
       <p:sp>
         <p:nvSpPr>
-          <p:cNvPr id="2" name="TextBox 1"/>
-          <p:cNvSpPr txBox="1"/>
-          <p:nvPr/>
-        </p:nvSpPr>
-        <p:spPr>
-          <a:xfrm>
-            <a:off x="457200" y="365760"/>
-            <a:ext cx="8229600" cy="731520"/>
-          </a:xfrm>
-          <a:prstGeom prst="rect">
-            <a:avLst/>
-          </a:prstGeom>
-          <a:noFill/>
-        </p:spPr>
-        <p:txBody>
-          <a:bodyPr wrap="square">
-            <a:spAutoFit/>
-          </a:bodyPr>
-          <a:lstStyle/>
-          <a:p>
-            <a:pPr>
-              <a:defRPr sz="4000" b="1">
+          <p:cNvPr id="2" name="Title 1"/>
+          <p:cNvSpPr>
+            <a:spLocks noGrp="1"/>
+          </p:cNvSpPr>
+          <p:nvPr>
+            <p:ph type="title"/>
+          </p:nvPr>
+        </p:nvSpPr>
+        <p:spPr/>
+        <p:txBody>
+          <a:bodyPr/>
+          <a:lstStyle/>
+          <a:p>
+            <a:pPr>
+              <a:defRPr sz="4400" b="1">
                 <a:solidFill>
                   <a:srgbClr val="1E3A5F"/>
                 </a:solidFill>
@@ -3983,24 +3997,17 @@
       </p:sp>
       <p:sp>
         <p:nvSpPr>
-          <p:cNvPr id="3" name="TextBox 2"/>
-          <p:cNvSpPr txBox="1"/>
-          <p:nvPr/>
-        </p:nvSpPr>
-        <p:spPr>
-          <a:xfrm>
-            <a:off x="457200" y="1280160"/>
-            <a:ext cx="8229600" cy="3474720"/>
-          </a:xfrm>
-          <a:prstGeom prst="rect">
-            <a:avLst/>
-          </a:prstGeom>
-          <a:noFill/>
-        </p:spPr>
-        <p:txBody>
-          <a:bodyPr wrap="square">
-            <a:spAutoFit/>
-          </a:bodyPr>
+          <p:cNvPr id="3" name="Content Placeholder 2"/>
+          <p:cNvSpPr>
+            <a:spLocks noGrp="1"/>
+          </p:cNvSpPr>
+          <p:nvPr>
+            <p:ph idx="1"/>
+          </p:nvPr>
+        </p:nvSpPr>
+        <p:spPr/>
+        <p:txBody>
+          <a:bodyPr/>
           <a:lstStyle/>
           <a:p>
             <a:pPr>
@@ -4013,15 +4020,39 @@
             <a:r>
               <a:t>稼働開始: 3月3日（月）13:00</a:t>
             </a:r>
-            <a:br/>
+          </a:p>
+          <a:p>
+            <a:pPr>
+              <a:defRPr sz="1800">
+                <a:solidFill>
+                  <a:srgbClr val="333333"/>
+                </a:solidFill>
+              </a:defRPr>
+            </a:pPr>
             <a:r>
               <a:t>1. 稼働条件すり合わせ</a:t>
             </a:r>
-            <a:br/>
+          </a:p>
+          <a:p>
+            <a:pPr>
+              <a:defRPr sz="1800">
+                <a:solidFill>
+                  <a:srgbClr val="333333"/>
+                </a:solidFill>
+              </a:defRPr>
+            </a:pPr>
             <a:r>
               <a:t>2. 稼働準備</a:t>
             </a:r>
-            <a:br/>
+          </a:p>
+          <a:p>
+            <a:pPr>
+              <a:defRPr sz="1800">
+                <a:solidFill>
+                  <a:srgbClr val="333333"/>
+                </a:solidFill>
+              </a:defRPr>
+            </a:pPr>
             <a:r>
               <a:t>3. キックオフMTG開催</a:t>
             </a:r>
@@ -4056,28 +4087,21 @@
       <p:grpSpPr/>
       <p:sp>
         <p:nvSpPr>
-          <p:cNvPr id="2" name="TextBox 1"/>
-          <p:cNvSpPr txBox="1"/>
-          <p:nvPr/>
-        </p:nvSpPr>
-        <p:spPr>
-          <a:xfrm>
-            <a:off x="457200" y="365760"/>
-            <a:ext cx="8229600" cy="731520"/>
-          </a:xfrm>
-          <a:prstGeom prst="rect">
-            <a:avLst/>
-          </a:prstGeom>
-          <a:noFill/>
-        </p:spPr>
-        <p:txBody>
-          <a:bodyPr wrap="square">
-            <a:spAutoFit/>
-          </a:bodyPr>
-          <a:lstStyle/>
-          <a:p>
-            <a:pPr>
-              <a:defRPr sz="4000" b="1">
+          <p:cNvPr id="2" name="Title 1"/>
+          <p:cNvSpPr>
+            <a:spLocks noGrp="1"/>
+          </p:cNvSpPr>
+          <p:nvPr>
+            <p:ph type="title"/>
+          </p:nvPr>
+        </p:nvSpPr>
+        <p:spPr/>
+        <p:txBody>
+          <a:bodyPr/>
+          <a:lstStyle/>
+          <a:p>
+            <a:pPr>
+              <a:defRPr sz="4400" b="1">
                 <a:solidFill>
                   <a:srgbClr val="1E3A5F"/>
                 </a:solidFill>
@@ -4091,24 +4115,17 @@
       </p:sp>
       <p:sp>
         <p:nvSpPr>
-          <p:cNvPr id="3" name="TextBox 2"/>
-          <p:cNvSpPr txBox="1"/>
-          <p:nvPr/>
-        </p:nvSpPr>
-        <p:spPr>
-          <a:xfrm>
-            <a:off x="457200" y="1280160"/>
-            <a:ext cx="8229600" cy="3474720"/>
-          </a:xfrm>
-          <a:prstGeom prst="rect">
-            <a:avLst/>
-          </a:prstGeom>
-          <a:noFill/>
-        </p:spPr>
-        <p:txBody>
-          <a:bodyPr wrap="square">
-            <a:spAutoFit/>
-          </a:bodyPr>
+          <p:cNvPr id="3" name="Content Placeholder 2"/>
+          <p:cNvSpPr>
+            <a:spLocks noGrp="1"/>
+          </p:cNvSpPr>
+          <p:nvPr>
+            <p:ph idx="1"/>
+          </p:nvPr>
+        </p:nvSpPr>
+        <p:spPr/>
+        <p:txBody>
+          <a:bodyPr/>
           <a:lstStyle/>
           <a:p>
             <a:pPr>
@@ -4121,11 +4138,27 @@
             <a:r>
               <a:t>必要なキャッチアップ内容を一通り理解</a:t>
             </a:r>
-            <a:br/>
+          </a:p>
+          <a:p>
+            <a:pPr>
+              <a:defRPr sz="1800">
+                <a:solidFill>
+                  <a:srgbClr val="333333"/>
+                </a:solidFill>
+              </a:defRPr>
+            </a:pPr>
             <a:r>
               <a:t>・各種レクチャーMTG実施</a:t>
             </a:r>
-            <a:br/>
+          </a:p>
+          <a:p>
+            <a:pPr>
+              <a:defRPr sz="1800">
+                <a:solidFill>
+                  <a:srgbClr val="333333"/>
+                </a:solidFill>
+              </a:defRPr>
+            </a:pPr>
             <a:r>
               <a:t>・ドメイン知識、ビジネスモデル習得</a:t>
             </a:r>
@@ -4160,28 +4193,21 @@
       <p:grpSpPr/>
       <p:sp>
         <p:nvSpPr>
-          <p:cNvPr id="2" name="TextBox 1"/>
-          <p:cNvSpPr txBox="1"/>
-          <p:nvPr/>
-        </p:nvSpPr>
-        <p:spPr>
-          <a:xfrm>
-            <a:off x="457200" y="365760"/>
-            <a:ext cx="8229600" cy="731520"/>
-          </a:xfrm>
-          <a:prstGeom prst="rect">
-            <a:avLst/>
-          </a:prstGeom>
-          <a:noFill/>
-        </p:spPr>
-        <p:txBody>
-          <a:bodyPr wrap="square">
-            <a:spAutoFit/>
-          </a:bodyPr>
-          <a:lstStyle/>
-          <a:p>
-            <a:pPr>
-              <a:defRPr sz="4000" b="1">
+          <p:cNvPr id="2" name="Title 1"/>
+          <p:cNvSpPr>
+            <a:spLocks noGrp="1"/>
+          </p:cNvSpPr>
+          <p:nvPr>
+            <p:ph type="title"/>
+          </p:nvPr>
+        </p:nvSpPr>
+        <p:spPr/>
+        <p:txBody>
+          <a:bodyPr/>
+          <a:lstStyle/>
+          <a:p>
+            <a:pPr>
+              <a:defRPr sz="4400" b="1">
                 <a:solidFill>
                   <a:srgbClr val="1E3A5F"/>
                 </a:solidFill>
@@ -4195,24 +4221,17 @@
       </p:sp>
       <p:sp>
         <p:nvSpPr>
-          <p:cNvPr id="3" name="TextBox 2"/>
-          <p:cNvSpPr txBox="1"/>
-          <p:nvPr/>
-        </p:nvSpPr>
-        <p:spPr>
-          <a:xfrm>
-            <a:off x="457200" y="1280160"/>
-            <a:ext cx="8229600" cy="3474720"/>
-          </a:xfrm>
-          <a:prstGeom prst="rect">
-            <a:avLst/>
-          </a:prstGeom>
-          <a:noFill/>
-        </p:spPr>
-        <p:txBody>
-          <a:bodyPr wrap="square">
-            <a:spAutoFit/>
-          </a:bodyPr>
+          <p:cNvPr id="3" name="Content Placeholder 2"/>
+          <p:cNvSpPr>
+            <a:spLocks noGrp="1"/>
+          </p:cNvSpPr>
+          <p:nvPr>
+            <p:ph idx="1"/>
+          </p:nvPr>
+        </p:nvSpPr>
+        <p:spPr/>
+        <p:txBody>
+          <a:bodyPr/>
           <a:lstStyle/>
           <a:p>
             <a:pPr>
@@ -4225,11 +4244,27 @@
             <a:r>
               <a:t>部分的にテックエキスパート業務に対応開始</a:t>
             </a:r>
-            <a:br/>
+          </a:p>
+          <a:p>
+            <a:pPr>
+              <a:defRPr sz="1800">
+                <a:solidFill>
+                  <a:srgbClr val="333333"/>
+                </a:solidFill>
+              </a:defRPr>
+            </a:pPr>
             <a:r>
               <a:t>・既存顧客修正対応: 1日1-2件</a:t>
             </a:r>
-            <a:br/>
+          </a:p>
+          <a:p>
+            <a:pPr>
+              <a:defRPr sz="1800">
+                <a:solidFill>
+                  <a:srgbClr val="333333"/>
+                </a:solidFill>
+              </a:defRPr>
+            </a:pPr>
             <a:r>
               <a:t>・基本的な対応フロー習得</a:t>
             </a:r>
@@ -4264,28 +4299,21 @@
       <p:grpSpPr/>
       <p:sp>
         <p:nvSpPr>
-          <p:cNvPr id="2" name="TextBox 1"/>
-          <p:cNvSpPr txBox="1"/>
-          <p:nvPr/>
-        </p:nvSpPr>
-        <p:spPr>
-          <a:xfrm>
-            <a:off x="457200" y="365760"/>
-            <a:ext cx="8229600" cy="731520"/>
-          </a:xfrm>
-          <a:prstGeom prst="rect">
-            <a:avLst/>
-          </a:prstGeom>
-          <a:noFill/>
-        </p:spPr>
-        <p:txBody>
-          <a:bodyPr wrap="square">
-            <a:spAutoFit/>
-          </a:bodyPr>
-          <a:lstStyle/>
-          <a:p>
-            <a:pPr>
-              <a:defRPr sz="4000" b="1">
+          <p:cNvPr id="2" name="Title 1"/>
+          <p:cNvSpPr>
+            <a:spLocks noGrp="1"/>
+          </p:cNvSpPr>
+          <p:nvPr>
+            <p:ph type="title"/>
+          </p:nvPr>
+        </p:nvSpPr>
+        <p:spPr/>
+        <p:txBody>
+          <a:bodyPr/>
+          <a:lstStyle/>
+          <a:p>
+            <a:pPr>
+              <a:defRPr sz="4400" b="1">
                 <a:solidFill>
                   <a:srgbClr val="1E3A5F"/>
                 </a:solidFill>
@@ -4299,24 +4327,17 @@
       </p:sp>
       <p:sp>
         <p:nvSpPr>
-          <p:cNvPr id="3" name="TextBox 2"/>
-          <p:cNvSpPr txBox="1"/>
-          <p:nvPr/>
-        </p:nvSpPr>
-        <p:spPr>
-          <a:xfrm>
-            <a:off x="457200" y="1280160"/>
-            <a:ext cx="8229600" cy="3474720"/>
-          </a:xfrm>
-          <a:prstGeom prst="rect">
-            <a:avLst/>
-          </a:prstGeom>
-          <a:noFill/>
-        </p:spPr>
-        <p:txBody>
-          <a:bodyPr wrap="square">
-            <a:spAutoFit/>
-          </a:bodyPr>
+          <p:cNvPr id="3" name="Content Placeholder 2"/>
+          <p:cNvSpPr>
+            <a:spLocks noGrp="1"/>
+          </p:cNvSpPr>
+          <p:nvPr>
+            <p:ph idx="1"/>
+          </p:nvPr>
+        </p:nvSpPr>
+        <p:spPr/>
+        <p:txBody>
+          <a:bodyPr/>
           <a:lstStyle/>
           <a:p>
             <a:pPr>
@@ -4329,11 +4350,27 @@
             <a:r>
               <a:t>一通りのテックエキスパート業務に対応可能</a:t>
             </a:r>
-            <a:br/>
+          </a:p>
+          <a:p>
+            <a:pPr>
+              <a:defRPr sz="1800">
+                <a:solidFill>
+                  <a:srgbClr val="333333"/>
+                </a:solidFill>
+              </a:defRPr>
+            </a:pPr>
             <a:r>
               <a:t>・新規顧客対応: 1週間1-2件</a:t>
             </a:r>
-            <a:br/>
+          </a:p>
+          <a:p>
+            <a:pPr>
+              <a:defRPr sz="1800">
+                <a:solidFill>
+                  <a:srgbClr val="333333"/>
+                </a:solidFill>
+              </a:defRPr>
+            </a:pPr>
             <a:r>
               <a:t>・人材要件見極め実施</a:t>
             </a:r>
@@ -4368,28 +4405,21 @@
       <p:grpSpPr/>
       <p:sp>
         <p:nvSpPr>
-          <p:cNvPr id="2" name="TextBox 1"/>
-          <p:cNvSpPr txBox="1"/>
-          <p:nvPr/>
-        </p:nvSpPr>
-        <p:spPr>
-          <a:xfrm>
-            <a:off x="457200" y="365760"/>
-            <a:ext cx="8229600" cy="731520"/>
-          </a:xfrm>
-          <a:prstGeom prst="rect">
-            <a:avLst/>
-          </a:prstGeom>
-          <a:noFill/>
-        </p:spPr>
-        <p:txBody>
-          <a:bodyPr wrap="square">
-            <a:spAutoFit/>
-          </a:bodyPr>
-          <a:lstStyle/>
-          <a:p>
-            <a:pPr>
-              <a:defRPr sz="4000" b="1">
+          <p:cNvPr id="2" name="Title 1"/>
+          <p:cNvSpPr>
+            <a:spLocks noGrp="1"/>
+          </p:cNvSpPr>
+          <p:nvPr>
+            <p:ph type="title"/>
+          </p:nvPr>
+        </p:nvSpPr>
+        <p:spPr/>
+        <p:txBody>
+          <a:bodyPr/>
+          <a:lstStyle/>
+          <a:p>
+            <a:pPr>
+              <a:defRPr sz="4400" b="1">
                 <a:solidFill>
                   <a:srgbClr val="1E3A5F"/>
                 </a:solidFill>
@@ -4403,24 +4433,17 @@
       </p:sp>
       <p:sp>
         <p:nvSpPr>
-          <p:cNvPr id="3" name="TextBox 2"/>
-          <p:cNvSpPr txBox="1"/>
-          <p:nvPr/>
-        </p:nvSpPr>
-        <p:spPr>
-          <a:xfrm>
-            <a:off x="457200" y="1280160"/>
-            <a:ext cx="8229600" cy="3474720"/>
-          </a:xfrm>
-          <a:prstGeom prst="rect">
-            <a:avLst/>
-          </a:prstGeom>
-          <a:noFill/>
-        </p:spPr>
-        <p:txBody>
-          <a:bodyPr wrap="square">
-            <a:spAutoFit/>
-          </a:bodyPr>
+          <p:cNvPr id="3" name="Content Placeholder 2"/>
+          <p:cNvSpPr>
+            <a:spLocks noGrp="1"/>
+          </p:cNvSpPr>
+          <p:nvPr>
+            <p:ph idx="1"/>
+          </p:nvPr>
+        </p:nvSpPr>
+        <p:spPr/>
+        <p:txBody>
+          <a:bodyPr/>
           <a:lstStyle/>
           <a:p>
             <a:pPr>
@@ -4433,11 +4456,27 @@
             <a:r>
               <a:t>実働メンバーへのレクチャー実施可能</a:t>
             </a:r>
-            <a:br/>
+          </a:p>
+          <a:p>
+            <a:pPr>
+              <a:defRPr sz="1800">
+                <a:solidFill>
+                  <a:srgbClr val="333333"/>
+                </a:solidFill>
+              </a:defRPr>
+            </a:pPr>
             <a:r>
               <a:t>・他メンバーへの指導開始</a:t>
             </a:r>
-            <a:br/>
+          </a:p>
+          <a:p>
+            <a:pPr>
+              <a:defRPr sz="1800">
+                <a:solidFill>
+                  <a:srgbClr val="333333"/>
+                </a:solidFill>
+              </a:defRPr>
+            </a:pPr>
             <a:r>
               <a:t>・4月以降の本格運用体制構築</a:t>
             </a:r>
@@ -4472,28 +4511,21 @@
       <p:grpSpPr/>
       <p:sp>
         <p:nvSpPr>
-          <p:cNvPr id="2" name="TextBox 1"/>
-          <p:cNvSpPr txBox="1"/>
-          <p:nvPr/>
-        </p:nvSpPr>
-        <p:spPr>
-          <a:xfrm>
-            <a:off x="457200" y="365760"/>
-            <a:ext cx="8229600" cy="731520"/>
-          </a:xfrm>
-          <a:prstGeom prst="rect">
-            <a:avLst/>
-          </a:prstGeom>
-          <a:noFill/>
-        </p:spPr>
-        <p:txBody>
-          <a:bodyPr wrap="square">
-            <a:spAutoFit/>
-          </a:bodyPr>
-          <a:lstStyle/>
-          <a:p>
-            <a:pPr>
-              <a:defRPr sz="4000" b="1">
+          <p:cNvPr id="2" name="Title 1"/>
+          <p:cNvSpPr>
+            <a:spLocks noGrp="1"/>
+          </p:cNvSpPr>
+          <p:nvPr>
+            <p:ph type="title"/>
+          </p:nvPr>
+        </p:nvSpPr>
+        <p:spPr/>
+        <p:txBody>
+          <a:bodyPr/>
+          <a:lstStyle/>
+          <a:p>
+            <a:pPr>
+              <a:defRPr sz="4400" b="1">
                 <a:solidFill>
                   <a:srgbClr val="1E3A5F"/>
                 </a:solidFill>
@@ -4507,24 +4539,17 @@
       </p:sp>
       <p:sp>
         <p:nvSpPr>
-          <p:cNvPr id="3" name="TextBox 2"/>
-          <p:cNvSpPr txBox="1"/>
-          <p:nvPr/>
-        </p:nvSpPr>
-        <p:spPr>
-          <a:xfrm>
-            <a:off x="457200" y="1280160"/>
-            <a:ext cx="8229600" cy="3474720"/>
-          </a:xfrm>
-          <a:prstGeom prst="rect">
-            <a:avLst/>
-          </a:prstGeom>
-          <a:noFill/>
-        </p:spPr>
-        <p:txBody>
-          <a:bodyPr wrap="square">
-            <a:spAutoFit/>
-          </a:bodyPr>
+          <p:cNvPr id="3" name="Content Placeholder 2"/>
+          <p:cNvSpPr>
+            <a:spLocks noGrp="1"/>
+          </p:cNvSpPr>
+          <p:nvPr>
+            <p:ph idx="1"/>
+          </p:nvPr>
+        </p:nvSpPr>
+        <p:spPr/>
+        <p:txBody>
+          <a:bodyPr/>
           <a:lstStyle/>
           <a:p>
             <a:pPr>
@@ -4537,11 +4562,27 @@
             <a:r>
               <a:t>ドメイン知識、ビジネスモデル</a:t>
             </a:r>
-            <a:br/>
+          </a:p>
+          <a:p>
+            <a:pPr>
+              <a:defRPr sz="1800">
+                <a:solidFill>
+                  <a:srgbClr val="333333"/>
+                </a:solidFill>
+              </a:defRPr>
+            </a:pPr>
             <a:r>
               <a:t>組織図、プロダクト</a:t>
             </a:r>
-            <a:br/>
+          </a:p>
+          <a:p>
+            <a:pPr>
+              <a:defRPr sz="1800">
+                <a:solidFill>
+                  <a:srgbClr val="333333"/>
+                </a:solidFill>
+              </a:defRPr>
+            </a:pPr>
             <a:r>
               <a:t>CS業務フロー、テックエキスパート業務</a:t>
             </a:r>

--- a/匠技研工業プロジェクト_オンボーディング計画.pptx
+++ b/匠技研工業プロジェクト_オンボーディング計画.pptx
@@ -3111,21 +3111,28 @@
       <p:grpSpPr/>
       <p:sp>
         <p:nvSpPr>
-          <p:cNvPr id="2" name="Title 1"/>
-          <p:cNvSpPr>
-            <a:spLocks noGrp="1"/>
-          </p:cNvSpPr>
-          <p:nvPr>
-            <p:ph type="ctrTitle"/>
-          </p:nvPr>
-        </p:nvSpPr>
-        <p:spPr/>
-        <p:txBody>
-          <a:bodyPr/>
-          <a:lstStyle/>
-          <a:p>
-            <a:pPr>
-              <a:defRPr sz="4400" b="1">
+          <p:cNvPr id="2" name="TextBox 1"/>
+          <p:cNvSpPr txBox="1"/>
+          <p:nvPr/>
+        </p:nvSpPr>
+        <p:spPr>
+          <a:xfrm>
+            <a:off x="457200" y="1828800"/>
+            <a:ext cx="8229600" cy="1371600"/>
+          </a:xfrm>
+          <a:prstGeom prst="rect">
+            <a:avLst/>
+          </a:prstGeom>
+          <a:noFill/>
+        </p:spPr>
+        <p:txBody>
+          <a:bodyPr wrap="none">
+            <a:spAutoFit/>
+          </a:bodyPr>
+          <a:lstStyle/>
+          <a:p>
+            <a:pPr algn="ctr">
+              <a:defRPr sz="5400" b="1">
                 <a:solidFill>
                   <a:srgbClr val="1E3A5F"/>
                 </a:solidFill>
@@ -3139,19 +3146,37 @@
       </p:sp>
       <p:sp>
         <p:nvSpPr>
-          <p:cNvPr id="3" name="Subtitle 2"/>
-          <p:cNvSpPr>
-            <a:spLocks noGrp="1"/>
-          </p:cNvSpPr>
-          <p:nvPr>
-            <p:ph type="subTitle" idx="1"/>
-          </p:nvPr>
-        </p:nvSpPr>
-        <p:spPr/>
-        <p:txBody>
-          <a:bodyPr/>
-          <a:lstStyle/>
-          <a:p/>
+          <p:cNvPr id="3" name="TextBox 2"/>
+          <p:cNvSpPr txBox="1"/>
+          <p:nvPr/>
+        </p:nvSpPr>
+        <p:spPr>
+          <a:xfrm>
+            <a:off x="457200" y="3200400"/>
+            <a:ext cx="8229600" cy="914400"/>
+          </a:xfrm>
+          <a:prstGeom prst="rect">
+            <a:avLst/>
+          </a:prstGeom>
+          <a:noFill/>
+        </p:spPr>
+        <p:txBody>
+          <a:bodyPr wrap="none">
+            <a:spAutoFit/>
+          </a:bodyPr>
+          <a:lstStyle/>
+          <a:p>
+            <a:pPr algn="ctr">
+              <a:defRPr sz="2400">
+                <a:solidFill>
+                  <a:srgbClr val="4682B4"/>
+                </a:solidFill>
+              </a:defRPr>
+            </a:pPr>
+            <a:r>
+              <a:t>オンボーディング計画とスケジュール</a:t>
+            </a:r>
+          </a:p>
         </p:txBody>
       </p:sp>
     </p:spTree>
@@ -3168,7 +3193,7 @@
     <p:bg>
       <p:bgPr>
         <a:solidFill>
-          <a:srgbClr val="FFFFFF"/>
+          <a:srgbClr val="F5F8FA"/>
         </a:solidFill>
         <a:effectLst/>
       </p:bgPr>
@@ -3182,23 +3207,75 @@
       <p:grpSpPr/>
       <p:sp>
         <p:nvSpPr>
-          <p:cNvPr id="2" name="Title 1"/>
-          <p:cNvSpPr>
-            <a:spLocks noGrp="1"/>
-          </p:cNvSpPr>
-          <p:nvPr>
-            <p:ph type="title"/>
-          </p:nvPr>
-        </p:nvSpPr>
-        <p:spPr/>
-        <p:txBody>
-          <a:bodyPr/>
+          <p:cNvPr id="2" name="Rectangle 1"/>
+          <p:cNvSpPr/>
+          <p:nvPr/>
+        </p:nvSpPr>
+        <p:spPr>
+          <a:xfrm>
+            <a:off x="0" y="0"/>
+            <a:ext cx="9144000" cy="731520"/>
+          </a:xfrm>
+          <a:prstGeom prst="rect">
+            <a:avLst/>
+          </a:prstGeom>
+          <a:solidFill>
+            <a:srgbClr val="1E3A5F"/>
+          </a:solidFill>
+          <a:ln>
+            <a:solidFill>
+              <a:srgbClr val="1E3A5F"/>
+            </a:solidFill>
+          </a:ln>
+        </p:spPr>
+        <p:style>
+          <a:lnRef idx="1">
+            <a:schemeClr val="accent1"/>
+          </a:lnRef>
+          <a:fillRef idx="3">
+            <a:schemeClr val="accent1"/>
+          </a:fillRef>
+          <a:effectRef idx="2">
+            <a:schemeClr val="accent1"/>
+          </a:effectRef>
+          <a:fontRef idx="minor">
+            <a:schemeClr val="lt1"/>
+          </a:fontRef>
+        </p:style>
+        <p:txBody>
+          <a:bodyPr rtlCol="0" anchor="ctr"/>
+          <a:lstStyle/>
+          <a:p>
+            <a:pPr algn="ctr"/>
+          </a:p>
+        </p:txBody>
+      </p:sp>
+      <p:sp>
+        <p:nvSpPr>
+          <p:cNvPr id="3" name="TextBox 2"/>
+          <p:cNvSpPr txBox="1"/>
+          <p:nvPr/>
+        </p:nvSpPr>
+        <p:spPr>
+          <a:xfrm>
+            <a:off x="457200" y="91440"/>
+            <a:ext cx="8229600" cy="548640"/>
+          </a:xfrm>
+          <a:prstGeom prst="rect">
+            <a:avLst/>
+          </a:prstGeom>
+          <a:noFill/>
+        </p:spPr>
+        <p:txBody>
+          <a:bodyPr wrap="none">
+            <a:spAutoFit/>
+          </a:bodyPr>
           <a:lstStyle/>
           <a:p>
             <a:pPr>
-              <a:defRPr sz="4400" b="1">
-                <a:solidFill>
-                  <a:srgbClr val="1E3A5F"/>
+              <a:defRPr sz="3200" b="1">
+                <a:solidFill>
+                  <a:srgbClr val="FFFFFF"/>
                 </a:solidFill>
               </a:defRPr>
             </a:pPr>
@@ -3210,20 +3287,33 @@
       </p:sp>
       <p:sp>
         <p:nvSpPr>
-          <p:cNvPr id="3" name="Content Placeholder 2"/>
-          <p:cNvSpPr>
-            <a:spLocks noGrp="1"/>
-          </p:cNvSpPr>
-          <p:nvPr>
-            <p:ph idx="1"/>
-          </p:nvPr>
-        </p:nvSpPr>
-        <p:spPr/>
-        <p:txBody>
-          <a:bodyPr/>
+          <p:cNvPr id="4" name="TextBox 3"/>
+          <p:cNvSpPr txBox="1"/>
+          <p:nvPr/>
+        </p:nvSpPr>
+        <p:spPr>
+          <a:xfrm>
+            <a:off x="731520" y="1097280"/>
+            <a:ext cx="7680960" cy="3657600"/>
+          </a:xfrm>
+          <a:prstGeom prst="rect">
+            <a:avLst/>
+          </a:prstGeom>
+          <a:noFill/>
+        </p:spPr>
+        <p:txBody>
+          <a:bodyPr wrap="square">
+            <a:spAutoFit/>
+          </a:bodyPr>
           <a:lstStyle/>
           <a:p>
             <a:pPr>
+              <a:spcBef>
+                <a:spcPts val="400"/>
+              </a:spcBef>
+              <a:spcAft>
+                <a:spcPts val="400"/>
+              </a:spcAft>
               <a:defRPr sz="1800">
                 <a:solidFill>
                   <a:srgbClr val="333333"/>
@@ -3236,6 +3326,12 @@
           </a:p>
           <a:p>
             <a:pPr>
+              <a:spcBef>
+                <a:spcPts val="400"/>
+              </a:spcBef>
+              <a:spcAft>
+                <a:spcPts val="400"/>
+              </a:spcAft>
               <a:defRPr sz="1800">
                 <a:solidFill>
                   <a:srgbClr val="333333"/>
@@ -3248,6 +3344,12 @@
           </a:p>
           <a:p>
             <a:pPr>
+              <a:spcBef>
+                <a:spcPts val="400"/>
+              </a:spcBef>
+              <a:spcAft>
+                <a:spcPts val="400"/>
+              </a:spcAft>
               <a:defRPr sz="1800">
                 <a:solidFill>
                   <a:srgbClr val="333333"/>
@@ -3260,6 +3362,12 @@
           </a:p>
           <a:p>
             <a:pPr>
+              <a:spcBef>
+                <a:spcPts val="400"/>
+              </a:spcBef>
+              <a:spcAft>
+                <a:spcPts val="400"/>
+              </a:spcAft>
               <a:defRPr sz="1800">
                 <a:solidFill>
                   <a:srgbClr val="333333"/>
@@ -3286,7 +3394,7 @@
     <p:bg>
       <p:bgPr>
         <a:solidFill>
-          <a:srgbClr val="FFFFFF"/>
+          <a:srgbClr val="F5F8FA"/>
         </a:solidFill>
         <a:effectLst/>
       </p:bgPr>
@@ -3300,23 +3408,75 @@
       <p:grpSpPr/>
       <p:sp>
         <p:nvSpPr>
-          <p:cNvPr id="2" name="Title 1"/>
-          <p:cNvSpPr>
-            <a:spLocks noGrp="1"/>
-          </p:cNvSpPr>
-          <p:nvPr>
-            <p:ph type="title"/>
-          </p:nvPr>
-        </p:nvSpPr>
-        <p:spPr/>
-        <p:txBody>
-          <a:bodyPr/>
+          <p:cNvPr id="2" name="Rectangle 1"/>
+          <p:cNvSpPr/>
+          <p:nvPr/>
+        </p:nvSpPr>
+        <p:spPr>
+          <a:xfrm>
+            <a:off x="0" y="0"/>
+            <a:ext cx="9144000" cy="731520"/>
+          </a:xfrm>
+          <a:prstGeom prst="rect">
+            <a:avLst/>
+          </a:prstGeom>
+          <a:solidFill>
+            <a:srgbClr val="1E3A5F"/>
+          </a:solidFill>
+          <a:ln>
+            <a:solidFill>
+              <a:srgbClr val="1E3A5F"/>
+            </a:solidFill>
+          </a:ln>
+        </p:spPr>
+        <p:style>
+          <a:lnRef idx="1">
+            <a:schemeClr val="accent1"/>
+          </a:lnRef>
+          <a:fillRef idx="3">
+            <a:schemeClr val="accent1"/>
+          </a:fillRef>
+          <a:effectRef idx="2">
+            <a:schemeClr val="accent1"/>
+          </a:effectRef>
+          <a:fontRef idx="minor">
+            <a:schemeClr val="lt1"/>
+          </a:fontRef>
+        </p:style>
+        <p:txBody>
+          <a:bodyPr rtlCol="0" anchor="ctr"/>
+          <a:lstStyle/>
+          <a:p>
+            <a:pPr algn="ctr"/>
+          </a:p>
+        </p:txBody>
+      </p:sp>
+      <p:sp>
+        <p:nvSpPr>
+          <p:cNvPr id="3" name="TextBox 2"/>
+          <p:cNvSpPr txBox="1"/>
+          <p:nvPr/>
+        </p:nvSpPr>
+        <p:spPr>
+          <a:xfrm>
+            <a:off x="457200" y="91440"/>
+            <a:ext cx="8229600" cy="548640"/>
+          </a:xfrm>
+          <a:prstGeom prst="rect">
+            <a:avLst/>
+          </a:prstGeom>
+          <a:noFill/>
+        </p:spPr>
+        <p:txBody>
+          <a:bodyPr wrap="none">
+            <a:spAutoFit/>
+          </a:bodyPr>
           <a:lstStyle/>
           <a:p>
             <a:pPr>
-              <a:defRPr sz="4400" b="1">
-                <a:solidFill>
-                  <a:srgbClr val="1E3A5F"/>
+              <a:defRPr sz="3200" b="1">
+                <a:solidFill>
+                  <a:srgbClr val="FFFFFF"/>
                 </a:solidFill>
               </a:defRPr>
             </a:pPr>
@@ -3328,20 +3488,33 @@
       </p:sp>
       <p:sp>
         <p:nvSpPr>
-          <p:cNvPr id="3" name="Content Placeholder 2"/>
-          <p:cNvSpPr>
-            <a:spLocks noGrp="1"/>
-          </p:cNvSpPr>
-          <p:nvPr>
-            <p:ph idx="1"/>
-          </p:nvPr>
-        </p:nvSpPr>
-        <p:spPr/>
-        <p:txBody>
-          <a:bodyPr/>
+          <p:cNvPr id="4" name="TextBox 3"/>
+          <p:cNvSpPr txBox="1"/>
+          <p:nvPr/>
+        </p:nvSpPr>
+        <p:spPr>
+          <a:xfrm>
+            <a:off x="731520" y="1097280"/>
+            <a:ext cx="7680960" cy="3657600"/>
+          </a:xfrm>
+          <a:prstGeom prst="rect">
+            <a:avLst/>
+          </a:prstGeom>
+          <a:noFill/>
+        </p:spPr>
+        <p:txBody>
+          <a:bodyPr wrap="square">
+            <a:spAutoFit/>
+          </a:bodyPr>
           <a:lstStyle/>
           <a:p>
             <a:pPr>
+              <a:spcBef>
+                <a:spcPts val="400"/>
+              </a:spcBef>
+              <a:spcAft>
+                <a:spcPts val="400"/>
+              </a:spcAft>
               <a:defRPr sz="1800">
                 <a:solidFill>
                   <a:srgbClr val="333333"/>
@@ -3354,6 +3527,12 @@
           </a:p>
           <a:p>
             <a:pPr>
+              <a:spcBef>
+                <a:spcPts val="400"/>
+              </a:spcBef>
+              <a:spcAft>
+                <a:spcPts val="400"/>
+              </a:spcAft>
               <a:defRPr sz="1800">
                 <a:solidFill>
                   <a:srgbClr val="333333"/>
@@ -3366,6 +3545,12 @@
           </a:p>
           <a:p>
             <a:pPr>
+              <a:spcBef>
+                <a:spcPts val="400"/>
+              </a:spcBef>
+              <a:spcAft>
+                <a:spcPts val="400"/>
+              </a:spcAft>
               <a:defRPr sz="1800">
                 <a:solidFill>
                   <a:srgbClr val="333333"/>
@@ -3392,7 +3577,7 @@
     <p:bg>
       <p:bgPr>
         <a:solidFill>
-          <a:srgbClr val="FFFFFF"/>
+          <a:srgbClr val="F5F8FA"/>
         </a:solidFill>
         <a:effectLst/>
       </p:bgPr>
@@ -3406,23 +3591,75 @@
       <p:grpSpPr/>
       <p:sp>
         <p:nvSpPr>
-          <p:cNvPr id="2" name="Title 1"/>
-          <p:cNvSpPr>
-            <a:spLocks noGrp="1"/>
-          </p:cNvSpPr>
-          <p:nvPr>
-            <p:ph type="title"/>
-          </p:nvPr>
-        </p:nvSpPr>
-        <p:spPr/>
-        <p:txBody>
-          <a:bodyPr/>
+          <p:cNvPr id="2" name="Rectangle 1"/>
+          <p:cNvSpPr/>
+          <p:nvPr/>
+        </p:nvSpPr>
+        <p:spPr>
+          <a:xfrm>
+            <a:off x="0" y="0"/>
+            <a:ext cx="9144000" cy="731520"/>
+          </a:xfrm>
+          <a:prstGeom prst="rect">
+            <a:avLst/>
+          </a:prstGeom>
+          <a:solidFill>
+            <a:srgbClr val="1E3A5F"/>
+          </a:solidFill>
+          <a:ln>
+            <a:solidFill>
+              <a:srgbClr val="1E3A5F"/>
+            </a:solidFill>
+          </a:ln>
+        </p:spPr>
+        <p:style>
+          <a:lnRef idx="1">
+            <a:schemeClr val="accent1"/>
+          </a:lnRef>
+          <a:fillRef idx="3">
+            <a:schemeClr val="accent1"/>
+          </a:fillRef>
+          <a:effectRef idx="2">
+            <a:schemeClr val="accent1"/>
+          </a:effectRef>
+          <a:fontRef idx="minor">
+            <a:schemeClr val="lt1"/>
+          </a:fontRef>
+        </p:style>
+        <p:txBody>
+          <a:bodyPr rtlCol="0" anchor="ctr"/>
+          <a:lstStyle/>
+          <a:p>
+            <a:pPr algn="ctr"/>
+          </a:p>
+        </p:txBody>
+      </p:sp>
+      <p:sp>
+        <p:nvSpPr>
+          <p:cNvPr id="3" name="TextBox 2"/>
+          <p:cNvSpPr txBox="1"/>
+          <p:nvPr/>
+        </p:nvSpPr>
+        <p:spPr>
+          <a:xfrm>
+            <a:off x="457200" y="91440"/>
+            <a:ext cx="8229600" cy="548640"/>
+          </a:xfrm>
+          <a:prstGeom prst="rect">
+            <a:avLst/>
+          </a:prstGeom>
+          <a:noFill/>
+        </p:spPr>
+        <p:txBody>
+          <a:bodyPr wrap="none">
+            <a:spAutoFit/>
+          </a:bodyPr>
           <a:lstStyle/>
           <a:p>
             <a:pPr>
-              <a:defRPr sz="4400" b="1">
-                <a:solidFill>
-                  <a:srgbClr val="1E3A5F"/>
+              <a:defRPr sz="3200" b="1">
+                <a:solidFill>
+                  <a:srgbClr val="FFFFFF"/>
                 </a:solidFill>
               </a:defRPr>
             </a:pPr>
@@ -3434,20 +3671,33 @@
       </p:sp>
       <p:sp>
         <p:nvSpPr>
-          <p:cNvPr id="3" name="Content Placeholder 2"/>
-          <p:cNvSpPr>
-            <a:spLocks noGrp="1"/>
-          </p:cNvSpPr>
-          <p:nvPr>
-            <p:ph idx="1"/>
-          </p:nvPr>
-        </p:nvSpPr>
-        <p:spPr/>
-        <p:txBody>
-          <a:bodyPr/>
+          <p:cNvPr id="4" name="TextBox 3"/>
+          <p:cNvSpPr txBox="1"/>
+          <p:nvPr/>
+        </p:nvSpPr>
+        <p:spPr>
+          <a:xfrm>
+            <a:off x="731520" y="1097280"/>
+            <a:ext cx="7680960" cy="3657600"/>
+          </a:xfrm>
+          <a:prstGeom prst="rect">
+            <a:avLst/>
+          </a:prstGeom>
+          <a:noFill/>
+        </p:spPr>
+        <p:txBody>
+          <a:bodyPr wrap="square">
+            <a:spAutoFit/>
+          </a:bodyPr>
           <a:lstStyle/>
           <a:p>
             <a:pPr>
+              <a:spcBef>
+                <a:spcPts val="400"/>
+              </a:spcBef>
+              <a:spcAft>
+                <a:spcPts val="400"/>
+              </a:spcAft>
               <a:defRPr sz="1800">
                 <a:solidFill>
                   <a:srgbClr val="333333"/>
@@ -3460,6 +3710,12 @@
           </a:p>
           <a:p>
             <a:pPr>
+              <a:spcBef>
+                <a:spcPts val="400"/>
+              </a:spcBef>
+              <a:spcAft>
+                <a:spcPts val="400"/>
+              </a:spcAft>
               <a:defRPr sz="1800">
                 <a:solidFill>
                   <a:srgbClr val="333333"/>
@@ -3472,6 +3728,12 @@
           </a:p>
           <a:p>
             <a:pPr>
+              <a:spcBef>
+                <a:spcPts val="400"/>
+              </a:spcBef>
+              <a:spcAft>
+                <a:spcPts val="400"/>
+              </a:spcAft>
               <a:defRPr sz="1800">
                 <a:solidFill>
                   <a:srgbClr val="333333"/>
@@ -3481,6 +3743,12 @@
           </a:p>
           <a:p>
             <a:pPr>
+              <a:spcBef>
+                <a:spcPts val="400"/>
+              </a:spcBef>
+              <a:spcAft>
+                <a:spcPts val="400"/>
+              </a:spcAft>
               <a:defRPr sz="1800">
                 <a:solidFill>
                   <a:srgbClr val="333333"/>
@@ -3493,6 +3761,12 @@
           </a:p>
           <a:p>
             <a:pPr>
+              <a:spcBef>
+                <a:spcPts val="400"/>
+              </a:spcBef>
+              <a:spcAft>
+                <a:spcPts val="400"/>
+              </a:spcAft>
               <a:defRPr sz="1800">
                 <a:solidFill>
                   <a:srgbClr val="333333"/>
@@ -3519,7 +3793,7 @@
     <p:bg>
       <p:bgPr>
         <a:solidFill>
-          <a:srgbClr val="FFFFFF"/>
+          <a:srgbClr val="F5F8FA"/>
         </a:solidFill>
         <a:effectLst/>
       </p:bgPr>
@@ -3533,23 +3807,75 @@
       <p:grpSpPr/>
       <p:sp>
         <p:nvSpPr>
-          <p:cNvPr id="2" name="Title 1"/>
-          <p:cNvSpPr>
-            <a:spLocks noGrp="1"/>
-          </p:cNvSpPr>
-          <p:nvPr>
-            <p:ph type="title"/>
-          </p:nvPr>
-        </p:nvSpPr>
-        <p:spPr/>
-        <p:txBody>
-          <a:bodyPr/>
+          <p:cNvPr id="2" name="Rectangle 1"/>
+          <p:cNvSpPr/>
+          <p:nvPr/>
+        </p:nvSpPr>
+        <p:spPr>
+          <a:xfrm>
+            <a:off x="0" y="0"/>
+            <a:ext cx="9144000" cy="731520"/>
+          </a:xfrm>
+          <a:prstGeom prst="rect">
+            <a:avLst/>
+          </a:prstGeom>
+          <a:solidFill>
+            <a:srgbClr val="1E3A5F"/>
+          </a:solidFill>
+          <a:ln>
+            <a:solidFill>
+              <a:srgbClr val="1E3A5F"/>
+            </a:solidFill>
+          </a:ln>
+        </p:spPr>
+        <p:style>
+          <a:lnRef idx="1">
+            <a:schemeClr val="accent1"/>
+          </a:lnRef>
+          <a:fillRef idx="3">
+            <a:schemeClr val="accent1"/>
+          </a:fillRef>
+          <a:effectRef idx="2">
+            <a:schemeClr val="accent1"/>
+          </a:effectRef>
+          <a:fontRef idx="minor">
+            <a:schemeClr val="lt1"/>
+          </a:fontRef>
+        </p:style>
+        <p:txBody>
+          <a:bodyPr rtlCol="0" anchor="ctr"/>
+          <a:lstStyle/>
+          <a:p>
+            <a:pPr algn="ctr"/>
+          </a:p>
+        </p:txBody>
+      </p:sp>
+      <p:sp>
+        <p:nvSpPr>
+          <p:cNvPr id="3" name="TextBox 2"/>
+          <p:cNvSpPr txBox="1"/>
+          <p:nvPr/>
+        </p:nvSpPr>
+        <p:spPr>
+          <a:xfrm>
+            <a:off x="457200" y="91440"/>
+            <a:ext cx="8229600" cy="548640"/>
+          </a:xfrm>
+          <a:prstGeom prst="rect">
+            <a:avLst/>
+          </a:prstGeom>
+          <a:noFill/>
+        </p:spPr>
+        <p:txBody>
+          <a:bodyPr wrap="none">
+            <a:spAutoFit/>
+          </a:bodyPr>
           <a:lstStyle/>
           <a:p>
             <a:pPr>
-              <a:defRPr sz="4400" b="1">
-                <a:solidFill>
-                  <a:srgbClr val="1E3A5F"/>
+              <a:defRPr sz="3200" b="1">
+                <a:solidFill>
+                  <a:srgbClr val="FFFFFF"/>
                 </a:solidFill>
               </a:defRPr>
             </a:pPr>
@@ -3561,20 +3887,33 @@
       </p:sp>
       <p:sp>
         <p:nvSpPr>
-          <p:cNvPr id="3" name="Content Placeholder 2"/>
-          <p:cNvSpPr>
-            <a:spLocks noGrp="1"/>
-          </p:cNvSpPr>
-          <p:nvPr>
-            <p:ph idx="1"/>
-          </p:nvPr>
-        </p:nvSpPr>
-        <p:spPr/>
-        <p:txBody>
-          <a:bodyPr/>
+          <p:cNvPr id="4" name="TextBox 3"/>
+          <p:cNvSpPr txBox="1"/>
+          <p:nvPr/>
+        </p:nvSpPr>
+        <p:spPr>
+          <a:xfrm>
+            <a:off x="731520" y="1097280"/>
+            <a:ext cx="7680960" cy="3657600"/>
+          </a:xfrm>
+          <a:prstGeom prst="rect">
+            <a:avLst/>
+          </a:prstGeom>
+          <a:noFill/>
+        </p:spPr>
+        <p:txBody>
+          <a:bodyPr wrap="square">
+            <a:spAutoFit/>
+          </a:bodyPr>
           <a:lstStyle/>
           <a:p>
             <a:pPr>
+              <a:spcBef>
+                <a:spcPts val="400"/>
+              </a:spcBef>
+              <a:spcAft>
+                <a:spcPts val="400"/>
+              </a:spcAft>
               <a:defRPr sz="1800">
                 <a:solidFill>
                   <a:srgbClr val="333333"/>
@@ -3587,6 +3926,12 @@
           </a:p>
           <a:p>
             <a:pPr>
+              <a:spcBef>
+                <a:spcPts val="400"/>
+              </a:spcBef>
+              <a:spcAft>
+                <a:spcPts val="400"/>
+              </a:spcAft>
               <a:defRPr sz="1800">
                 <a:solidFill>
                   <a:srgbClr val="333333"/>
@@ -3599,6 +3944,12 @@
           </a:p>
           <a:p>
             <a:pPr>
+              <a:spcBef>
+                <a:spcPts val="400"/>
+              </a:spcBef>
+              <a:spcAft>
+                <a:spcPts val="400"/>
+              </a:spcAft>
               <a:defRPr sz="1800">
                 <a:solidFill>
                   <a:srgbClr val="333333"/>
@@ -3625,7 +3976,7 @@
     <p:bg>
       <p:bgPr>
         <a:solidFill>
-          <a:srgbClr val="FFFFFF"/>
+          <a:srgbClr val="F5F8FA"/>
         </a:solidFill>
         <a:effectLst/>
       </p:bgPr>
@@ -3639,23 +3990,75 @@
       <p:grpSpPr/>
       <p:sp>
         <p:nvSpPr>
-          <p:cNvPr id="2" name="Title 1"/>
-          <p:cNvSpPr>
-            <a:spLocks noGrp="1"/>
-          </p:cNvSpPr>
-          <p:nvPr>
-            <p:ph type="title"/>
-          </p:nvPr>
-        </p:nvSpPr>
-        <p:spPr/>
-        <p:txBody>
-          <a:bodyPr/>
+          <p:cNvPr id="2" name="Rectangle 1"/>
+          <p:cNvSpPr/>
+          <p:nvPr/>
+        </p:nvSpPr>
+        <p:spPr>
+          <a:xfrm>
+            <a:off x="0" y="0"/>
+            <a:ext cx="9144000" cy="731520"/>
+          </a:xfrm>
+          <a:prstGeom prst="rect">
+            <a:avLst/>
+          </a:prstGeom>
+          <a:solidFill>
+            <a:srgbClr val="1E3A5F"/>
+          </a:solidFill>
+          <a:ln>
+            <a:solidFill>
+              <a:srgbClr val="1E3A5F"/>
+            </a:solidFill>
+          </a:ln>
+        </p:spPr>
+        <p:style>
+          <a:lnRef idx="1">
+            <a:schemeClr val="accent1"/>
+          </a:lnRef>
+          <a:fillRef idx="3">
+            <a:schemeClr val="accent1"/>
+          </a:fillRef>
+          <a:effectRef idx="2">
+            <a:schemeClr val="accent1"/>
+          </a:effectRef>
+          <a:fontRef idx="minor">
+            <a:schemeClr val="lt1"/>
+          </a:fontRef>
+        </p:style>
+        <p:txBody>
+          <a:bodyPr rtlCol="0" anchor="ctr"/>
+          <a:lstStyle/>
+          <a:p>
+            <a:pPr algn="ctr"/>
+          </a:p>
+        </p:txBody>
+      </p:sp>
+      <p:sp>
+        <p:nvSpPr>
+          <p:cNvPr id="3" name="TextBox 2"/>
+          <p:cNvSpPr txBox="1"/>
+          <p:nvPr/>
+        </p:nvSpPr>
+        <p:spPr>
+          <a:xfrm>
+            <a:off x="457200" y="91440"/>
+            <a:ext cx="8229600" cy="548640"/>
+          </a:xfrm>
+          <a:prstGeom prst="rect">
+            <a:avLst/>
+          </a:prstGeom>
+          <a:noFill/>
+        </p:spPr>
+        <p:txBody>
+          <a:bodyPr wrap="none">
+            <a:spAutoFit/>
+          </a:bodyPr>
           <a:lstStyle/>
           <a:p>
             <a:pPr>
-              <a:defRPr sz="4400" b="1">
-                <a:solidFill>
-                  <a:srgbClr val="1E3A5F"/>
+              <a:defRPr sz="3200" b="1">
+                <a:solidFill>
+                  <a:srgbClr val="FFFFFF"/>
                 </a:solidFill>
               </a:defRPr>
             </a:pPr>
@@ -3667,20 +4070,33 @@
       </p:sp>
       <p:sp>
         <p:nvSpPr>
-          <p:cNvPr id="3" name="Content Placeholder 2"/>
-          <p:cNvSpPr>
-            <a:spLocks noGrp="1"/>
-          </p:cNvSpPr>
-          <p:nvPr>
-            <p:ph idx="1"/>
-          </p:nvPr>
-        </p:nvSpPr>
-        <p:spPr/>
-        <p:txBody>
-          <a:bodyPr/>
+          <p:cNvPr id="4" name="TextBox 3"/>
+          <p:cNvSpPr txBox="1"/>
+          <p:nvPr/>
+        </p:nvSpPr>
+        <p:spPr>
+          <a:xfrm>
+            <a:off x="731520" y="1097280"/>
+            <a:ext cx="7680960" cy="3657600"/>
+          </a:xfrm>
+          <a:prstGeom prst="rect">
+            <a:avLst/>
+          </a:prstGeom>
+          <a:noFill/>
+        </p:spPr>
+        <p:txBody>
+          <a:bodyPr wrap="square">
+            <a:spAutoFit/>
+          </a:bodyPr>
           <a:lstStyle/>
           <a:p>
             <a:pPr>
+              <a:spcBef>
+                <a:spcPts val="400"/>
+              </a:spcBef>
+              <a:spcAft>
+                <a:spcPts val="400"/>
+              </a:spcAft>
               <a:defRPr sz="1800">
                 <a:solidFill>
                   <a:srgbClr val="333333"/>
@@ -3693,6 +4109,12 @@
           </a:p>
           <a:p>
             <a:pPr>
+              <a:spcBef>
+                <a:spcPts val="400"/>
+              </a:spcBef>
+              <a:spcAft>
+                <a:spcPts val="400"/>
+              </a:spcAft>
               <a:defRPr sz="1800">
                 <a:solidFill>
                   <a:srgbClr val="333333"/>
@@ -3705,6 +4127,12 @@
           </a:p>
           <a:p>
             <a:pPr>
+              <a:spcBef>
+                <a:spcPts val="400"/>
+              </a:spcBef>
+              <a:spcAft>
+                <a:spcPts val="400"/>
+              </a:spcAft>
               <a:defRPr sz="1800">
                 <a:solidFill>
                   <a:srgbClr val="333333"/>
@@ -3731,7 +4159,7 @@
     <p:bg>
       <p:bgPr>
         <a:solidFill>
-          <a:srgbClr val="FFFFFF"/>
+          <a:srgbClr val="F5F8FA"/>
         </a:solidFill>
         <a:effectLst/>
       </p:bgPr>
@@ -3745,23 +4173,75 @@
       <p:grpSpPr/>
       <p:sp>
         <p:nvSpPr>
-          <p:cNvPr id="2" name="Title 1"/>
-          <p:cNvSpPr>
-            <a:spLocks noGrp="1"/>
-          </p:cNvSpPr>
-          <p:nvPr>
-            <p:ph type="title"/>
-          </p:nvPr>
-        </p:nvSpPr>
-        <p:spPr/>
-        <p:txBody>
-          <a:bodyPr/>
+          <p:cNvPr id="2" name="Rectangle 1"/>
+          <p:cNvSpPr/>
+          <p:nvPr/>
+        </p:nvSpPr>
+        <p:spPr>
+          <a:xfrm>
+            <a:off x="0" y="0"/>
+            <a:ext cx="9144000" cy="731520"/>
+          </a:xfrm>
+          <a:prstGeom prst="rect">
+            <a:avLst/>
+          </a:prstGeom>
+          <a:solidFill>
+            <a:srgbClr val="1E3A5F"/>
+          </a:solidFill>
+          <a:ln>
+            <a:solidFill>
+              <a:srgbClr val="1E3A5F"/>
+            </a:solidFill>
+          </a:ln>
+        </p:spPr>
+        <p:style>
+          <a:lnRef idx="1">
+            <a:schemeClr val="accent1"/>
+          </a:lnRef>
+          <a:fillRef idx="3">
+            <a:schemeClr val="accent1"/>
+          </a:fillRef>
+          <a:effectRef idx="2">
+            <a:schemeClr val="accent1"/>
+          </a:effectRef>
+          <a:fontRef idx="minor">
+            <a:schemeClr val="lt1"/>
+          </a:fontRef>
+        </p:style>
+        <p:txBody>
+          <a:bodyPr rtlCol="0" anchor="ctr"/>
+          <a:lstStyle/>
+          <a:p>
+            <a:pPr algn="ctr"/>
+          </a:p>
+        </p:txBody>
+      </p:sp>
+      <p:sp>
+        <p:nvSpPr>
+          <p:cNvPr id="3" name="TextBox 2"/>
+          <p:cNvSpPr txBox="1"/>
+          <p:nvPr/>
+        </p:nvSpPr>
+        <p:spPr>
+          <a:xfrm>
+            <a:off x="457200" y="91440"/>
+            <a:ext cx="8229600" cy="548640"/>
+          </a:xfrm>
+          <a:prstGeom prst="rect">
+            <a:avLst/>
+          </a:prstGeom>
+          <a:noFill/>
+        </p:spPr>
+        <p:txBody>
+          <a:bodyPr wrap="none">
+            <a:spAutoFit/>
+          </a:bodyPr>
           <a:lstStyle/>
           <a:p>
             <a:pPr>
-              <a:defRPr sz="4400" b="1">
-                <a:solidFill>
-                  <a:srgbClr val="1E3A5F"/>
+              <a:defRPr sz="3200" b="1">
+                <a:solidFill>
+                  <a:srgbClr val="FFFFFF"/>
                 </a:solidFill>
               </a:defRPr>
             </a:pPr>
@@ -3773,20 +4253,33 @@
       </p:sp>
       <p:sp>
         <p:nvSpPr>
-          <p:cNvPr id="3" name="Content Placeholder 2"/>
-          <p:cNvSpPr>
-            <a:spLocks noGrp="1"/>
-          </p:cNvSpPr>
-          <p:nvPr>
-            <p:ph idx="1"/>
-          </p:nvPr>
-        </p:nvSpPr>
-        <p:spPr/>
-        <p:txBody>
-          <a:bodyPr/>
+          <p:cNvPr id="4" name="TextBox 3"/>
+          <p:cNvSpPr txBox="1"/>
+          <p:nvPr/>
+        </p:nvSpPr>
+        <p:spPr>
+          <a:xfrm>
+            <a:off x="731520" y="1097280"/>
+            <a:ext cx="7680960" cy="3657600"/>
+          </a:xfrm>
+          <a:prstGeom prst="rect">
+            <a:avLst/>
+          </a:prstGeom>
+          <a:noFill/>
+        </p:spPr>
+        <p:txBody>
+          <a:bodyPr wrap="square">
+            <a:spAutoFit/>
+          </a:bodyPr>
           <a:lstStyle/>
           <a:p>
             <a:pPr>
+              <a:spcBef>
+                <a:spcPts val="400"/>
+              </a:spcBef>
+              <a:spcAft>
+                <a:spcPts val="400"/>
+              </a:spcAft>
               <a:defRPr sz="1800">
                 <a:solidFill>
                   <a:srgbClr val="333333"/>
@@ -3799,6 +4292,12 @@
           </a:p>
           <a:p>
             <a:pPr>
+              <a:spcBef>
+                <a:spcPts val="400"/>
+              </a:spcBef>
+              <a:spcAft>
+                <a:spcPts val="400"/>
+              </a:spcAft>
               <a:defRPr sz="1800">
                 <a:solidFill>
                   <a:srgbClr val="333333"/>
@@ -3811,6 +4310,12 @@
           </a:p>
           <a:p>
             <a:pPr>
+              <a:spcBef>
+                <a:spcPts val="400"/>
+              </a:spcBef>
+              <a:spcAft>
+                <a:spcPts val="400"/>
+              </a:spcAft>
               <a:defRPr sz="1800">
                 <a:solidFill>
                   <a:srgbClr val="333333"/>
@@ -3837,7 +4342,7 @@
     <p:bg>
       <p:bgPr>
         <a:solidFill>
-          <a:srgbClr val="FFFFFF"/>
+          <a:srgbClr val="F5F8FA"/>
         </a:solidFill>
         <a:effectLst/>
       </p:bgPr>
@@ -3851,23 +4356,75 @@
       <p:grpSpPr/>
       <p:sp>
         <p:nvSpPr>
-          <p:cNvPr id="2" name="Title 1"/>
-          <p:cNvSpPr>
-            <a:spLocks noGrp="1"/>
-          </p:cNvSpPr>
-          <p:nvPr>
-            <p:ph type="title"/>
-          </p:nvPr>
-        </p:nvSpPr>
-        <p:spPr/>
-        <p:txBody>
-          <a:bodyPr/>
+          <p:cNvPr id="2" name="Rectangle 1"/>
+          <p:cNvSpPr/>
+          <p:nvPr/>
+        </p:nvSpPr>
+        <p:spPr>
+          <a:xfrm>
+            <a:off x="0" y="0"/>
+            <a:ext cx="9144000" cy="731520"/>
+          </a:xfrm>
+          <a:prstGeom prst="rect">
+            <a:avLst/>
+          </a:prstGeom>
+          <a:solidFill>
+            <a:srgbClr val="1E3A5F"/>
+          </a:solidFill>
+          <a:ln>
+            <a:solidFill>
+              <a:srgbClr val="1E3A5F"/>
+            </a:solidFill>
+          </a:ln>
+        </p:spPr>
+        <p:style>
+          <a:lnRef idx="1">
+            <a:schemeClr val="accent1"/>
+          </a:lnRef>
+          <a:fillRef idx="3">
+            <a:schemeClr val="accent1"/>
+          </a:fillRef>
+          <a:effectRef idx="2">
+            <a:schemeClr val="accent1"/>
+          </a:effectRef>
+          <a:fontRef idx="minor">
+            <a:schemeClr val="lt1"/>
+          </a:fontRef>
+        </p:style>
+        <p:txBody>
+          <a:bodyPr rtlCol="0" anchor="ctr"/>
+          <a:lstStyle/>
+          <a:p>
+            <a:pPr algn="ctr"/>
+          </a:p>
+        </p:txBody>
+      </p:sp>
+      <p:sp>
+        <p:nvSpPr>
+          <p:cNvPr id="3" name="TextBox 2"/>
+          <p:cNvSpPr txBox="1"/>
+          <p:nvPr/>
+        </p:nvSpPr>
+        <p:spPr>
+          <a:xfrm>
+            <a:off x="457200" y="91440"/>
+            <a:ext cx="8229600" cy="548640"/>
+          </a:xfrm>
+          <a:prstGeom prst="rect">
+            <a:avLst/>
+          </a:prstGeom>
+          <a:noFill/>
+        </p:spPr>
+        <p:txBody>
+          <a:bodyPr wrap="none">
+            <a:spAutoFit/>
+          </a:bodyPr>
           <a:lstStyle/>
           <a:p>
             <a:pPr>
-              <a:defRPr sz="4400" b="1">
-                <a:solidFill>
-                  <a:srgbClr val="1E3A5F"/>
+              <a:defRPr sz="3200" b="1">
+                <a:solidFill>
+                  <a:srgbClr val="FFFFFF"/>
                 </a:solidFill>
               </a:defRPr>
             </a:pPr>
@@ -3879,20 +4436,33 @@
       </p:sp>
       <p:sp>
         <p:nvSpPr>
-          <p:cNvPr id="3" name="Content Placeholder 2"/>
-          <p:cNvSpPr>
-            <a:spLocks noGrp="1"/>
-          </p:cNvSpPr>
-          <p:nvPr>
-            <p:ph idx="1"/>
-          </p:nvPr>
-        </p:nvSpPr>
-        <p:spPr/>
-        <p:txBody>
-          <a:bodyPr/>
+          <p:cNvPr id="4" name="TextBox 3"/>
+          <p:cNvSpPr txBox="1"/>
+          <p:nvPr/>
+        </p:nvSpPr>
+        <p:spPr>
+          <a:xfrm>
+            <a:off x="731520" y="1097280"/>
+            <a:ext cx="7680960" cy="3657600"/>
+          </a:xfrm>
+          <a:prstGeom prst="rect">
+            <a:avLst/>
+          </a:prstGeom>
+          <a:noFill/>
+        </p:spPr>
+        <p:txBody>
+          <a:bodyPr wrap="square">
+            <a:spAutoFit/>
+          </a:bodyPr>
           <a:lstStyle/>
           <a:p>
             <a:pPr>
+              <a:spcBef>
+                <a:spcPts val="400"/>
+              </a:spcBef>
+              <a:spcAft>
+                <a:spcPts val="400"/>
+              </a:spcAft>
               <a:defRPr sz="1800">
                 <a:solidFill>
                   <a:srgbClr val="333333"/>
@@ -3905,6 +4475,12 @@
           </a:p>
           <a:p>
             <a:pPr>
+              <a:spcBef>
+                <a:spcPts val="400"/>
+              </a:spcBef>
+              <a:spcAft>
+                <a:spcPts val="400"/>
+              </a:spcAft>
               <a:defRPr sz="1800">
                 <a:solidFill>
                   <a:srgbClr val="333333"/>
@@ -3917,6 +4493,12 @@
           </a:p>
           <a:p>
             <a:pPr>
+              <a:spcBef>
+                <a:spcPts val="400"/>
+              </a:spcBef>
+              <a:spcAft>
+                <a:spcPts val="400"/>
+              </a:spcAft>
               <a:defRPr sz="1800">
                 <a:solidFill>
                   <a:srgbClr val="333333"/>
@@ -3929,6 +4511,12 @@
           </a:p>
           <a:p>
             <a:pPr>
+              <a:spcBef>
+                <a:spcPts val="400"/>
+              </a:spcBef>
+              <a:spcAft>
+                <a:spcPts val="400"/>
+              </a:spcAft>
               <a:defRPr sz="1800">
                 <a:solidFill>
                   <a:srgbClr val="333333"/>
@@ -3955,7 +4543,7 @@
     <p:bg>
       <p:bgPr>
         <a:solidFill>
-          <a:srgbClr val="FFFFFF"/>
+          <a:srgbClr val="F5F8FA"/>
         </a:solidFill>
         <a:effectLst/>
       </p:bgPr>
@@ -3969,23 +4557,75 @@
       <p:grpSpPr/>
       <p:sp>
         <p:nvSpPr>
-          <p:cNvPr id="2" name="Title 1"/>
-          <p:cNvSpPr>
-            <a:spLocks noGrp="1"/>
-          </p:cNvSpPr>
-          <p:nvPr>
-            <p:ph type="title"/>
-          </p:nvPr>
-        </p:nvSpPr>
-        <p:spPr/>
-        <p:txBody>
-          <a:bodyPr/>
+          <p:cNvPr id="2" name="Rectangle 1"/>
+          <p:cNvSpPr/>
+          <p:nvPr/>
+        </p:nvSpPr>
+        <p:spPr>
+          <a:xfrm>
+            <a:off x="0" y="0"/>
+            <a:ext cx="9144000" cy="731520"/>
+          </a:xfrm>
+          <a:prstGeom prst="rect">
+            <a:avLst/>
+          </a:prstGeom>
+          <a:solidFill>
+            <a:srgbClr val="1E3A5F"/>
+          </a:solidFill>
+          <a:ln>
+            <a:solidFill>
+              <a:srgbClr val="1E3A5F"/>
+            </a:solidFill>
+          </a:ln>
+        </p:spPr>
+        <p:style>
+          <a:lnRef idx="1">
+            <a:schemeClr val="accent1"/>
+          </a:lnRef>
+          <a:fillRef idx="3">
+            <a:schemeClr val="accent1"/>
+          </a:fillRef>
+          <a:effectRef idx="2">
+            <a:schemeClr val="accent1"/>
+          </a:effectRef>
+          <a:fontRef idx="minor">
+            <a:schemeClr val="lt1"/>
+          </a:fontRef>
+        </p:style>
+        <p:txBody>
+          <a:bodyPr rtlCol="0" anchor="ctr"/>
+          <a:lstStyle/>
+          <a:p>
+            <a:pPr algn="ctr"/>
+          </a:p>
+        </p:txBody>
+      </p:sp>
+      <p:sp>
+        <p:nvSpPr>
+          <p:cNvPr id="3" name="TextBox 2"/>
+          <p:cNvSpPr txBox="1"/>
+          <p:nvPr/>
+        </p:nvSpPr>
+        <p:spPr>
+          <a:xfrm>
+            <a:off x="457200" y="91440"/>
+            <a:ext cx="8229600" cy="548640"/>
+          </a:xfrm>
+          <a:prstGeom prst="rect">
+            <a:avLst/>
+          </a:prstGeom>
+          <a:noFill/>
+        </p:spPr>
+        <p:txBody>
+          <a:bodyPr wrap="none">
+            <a:spAutoFit/>
+          </a:bodyPr>
           <a:lstStyle/>
           <a:p>
             <a:pPr>
-              <a:defRPr sz="4400" b="1">
-                <a:solidFill>
-                  <a:srgbClr val="1E3A5F"/>
+              <a:defRPr sz="3200" b="1">
+                <a:solidFill>
+                  <a:srgbClr val="FFFFFF"/>
                 </a:solidFill>
               </a:defRPr>
             </a:pPr>
@@ -3997,20 +4637,33 @@
       </p:sp>
       <p:sp>
         <p:nvSpPr>
-          <p:cNvPr id="3" name="Content Placeholder 2"/>
-          <p:cNvSpPr>
-            <a:spLocks noGrp="1"/>
-          </p:cNvSpPr>
-          <p:nvPr>
-            <p:ph idx="1"/>
-          </p:nvPr>
-        </p:nvSpPr>
-        <p:spPr/>
-        <p:txBody>
-          <a:bodyPr/>
+          <p:cNvPr id="4" name="TextBox 3"/>
+          <p:cNvSpPr txBox="1"/>
+          <p:nvPr/>
+        </p:nvSpPr>
+        <p:spPr>
+          <a:xfrm>
+            <a:off x="731520" y="1097280"/>
+            <a:ext cx="7680960" cy="3657600"/>
+          </a:xfrm>
+          <a:prstGeom prst="rect">
+            <a:avLst/>
+          </a:prstGeom>
+          <a:noFill/>
+        </p:spPr>
+        <p:txBody>
+          <a:bodyPr wrap="square">
+            <a:spAutoFit/>
+          </a:bodyPr>
           <a:lstStyle/>
           <a:p>
             <a:pPr>
+              <a:spcBef>
+                <a:spcPts val="400"/>
+              </a:spcBef>
+              <a:spcAft>
+                <a:spcPts val="400"/>
+              </a:spcAft>
               <a:defRPr sz="1800">
                 <a:solidFill>
                   <a:srgbClr val="333333"/>
@@ -4023,6 +4676,12 @@
           </a:p>
           <a:p>
             <a:pPr>
+              <a:spcBef>
+                <a:spcPts val="400"/>
+              </a:spcBef>
+              <a:spcAft>
+                <a:spcPts val="400"/>
+              </a:spcAft>
               <a:defRPr sz="1800">
                 <a:solidFill>
                   <a:srgbClr val="333333"/>
@@ -4035,6 +4694,12 @@
           </a:p>
           <a:p>
             <a:pPr>
+              <a:spcBef>
+                <a:spcPts val="400"/>
+              </a:spcBef>
+              <a:spcAft>
+                <a:spcPts val="400"/>
+              </a:spcAft>
               <a:defRPr sz="1800">
                 <a:solidFill>
                   <a:srgbClr val="333333"/>
@@ -4047,6 +4712,12 @@
           </a:p>
           <a:p>
             <a:pPr>
+              <a:spcBef>
+                <a:spcPts val="400"/>
+              </a:spcBef>
+              <a:spcAft>
+                <a:spcPts val="400"/>
+              </a:spcAft>
               <a:defRPr sz="1800">
                 <a:solidFill>
                   <a:srgbClr val="333333"/>
@@ -4073,7 +4744,7 @@
     <p:bg>
       <p:bgPr>
         <a:solidFill>
-          <a:srgbClr val="FFFFFF"/>
+          <a:srgbClr val="F5F8FA"/>
         </a:solidFill>
         <a:effectLst/>
       </p:bgPr>
@@ -4087,23 +4758,75 @@
       <p:grpSpPr/>
       <p:sp>
         <p:nvSpPr>
-          <p:cNvPr id="2" name="Title 1"/>
-          <p:cNvSpPr>
-            <a:spLocks noGrp="1"/>
-          </p:cNvSpPr>
-          <p:nvPr>
-            <p:ph type="title"/>
-          </p:nvPr>
-        </p:nvSpPr>
-        <p:spPr/>
-        <p:txBody>
-          <a:bodyPr/>
+          <p:cNvPr id="2" name="Rectangle 1"/>
+          <p:cNvSpPr/>
+          <p:nvPr/>
+        </p:nvSpPr>
+        <p:spPr>
+          <a:xfrm>
+            <a:off x="0" y="0"/>
+            <a:ext cx="9144000" cy="731520"/>
+          </a:xfrm>
+          <a:prstGeom prst="rect">
+            <a:avLst/>
+          </a:prstGeom>
+          <a:solidFill>
+            <a:srgbClr val="1E3A5F"/>
+          </a:solidFill>
+          <a:ln>
+            <a:solidFill>
+              <a:srgbClr val="1E3A5F"/>
+            </a:solidFill>
+          </a:ln>
+        </p:spPr>
+        <p:style>
+          <a:lnRef idx="1">
+            <a:schemeClr val="accent1"/>
+          </a:lnRef>
+          <a:fillRef idx="3">
+            <a:schemeClr val="accent1"/>
+          </a:fillRef>
+          <a:effectRef idx="2">
+            <a:schemeClr val="accent1"/>
+          </a:effectRef>
+          <a:fontRef idx="minor">
+            <a:schemeClr val="lt1"/>
+          </a:fontRef>
+        </p:style>
+        <p:txBody>
+          <a:bodyPr rtlCol="0" anchor="ctr"/>
+          <a:lstStyle/>
+          <a:p>
+            <a:pPr algn="ctr"/>
+          </a:p>
+        </p:txBody>
+      </p:sp>
+      <p:sp>
+        <p:nvSpPr>
+          <p:cNvPr id="3" name="TextBox 2"/>
+          <p:cNvSpPr txBox="1"/>
+          <p:nvPr/>
+        </p:nvSpPr>
+        <p:spPr>
+          <a:xfrm>
+            <a:off x="457200" y="91440"/>
+            <a:ext cx="8229600" cy="548640"/>
+          </a:xfrm>
+          <a:prstGeom prst="rect">
+            <a:avLst/>
+          </a:prstGeom>
+          <a:noFill/>
+        </p:spPr>
+        <p:txBody>
+          <a:bodyPr wrap="none">
+            <a:spAutoFit/>
+          </a:bodyPr>
           <a:lstStyle/>
           <a:p>
             <a:pPr>
-              <a:defRPr sz="4400" b="1">
-                <a:solidFill>
-                  <a:srgbClr val="1E3A5F"/>
+              <a:defRPr sz="3200" b="1">
+                <a:solidFill>
+                  <a:srgbClr val="FFFFFF"/>
                 </a:solidFill>
               </a:defRPr>
             </a:pPr>
@@ -4115,20 +4838,33 @@
       </p:sp>
       <p:sp>
         <p:nvSpPr>
-          <p:cNvPr id="3" name="Content Placeholder 2"/>
-          <p:cNvSpPr>
-            <a:spLocks noGrp="1"/>
-          </p:cNvSpPr>
-          <p:nvPr>
-            <p:ph idx="1"/>
-          </p:nvPr>
-        </p:nvSpPr>
-        <p:spPr/>
-        <p:txBody>
-          <a:bodyPr/>
+          <p:cNvPr id="4" name="TextBox 3"/>
+          <p:cNvSpPr txBox="1"/>
+          <p:nvPr/>
+        </p:nvSpPr>
+        <p:spPr>
+          <a:xfrm>
+            <a:off x="731520" y="1097280"/>
+            <a:ext cx="7680960" cy="3657600"/>
+          </a:xfrm>
+          <a:prstGeom prst="rect">
+            <a:avLst/>
+          </a:prstGeom>
+          <a:noFill/>
+        </p:spPr>
+        <p:txBody>
+          <a:bodyPr wrap="square">
+            <a:spAutoFit/>
+          </a:bodyPr>
           <a:lstStyle/>
           <a:p>
             <a:pPr>
+              <a:spcBef>
+                <a:spcPts val="400"/>
+              </a:spcBef>
+              <a:spcAft>
+                <a:spcPts val="400"/>
+              </a:spcAft>
               <a:defRPr sz="1800">
                 <a:solidFill>
                   <a:srgbClr val="333333"/>
@@ -4141,6 +4877,12 @@
           </a:p>
           <a:p>
             <a:pPr>
+              <a:spcBef>
+                <a:spcPts val="400"/>
+              </a:spcBef>
+              <a:spcAft>
+                <a:spcPts val="400"/>
+              </a:spcAft>
               <a:defRPr sz="1800">
                 <a:solidFill>
                   <a:srgbClr val="333333"/>
@@ -4153,6 +4895,12 @@
           </a:p>
           <a:p>
             <a:pPr>
+              <a:spcBef>
+                <a:spcPts val="400"/>
+              </a:spcBef>
+              <a:spcAft>
+                <a:spcPts val="400"/>
+              </a:spcAft>
               <a:defRPr sz="1800">
                 <a:solidFill>
                   <a:srgbClr val="333333"/>
@@ -4179,7 +4927,7 @@
     <p:bg>
       <p:bgPr>
         <a:solidFill>
-          <a:srgbClr val="FFFFFF"/>
+          <a:srgbClr val="F5F8FA"/>
         </a:solidFill>
         <a:effectLst/>
       </p:bgPr>
@@ -4193,23 +4941,75 @@
       <p:grpSpPr/>
       <p:sp>
         <p:nvSpPr>
-          <p:cNvPr id="2" name="Title 1"/>
-          <p:cNvSpPr>
-            <a:spLocks noGrp="1"/>
-          </p:cNvSpPr>
-          <p:nvPr>
-            <p:ph type="title"/>
-          </p:nvPr>
-        </p:nvSpPr>
-        <p:spPr/>
-        <p:txBody>
-          <a:bodyPr/>
+          <p:cNvPr id="2" name="Rectangle 1"/>
+          <p:cNvSpPr/>
+          <p:nvPr/>
+        </p:nvSpPr>
+        <p:spPr>
+          <a:xfrm>
+            <a:off x="0" y="0"/>
+            <a:ext cx="9144000" cy="731520"/>
+          </a:xfrm>
+          <a:prstGeom prst="rect">
+            <a:avLst/>
+          </a:prstGeom>
+          <a:solidFill>
+            <a:srgbClr val="1E3A5F"/>
+          </a:solidFill>
+          <a:ln>
+            <a:solidFill>
+              <a:srgbClr val="1E3A5F"/>
+            </a:solidFill>
+          </a:ln>
+        </p:spPr>
+        <p:style>
+          <a:lnRef idx="1">
+            <a:schemeClr val="accent1"/>
+          </a:lnRef>
+          <a:fillRef idx="3">
+            <a:schemeClr val="accent1"/>
+          </a:fillRef>
+          <a:effectRef idx="2">
+            <a:schemeClr val="accent1"/>
+          </a:effectRef>
+          <a:fontRef idx="minor">
+            <a:schemeClr val="lt1"/>
+          </a:fontRef>
+        </p:style>
+        <p:txBody>
+          <a:bodyPr rtlCol="0" anchor="ctr"/>
+          <a:lstStyle/>
+          <a:p>
+            <a:pPr algn="ctr"/>
+          </a:p>
+        </p:txBody>
+      </p:sp>
+      <p:sp>
+        <p:nvSpPr>
+          <p:cNvPr id="3" name="TextBox 2"/>
+          <p:cNvSpPr txBox="1"/>
+          <p:nvPr/>
+        </p:nvSpPr>
+        <p:spPr>
+          <a:xfrm>
+            <a:off x="457200" y="91440"/>
+            <a:ext cx="8229600" cy="548640"/>
+          </a:xfrm>
+          <a:prstGeom prst="rect">
+            <a:avLst/>
+          </a:prstGeom>
+          <a:noFill/>
+        </p:spPr>
+        <p:txBody>
+          <a:bodyPr wrap="none">
+            <a:spAutoFit/>
+          </a:bodyPr>
           <a:lstStyle/>
           <a:p>
             <a:pPr>
-              <a:defRPr sz="4400" b="1">
-                <a:solidFill>
-                  <a:srgbClr val="1E3A5F"/>
+              <a:defRPr sz="3200" b="1">
+                <a:solidFill>
+                  <a:srgbClr val="FFFFFF"/>
                 </a:solidFill>
               </a:defRPr>
             </a:pPr>
@@ -4221,20 +5021,33 @@
       </p:sp>
       <p:sp>
         <p:nvSpPr>
-          <p:cNvPr id="3" name="Content Placeholder 2"/>
-          <p:cNvSpPr>
-            <a:spLocks noGrp="1"/>
-          </p:cNvSpPr>
-          <p:nvPr>
-            <p:ph idx="1"/>
-          </p:nvPr>
-        </p:nvSpPr>
-        <p:spPr/>
-        <p:txBody>
-          <a:bodyPr/>
+          <p:cNvPr id="4" name="TextBox 3"/>
+          <p:cNvSpPr txBox="1"/>
+          <p:nvPr/>
+        </p:nvSpPr>
+        <p:spPr>
+          <a:xfrm>
+            <a:off x="731520" y="1097280"/>
+            <a:ext cx="7680960" cy="3657600"/>
+          </a:xfrm>
+          <a:prstGeom prst="rect">
+            <a:avLst/>
+          </a:prstGeom>
+          <a:noFill/>
+        </p:spPr>
+        <p:txBody>
+          <a:bodyPr wrap="square">
+            <a:spAutoFit/>
+          </a:bodyPr>
           <a:lstStyle/>
           <a:p>
             <a:pPr>
+              <a:spcBef>
+                <a:spcPts val="400"/>
+              </a:spcBef>
+              <a:spcAft>
+                <a:spcPts val="400"/>
+              </a:spcAft>
               <a:defRPr sz="1800">
                 <a:solidFill>
                   <a:srgbClr val="333333"/>
@@ -4247,6 +5060,12 @@
           </a:p>
           <a:p>
             <a:pPr>
+              <a:spcBef>
+                <a:spcPts val="400"/>
+              </a:spcBef>
+              <a:spcAft>
+                <a:spcPts val="400"/>
+              </a:spcAft>
               <a:defRPr sz="1800">
                 <a:solidFill>
                   <a:srgbClr val="333333"/>
@@ -4259,6 +5078,12 @@
           </a:p>
           <a:p>
             <a:pPr>
+              <a:spcBef>
+                <a:spcPts val="400"/>
+              </a:spcBef>
+              <a:spcAft>
+                <a:spcPts val="400"/>
+              </a:spcAft>
               <a:defRPr sz="1800">
                 <a:solidFill>
                   <a:srgbClr val="333333"/>
@@ -4285,7 +5110,7 @@
     <p:bg>
       <p:bgPr>
         <a:solidFill>
-          <a:srgbClr val="FFFFFF"/>
+          <a:srgbClr val="F5F8FA"/>
         </a:solidFill>
         <a:effectLst/>
       </p:bgPr>
@@ -4299,23 +5124,75 @@
       <p:grpSpPr/>
       <p:sp>
         <p:nvSpPr>
-          <p:cNvPr id="2" name="Title 1"/>
-          <p:cNvSpPr>
-            <a:spLocks noGrp="1"/>
-          </p:cNvSpPr>
-          <p:nvPr>
-            <p:ph type="title"/>
-          </p:nvPr>
-        </p:nvSpPr>
-        <p:spPr/>
-        <p:txBody>
-          <a:bodyPr/>
+          <p:cNvPr id="2" name="Rectangle 1"/>
+          <p:cNvSpPr/>
+          <p:nvPr/>
+        </p:nvSpPr>
+        <p:spPr>
+          <a:xfrm>
+            <a:off x="0" y="0"/>
+            <a:ext cx="9144000" cy="731520"/>
+          </a:xfrm>
+          <a:prstGeom prst="rect">
+            <a:avLst/>
+          </a:prstGeom>
+          <a:solidFill>
+            <a:srgbClr val="1E3A5F"/>
+          </a:solidFill>
+          <a:ln>
+            <a:solidFill>
+              <a:srgbClr val="1E3A5F"/>
+            </a:solidFill>
+          </a:ln>
+        </p:spPr>
+        <p:style>
+          <a:lnRef idx="1">
+            <a:schemeClr val="accent1"/>
+          </a:lnRef>
+          <a:fillRef idx="3">
+            <a:schemeClr val="accent1"/>
+          </a:fillRef>
+          <a:effectRef idx="2">
+            <a:schemeClr val="accent1"/>
+          </a:effectRef>
+          <a:fontRef idx="minor">
+            <a:schemeClr val="lt1"/>
+          </a:fontRef>
+        </p:style>
+        <p:txBody>
+          <a:bodyPr rtlCol="0" anchor="ctr"/>
+          <a:lstStyle/>
+          <a:p>
+            <a:pPr algn="ctr"/>
+          </a:p>
+        </p:txBody>
+      </p:sp>
+      <p:sp>
+        <p:nvSpPr>
+          <p:cNvPr id="3" name="TextBox 2"/>
+          <p:cNvSpPr txBox="1"/>
+          <p:nvPr/>
+        </p:nvSpPr>
+        <p:spPr>
+          <a:xfrm>
+            <a:off x="457200" y="91440"/>
+            <a:ext cx="8229600" cy="548640"/>
+          </a:xfrm>
+          <a:prstGeom prst="rect">
+            <a:avLst/>
+          </a:prstGeom>
+          <a:noFill/>
+        </p:spPr>
+        <p:txBody>
+          <a:bodyPr wrap="none">
+            <a:spAutoFit/>
+          </a:bodyPr>
           <a:lstStyle/>
           <a:p>
             <a:pPr>
-              <a:defRPr sz="4400" b="1">
-                <a:solidFill>
-                  <a:srgbClr val="1E3A5F"/>
+              <a:defRPr sz="3200" b="1">
+                <a:solidFill>
+                  <a:srgbClr val="FFFFFF"/>
                 </a:solidFill>
               </a:defRPr>
             </a:pPr>
@@ -4327,20 +5204,33 @@
       </p:sp>
       <p:sp>
         <p:nvSpPr>
-          <p:cNvPr id="3" name="Content Placeholder 2"/>
-          <p:cNvSpPr>
-            <a:spLocks noGrp="1"/>
-          </p:cNvSpPr>
-          <p:nvPr>
-            <p:ph idx="1"/>
-          </p:nvPr>
-        </p:nvSpPr>
-        <p:spPr/>
-        <p:txBody>
-          <a:bodyPr/>
+          <p:cNvPr id="4" name="TextBox 3"/>
+          <p:cNvSpPr txBox="1"/>
+          <p:nvPr/>
+        </p:nvSpPr>
+        <p:spPr>
+          <a:xfrm>
+            <a:off x="731520" y="1097280"/>
+            <a:ext cx="7680960" cy="3657600"/>
+          </a:xfrm>
+          <a:prstGeom prst="rect">
+            <a:avLst/>
+          </a:prstGeom>
+          <a:noFill/>
+        </p:spPr>
+        <p:txBody>
+          <a:bodyPr wrap="square">
+            <a:spAutoFit/>
+          </a:bodyPr>
           <a:lstStyle/>
           <a:p>
             <a:pPr>
+              <a:spcBef>
+                <a:spcPts val="400"/>
+              </a:spcBef>
+              <a:spcAft>
+                <a:spcPts val="400"/>
+              </a:spcAft>
               <a:defRPr sz="1800">
                 <a:solidFill>
                   <a:srgbClr val="333333"/>
@@ -4353,6 +5243,12 @@
           </a:p>
           <a:p>
             <a:pPr>
+              <a:spcBef>
+                <a:spcPts val="400"/>
+              </a:spcBef>
+              <a:spcAft>
+                <a:spcPts val="400"/>
+              </a:spcAft>
               <a:defRPr sz="1800">
                 <a:solidFill>
                   <a:srgbClr val="333333"/>
@@ -4365,6 +5261,12 @@
           </a:p>
           <a:p>
             <a:pPr>
+              <a:spcBef>
+                <a:spcPts val="400"/>
+              </a:spcBef>
+              <a:spcAft>
+                <a:spcPts val="400"/>
+              </a:spcAft>
               <a:defRPr sz="1800">
                 <a:solidFill>
                   <a:srgbClr val="333333"/>
@@ -4391,7 +5293,7 @@
     <p:bg>
       <p:bgPr>
         <a:solidFill>
-          <a:srgbClr val="FFFFFF"/>
+          <a:srgbClr val="F5F8FA"/>
         </a:solidFill>
         <a:effectLst/>
       </p:bgPr>
@@ -4405,23 +5307,75 @@
       <p:grpSpPr/>
       <p:sp>
         <p:nvSpPr>
-          <p:cNvPr id="2" name="Title 1"/>
-          <p:cNvSpPr>
-            <a:spLocks noGrp="1"/>
-          </p:cNvSpPr>
-          <p:nvPr>
-            <p:ph type="title"/>
-          </p:nvPr>
-        </p:nvSpPr>
-        <p:spPr/>
-        <p:txBody>
-          <a:bodyPr/>
+          <p:cNvPr id="2" name="Rectangle 1"/>
+          <p:cNvSpPr/>
+          <p:nvPr/>
+        </p:nvSpPr>
+        <p:spPr>
+          <a:xfrm>
+            <a:off x="0" y="0"/>
+            <a:ext cx="9144000" cy="731520"/>
+          </a:xfrm>
+          <a:prstGeom prst="rect">
+            <a:avLst/>
+          </a:prstGeom>
+          <a:solidFill>
+            <a:srgbClr val="1E3A5F"/>
+          </a:solidFill>
+          <a:ln>
+            <a:solidFill>
+              <a:srgbClr val="1E3A5F"/>
+            </a:solidFill>
+          </a:ln>
+        </p:spPr>
+        <p:style>
+          <a:lnRef idx="1">
+            <a:schemeClr val="accent1"/>
+          </a:lnRef>
+          <a:fillRef idx="3">
+            <a:schemeClr val="accent1"/>
+          </a:fillRef>
+          <a:effectRef idx="2">
+            <a:schemeClr val="accent1"/>
+          </a:effectRef>
+          <a:fontRef idx="minor">
+            <a:schemeClr val="lt1"/>
+          </a:fontRef>
+        </p:style>
+        <p:txBody>
+          <a:bodyPr rtlCol="0" anchor="ctr"/>
+          <a:lstStyle/>
+          <a:p>
+            <a:pPr algn="ctr"/>
+          </a:p>
+        </p:txBody>
+      </p:sp>
+      <p:sp>
+        <p:nvSpPr>
+          <p:cNvPr id="3" name="TextBox 2"/>
+          <p:cNvSpPr txBox="1"/>
+          <p:nvPr/>
+        </p:nvSpPr>
+        <p:spPr>
+          <a:xfrm>
+            <a:off x="457200" y="91440"/>
+            <a:ext cx="8229600" cy="548640"/>
+          </a:xfrm>
+          <a:prstGeom prst="rect">
+            <a:avLst/>
+          </a:prstGeom>
+          <a:noFill/>
+        </p:spPr>
+        <p:txBody>
+          <a:bodyPr wrap="none">
+            <a:spAutoFit/>
+          </a:bodyPr>
           <a:lstStyle/>
           <a:p>
             <a:pPr>
-              <a:defRPr sz="4400" b="1">
-                <a:solidFill>
-                  <a:srgbClr val="1E3A5F"/>
+              <a:defRPr sz="3200" b="1">
+                <a:solidFill>
+                  <a:srgbClr val="FFFFFF"/>
                 </a:solidFill>
               </a:defRPr>
             </a:pPr>
@@ -4433,20 +5387,33 @@
       </p:sp>
       <p:sp>
         <p:nvSpPr>
-          <p:cNvPr id="3" name="Content Placeholder 2"/>
-          <p:cNvSpPr>
-            <a:spLocks noGrp="1"/>
-          </p:cNvSpPr>
-          <p:nvPr>
-            <p:ph idx="1"/>
-          </p:nvPr>
-        </p:nvSpPr>
-        <p:spPr/>
-        <p:txBody>
-          <a:bodyPr/>
+          <p:cNvPr id="4" name="TextBox 3"/>
+          <p:cNvSpPr txBox="1"/>
+          <p:nvPr/>
+        </p:nvSpPr>
+        <p:spPr>
+          <a:xfrm>
+            <a:off x="731520" y="1097280"/>
+            <a:ext cx="7680960" cy="3657600"/>
+          </a:xfrm>
+          <a:prstGeom prst="rect">
+            <a:avLst/>
+          </a:prstGeom>
+          <a:noFill/>
+        </p:spPr>
+        <p:txBody>
+          <a:bodyPr wrap="square">
+            <a:spAutoFit/>
+          </a:bodyPr>
           <a:lstStyle/>
           <a:p>
             <a:pPr>
+              <a:spcBef>
+                <a:spcPts val="400"/>
+              </a:spcBef>
+              <a:spcAft>
+                <a:spcPts val="400"/>
+              </a:spcAft>
               <a:defRPr sz="1800">
                 <a:solidFill>
                   <a:srgbClr val="333333"/>
@@ -4459,6 +5426,12 @@
           </a:p>
           <a:p>
             <a:pPr>
+              <a:spcBef>
+                <a:spcPts val="400"/>
+              </a:spcBef>
+              <a:spcAft>
+                <a:spcPts val="400"/>
+              </a:spcAft>
               <a:defRPr sz="1800">
                 <a:solidFill>
                   <a:srgbClr val="333333"/>
@@ -4471,6 +5444,12 @@
           </a:p>
           <a:p>
             <a:pPr>
+              <a:spcBef>
+                <a:spcPts val="400"/>
+              </a:spcBef>
+              <a:spcAft>
+                <a:spcPts val="400"/>
+              </a:spcAft>
               <a:defRPr sz="1800">
                 <a:solidFill>
                   <a:srgbClr val="333333"/>
@@ -4497,7 +5476,7 @@
     <p:bg>
       <p:bgPr>
         <a:solidFill>
-          <a:srgbClr val="FFFFFF"/>
+          <a:srgbClr val="F5F8FA"/>
         </a:solidFill>
         <a:effectLst/>
       </p:bgPr>
@@ -4511,23 +5490,75 @@
       <p:grpSpPr/>
       <p:sp>
         <p:nvSpPr>
-          <p:cNvPr id="2" name="Title 1"/>
-          <p:cNvSpPr>
-            <a:spLocks noGrp="1"/>
-          </p:cNvSpPr>
-          <p:nvPr>
-            <p:ph type="title"/>
-          </p:nvPr>
-        </p:nvSpPr>
-        <p:spPr/>
-        <p:txBody>
-          <a:bodyPr/>
+          <p:cNvPr id="2" name="Rectangle 1"/>
+          <p:cNvSpPr/>
+          <p:nvPr/>
+        </p:nvSpPr>
+        <p:spPr>
+          <a:xfrm>
+            <a:off x="0" y="0"/>
+            <a:ext cx="9144000" cy="731520"/>
+          </a:xfrm>
+          <a:prstGeom prst="rect">
+            <a:avLst/>
+          </a:prstGeom>
+          <a:solidFill>
+            <a:srgbClr val="1E3A5F"/>
+          </a:solidFill>
+          <a:ln>
+            <a:solidFill>
+              <a:srgbClr val="1E3A5F"/>
+            </a:solidFill>
+          </a:ln>
+        </p:spPr>
+        <p:style>
+          <a:lnRef idx="1">
+            <a:schemeClr val="accent1"/>
+          </a:lnRef>
+          <a:fillRef idx="3">
+            <a:schemeClr val="accent1"/>
+          </a:fillRef>
+          <a:effectRef idx="2">
+            <a:schemeClr val="accent1"/>
+          </a:effectRef>
+          <a:fontRef idx="minor">
+            <a:schemeClr val="lt1"/>
+          </a:fontRef>
+        </p:style>
+        <p:txBody>
+          <a:bodyPr rtlCol="0" anchor="ctr"/>
+          <a:lstStyle/>
+          <a:p>
+            <a:pPr algn="ctr"/>
+          </a:p>
+        </p:txBody>
+      </p:sp>
+      <p:sp>
+        <p:nvSpPr>
+          <p:cNvPr id="3" name="TextBox 2"/>
+          <p:cNvSpPr txBox="1"/>
+          <p:nvPr/>
+        </p:nvSpPr>
+        <p:spPr>
+          <a:xfrm>
+            <a:off x="457200" y="91440"/>
+            <a:ext cx="8229600" cy="548640"/>
+          </a:xfrm>
+          <a:prstGeom prst="rect">
+            <a:avLst/>
+          </a:prstGeom>
+          <a:noFill/>
+        </p:spPr>
+        <p:txBody>
+          <a:bodyPr wrap="none">
+            <a:spAutoFit/>
+          </a:bodyPr>
           <a:lstStyle/>
           <a:p>
             <a:pPr>
-              <a:defRPr sz="4400" b="1">
-                <a:solidFill>
-                  <a:srgbClr val="1E3A5F"/>
+              <a:defRPr sz="3200" b="1">
+                <a:solidFill>
+                  <a:srgbClr val="FFFFFF"/>
                 </a:solidFill>
               </a:defRPr>
             </a:pPr>
@@ -4539,20 +5570,33 @@
       </p:sp>
       <p:sp>
         <p:nvSpPr>
-          <p:cNvPr id="3" name="Content Placeholder 2"/>
-          <p:cNvSpPr>
-            <a:spLocks noGrp="1"/>
-          </p:cNvSpPr>
-          <p:nvPr>
-            <p:ph idx="1"/>
-          </p:nvPr>
-        </p:nvSpPr>
-        <p:spPr/>
-        <p:txBody>
-          <a:bodyPr/>
+          <p:cNvPr id="4" name="TextBox 3"/>
+          <p:cNvSpPr txBox="1"/>
+          <p:nvPr/>
+        </p:nvSpPr>
+        <p:spPr>
+          <a:xfrm>
+            <a:off x="731520" y="1097280"/>
+            <a:ext cx="7680960" cy="3657600"/>
+          </a:xfrm>
+          <a:prstGeom prst="rect">
+            <a:avLst/>
+          </a:prstGeom>
+          <a:noFill/>
+        </p:spPr>
+        <p:txBody>
+          <a:bodyPr wrap="square">
+            <a:spAutoFit/>
+          </a:bodyPr>
           <a:lstStyle/>
           <a:p>
             <a:pPr>
+              <a:spcBef>
+                <a:spcPts val="400"/>
+              </a:spcBef>
+              <a:spcAft>
+                <a:spcPts val="400"/>
+              </a:spcAft>
               <a:defRPr sz="1800">
                 <a:solidFill>
                   <a:srgbClr val="333333"/>
@@ -4565,6 +5609,12 @@
           </a:p>
           <a:p>
             <a:pPr>
+              <a:spcBef>
+                <a:spcPts val="400"/>
+              </a:spcBef>
+              <a:spcAft>
+                <a:spcPts val="400"/>
+              </a:spcAft>
               <a:defRPr sz="1800">
                 <a:solidFill>
                   <a:srgbClr val="333333"/>
@@ -4577,6 +5627,12 @@
           </a:p>
           <a:p>
             <a:pPr>
+              <a:spcBef>
+                <a:spcPts val="400"/>
+              </a:spcBef>
+              <a:spcAft>
+                <a:spcPts val="400"/>
+              </a:spcAft>
               <a:defRPr sz="1800">
                 <a:solidFill>
                   <a:srgbClr val="333333"/>

--- a/匠技研工業プロジェクト_オンボーディング計画.pptx
+++ b/匠技研工業プロジェクト_オンボーディング計画.pptx
@@ -3287,14 +3287,59 @@
       </p:sp>
       <p:sp>
         <p:nvSpPr>
-          <p:cNvPr id="4" name="TextBox 3"/>
+          <p:cNvPr id="4" name="Rectangle 3"/>
+          <p:cNvSpPr/>
+          <p:nvPr/>
+        </p:nvSpPr>
+        <p:spPr>
+          <a:xfrm>
+            <a:off x="731520" y="1371600"/>
+            <a:ext cx="1645920" cy="2286000"/>
+          </a:xfrm>
+          <a:prstGeom prst="rect">
+            <a:avLst/>
+          </a:prstGeom>
+          <a:solidFill>
+            <a:srgbClr val="4682B4"/>
+          </a:solidFill>
+          <a:ln w="25400">
+            <a:solidFill>
+              <a:srgbClr val="1E3A5F"/>
+            </a:solidFill>
+          </a:ln>
+        </p:spPr>
+        <p:style>
+          <a:lnRef idx="1">
+            <a:schemeClr val="accent1"/>
+          </a:lnRef>
+          <a:fillRef idx="3">
+            <a:schemeClr val="accent1"/>
+          </a:fillRef>
+          <a:effectRef idx="2">
+            <a:schemeClr val="accent1"/>
+          </a:effectRef>
+          <a:fontRef idx="minor">
+            <a:schemeClr val="lt1"/>
+          </a:fontRef>
+        </p:style>
+        <p:txBody>
+          <a:bodyPr rtlCol="0" anchor="ctr"/>
+          <a:lstStyle/>
+          <a:p>
+            <a:pPr algn="ctr"/>
+          </a:p>
+        </p:txBody>
+      </p:sp>
+      <p:sp>
+        <p:nvSpPr>
+          <p:cNvPr id="5" name="TextBox 4"/>
           <p:cNvSpPr txBox="1"/>
           <p:nvPr/>
         </p:nvSpPr>
         <p:spPr>
           <a:xfrm>
-            <a:off x="731520" y="1097280"/>
-            <a:ext cx="7680960" cy="3657600"/>
+            <a:off x="822960" y="2286000"/>
+            <a:ext cx="1463040" cy="1371600"/>
           </a:xfrm>
           <a:prstGeom prst="rect">
             <a:avLst/>
@@ -3307,16 +3352,10 @@
           </a:bodyPr>
           <a:lstStyle/>
           <a:p>
-            <a:pPr>
-              <a:spcBef>
-                <a:spcPts val="400"/>
-              </a:spcBef>
-              <a:spcAft>
-                <a:spcPts val="400"/>
-              </a:spcAft>
-              <a:defRPr sz="1800">
-                <a:solidFill>
-                  <a:srgbClr val="333333"/>
+            <a:pPr algn="ctr">
+              <a:defRPr sz="1400" b="1">
+                <a:solidFill>
+                  <a:srgbClr val="FFFFFF"/>
                 </a:solidFill>
               </a:defRPr>
             </a:pPr>
@@ -3324,17 +3363,79 @@
               <a:t>Google Workspace</a:t>
             </a:r>
           </a:p>
-          <a:p>
-            <a:pPr>
-              <a:spcBef>
-                <a:spcPts val="400"/>
-              </a:spcBef>
-              <a:spcAft>
-                <a:spcPts val="400"/>
-              </a:spcAft>
-              <a:defRPr sz="1800">
-                <a:solidFill>
-                  <a:srgbClr val="333333"/>
+        </p:txBody>
+      </p:sp>
+      <p:sp>
+        <p:nvSpPr>
+          <p:cNvPr id="6" name="Rectangle 5"/>
+          <p:cNvSpPr/>
+          <p:nvPr/>
+        </p:nvSpPr>
+        <p:spPr>
+          <a:xfrm>
+            <a:off x="2926080" y="1371600"/>
+            <a:ext cx="1645920" cy="2286000"/>
+          </a:xfrm>
+          <a:prstGeom prst="rect">
+            <a:avLst/>
+          </a:prstGeom>
+          <a:solidFill>
+            <a:srgbClr val="4682B4"/>
+          </a:solidFill>
+          <a:ln w="25400">
+            <a:solidFill>
+              <a:srgbClr val="1E3A5F"/>
+            </a:solidFill>
+          </a:ln>
+        </p:spPr>
+        <p:style>
+          <a:lnRef idx="1">
+            <a:schemeClr val="accent1"/>
+          </a:lnRef>
+          <a:fillRef idx="3">
+            <a:schemeClr val="accent1"/>
+          </a:fillRef>
+          <a:effectRef idx="2">
+            <a:schemeClr val="accent1"/>
+          </a:effectRef>
+          <a:fontRef idx="minor">
+            <a:schemeClr val="lt1"/>
+          </a:fontRef>
+        </p:style>
+        <p:txBody>
+          <a:bodyPr rtlCol="0" anchor="ctr"/>
+          <a:lstStyle/>
+          <a:p>
+            <a:pPr algn="ctr"/>
+          </a:p>
+        </p:txBody>
+      </p:sp>
+      <p:sp>
+        <p:nvSpPr>
+          <p:cNvPr id="7" name="TextBox 6"/>
+          <p:cNvSpPr txBox="1"/>
+          <p:nvPr/>
+        </p:nvSpPr>
+        <p:spPr>
+          <a:xfrm>
+            <a:off x="3017520" y="2286000"/>
+            <a:ext cx="1463040" cy="1371600"/>
+          </a:xfrm>
+          <a:prstGeom prst="rect">
+            <a:avLst/>
+          </a:prstGeom>
+          <a:noFill/>
+        </p:spPr>
+        <p:txBody>
+          <a:bodyPr wrap="square">
+            <a:spAutoFit/>
+          </a:bodyPr>
+          <a:lstStyle/>
+          <a:p>
+            <a:pPr algn="ctr">
+              <a:defRPr sz="1400" b="1">
+                <a:solidFill>
+                  <a:srgbClr val="FFFFFF"/>
                 </a:solidFill>
               </a:defRPr>
             </a:pPr>
@@ -3342,17 +3443,79 @@
               <a:t>Slack</a:t>
             </a:r>
           </a:p>
-          <a:p>
-            <a:pPr>
-              <a:spcBef>
-                <a:spcPts val="400"/>
-              </a:spcBef>
-              <a:spcAft>
-                <a:spcPts val="400"/>
-              </a:spcAft>
-              <a:defRPr sz="1800">
-                <a:solidFill>
-                  <a:srgbClr val="333333"/>
+        </p:txBody>
+      </p:sp>
+      <p:sp>
+        <p:nvSpPr>
+          <p:cNvPr id="8" name="Rectangle 7"/>
+          <p:cNvSpPr/>
+          <p:nvPr/>
+        </p:nvSpPr>
+        <p:spPr>
+          <a:xfrm>
+            <a:off x="5120640" y="1371600"/>
+            <a:ext cx="1645920" cy="2286000"/>
+          </a:xfrm>
+          <a:prstGeom prst="rect">
+            <a:avLst/>
+          </a:prstGeom>
+          <a:solidFill>
+            <a:srgbClr val="4682B4"/>
+          </a:solidFill>
+          <a:ln w="25400">
+            <a:solidFill>
+              <a:srgbClr val="1E3A5F"/>
+            </a:solidFill>
+          </a:ln>
+        </p:spPr>
+        <p:style>
+          <a:lnRef idx="1">
+            <a:schemeClr val="accent1"/>
+          </a:lnRef>
+          <a:fillRef idx="3">
+            <a:schemeClr val="accent1"/>
+          </a:fillRef>
+          <a:effectRef idx="2">
+            <a:schemeClr val="accent1"/>
+          </a:effectRef>
+          <a:fontRef idx="minor">
+            <a:schemeClr val="lt1"/>
+          </a:fontRef>
+        </p:style>
+        <p:txBody>
+          <a:bodyPr rtlCol="0" anchor="ctr"/>
+          <a:lstStyle/>
+          <a:p>
+            <a:pPr algn="ctr"/>
+          </a:p>
+        </p:txBody>
+      </p:sp>
+      <p:sp>
+        <p:nvSpPr>
+          <p:cNvPr id="9" name="TextBox 8"/>
+          <p:cNvSpPr txBox="1"/>
+          <p:nvPr/>
+        </p:nvSpPr>
+        <p:spPr>
+          <a:xfrm>
+            <a:off x="5212079" y="2286000"/>
+            <a:ext cx="1463040" cy="1371600"/>
+          </a:xfrm>
+          <a:prstGeom prst="rect">
+            <a:avLst/>
+          </a:prstGeom>
+          <a:noFill/>
+        </p:spPr>
+        <p:txBody>
+          <a:bodyPr wrap="square">
+            <a:spAutoFit/>
+          </a:bodyPr>
+          <a:lstStyle/>
+          <a:p>
+            <a:pPr algn="ctr">
+              <a:defRPr sz="1400" b="1">
+                <a:solidFill>
+                  <a:srgbClr val="FFFFFF"/>
                 </a:solidFill>
               </a:defRPr>
             </a:pPr>
@@ -3360,22 +3523,84 @@
               <a:t>Notion</a:t>
             </a:r>
           </a:p>
-          <a:p>
-            <a:pPr>
-              <a:spcBef>
-                <a:spcPts val="400"/>
-              </a:spcBef>
-              <a:spcAft>
-                <a:spcPts val="400"/>
-              </a:spcAft>
-              <a:defRPr sz="1800">
-                <a:solidFill>
-                  <a:srgbClr val="333333"/>
+        </p:txBody>
+      </p:sp>
+      <p:sp>
+        <p:nvSpPr>
+          <p:cNvPr id="10" name="Rectangle 9"/>
+          <p:cNvSpPr/>
+          <p:nvPr/>
+        </p:nvSpPr>
+        <p:spPr>
+          <a:xfrm>
+            <a:off x="7315200" y="1371600"/>
+            <a:ext cx="1645920" cy="2286000"/>
+          </a:xfrm>
+          <a:prstGeom prst="rect">
+            <a:avLst/>
+          </a:prstGeom>
+          <a:solidFill>
+            <a:srgbClr val="4682B4"/>
+          </a:solidFill>
+          <a:ln w="25400">
+            <a:solidFill>
+              <a:srgbClr val="1E3A5F"/>
+            </a:solidFill>
+          </a:ln>
+        </p:spPr>
+        <p:style>
+          <a:lnRef idx="1">
+            <a:schemeClr val="accent1"/>
+          </a:lnRef>
+          <a:fillRef idx="3">
+            <a:schemeClr val="accent1"/>
+          </a:fillRef>
+          <a:effectRef idx="2">
+            <a:schemeClr val="accent1"/>
+          </a:effectRef>
+          <a:fontRef idx="minor">
+            <a:schemeClr val="lt1"/>
+          </a:fontRef>
+        </p:style>
+        <p:txBody>
+          <a:bodyPr rtlCol="0" anchor="ctr"/>
+          <a:lstStyle/>
+          <a:p>
+            <a:pPr algn="ctr"/>
+          </a:p>
+        </p:txBody>
+      </p:sp>
+      <p:sp>
+        <p:nvSpPr>
+          <p:cNvPr id="11" name="TextBox 10"/>
+          <p:cNvSpPr txBox="1"/>
+          <p:nvPr/>
+        </p:nvSpPr>
+        <p:spPr>
+          <a:xfrm>
+            <a:off x="7406640" y="2286000"/>
+            <a:ext cx="1463040" cy="1371600"/>
+          </a:xfrm>
+          <a:prstGeom prst="rect">
+            <a:avLst/>
+          </a:prstGeom>
+          <a:noFill/>
+        </p:spPr>
+        <p:txBody>
+          <a:bodyPr wrap="square">
+            <a:spAutoFit/>
+          </a:bodyPr>
+          <a:lstStyle/>
+          <a:p>
+            <a:pPr algn="ctr">
+              <a:defRPr sz="1400" b="1">
+                <a:solidFill>
+                  <a:srgbClr val="FFFFFF"/>
                 </a:solidFill>
               </a:defRPr>
             </a:pPr>
             <a:r>
-              <a:t>匠フォース（社内システム）</a:t>
+              <a:t>匠フォース</a:t>
             </a:r>
           </a:p>
         </p:txBody>
@@ -3488,14 +3713,54 @@
       </p:sp>
       <p:sp>
         <p:nvSpPr>
-          <p:cNvPr id="4" name="TextBox 3"/>
+          <p:cNvPr id="4" name="Rectangle 3"/>
+          <p:cNvSpPr/>
+          <p:nvPr/>
+        </p:nvSpPr>
+        <p:spPr>
+          <a:xfrm>
+            <a:off x="3200400" y="1371600"/>
+            <a:ext cx="2743200" cy="548640"/>
+          </a:xfrm>
+          <a:prstGeom prst="rect">
+            <a:avLst/>
+          </a:prstGeom>
+          <a:solidFill>
+            <a:srgbClr val="1E3A5F"/>
+          </a:solidFill>
+        </p:spPr>
+        <p:style>
+          <a:lnRef idx="1">
+            <a:schemeClr val="accent1"/>
+          </a:lnRef>
+          <a:fillRef idx="3">
+            <a:schemeClr val="accent1"/>
+          </a:fillRef>
+          <a:effectRef idx="2">
+            <a:schemeClr val="accent1"/>
+          </a:effectRef>
+          <a:fontRef idx="minor">
+            <a:schemeClr val="lt1"/>
+          </a:fontRef>
+        </p:style>
+        <p:txBody>
+          <a:bodyPr rtlCol="0" anchor="ctr"/>
+          <a:lstStyle/>
+          <a:p>
+            <a:pPr algn="ctr"/>
+          </a:p>
+        </p:txBody>
+      </p:sp>
+      <p:sp>
+        <p:nvSpPr>
+          <p:cNvPr id="5" name="TextBox 4"/>
           <p:cNvSpPr txBox="1"/>
           <p:nvPr/>
         </p:nvSpPr>
         <p:spPr>
           <a:xfrm>
-            <a:off x="731520" y="1097280"/>
-            <a:ext cx="7680960" cy="3657600"/>
+            <a:off x="3291840" y="1417320"/>
+            <a:ext cx="2560320" cy="457200"/>
           </a:xfrm>
           <a:prstGeom prst="rect">
             <a:avLst/>
@@ -3503,21 +3768,15 @@
           <a:noFill/>
         </p:spPr>
         <p:txBody>
-          <a:bodyPr wrap="square">
+          <a:bodyPr wrap="none">
             <a:spAutoFit/>
           </a:bodyPr>
           <a:lstStyle/>
           <a:p>
-            <a:pPr>
-              <a:spcBef>
-                <a:spcPts val="400"/>
-              </a:spcBef>
-              <a:spcAft>
-                <a:spcPts val="400"/>
-              </a:spcAft>
-              <a:defRPr sz="1800">
-                <a:solidFill>
-                  <a:srgbClr val="333333"/>
+            <a:pPr algn="ctr">
+              <a:defRPr sz="1400" b="1">
+                <a:solidFill>
+                  <a:srgbClr val="FFFFFF"/>
                 </a:solidFill>
               </a:defRPr>
             </a:pPr>
@@ -3525,17 +3784,74 @@
               <a:t>メイン: 原様</a:t>
             </a:r>
           </a:p>
-          <a:p>
-            <a:pPr>
-              <a:spcBef>
-                <a:spcPts val="400"/>
-              </a:spcBef>
-              <a:spcAft>
-                <a:spcPts val="400"/>
-              </a:spcAft>
-              <a:defRPr sz="1800">
-                <a:solidFill>
-                  <a:srgbClr val="333333"/>
+        </p:txBody>
+      </p:sp>
+      <p:sp>
+        <p:nvSpPr>
+          <p:cNvPr id="6" name="Rectangle 5"/>
+          <p:cNvSpPr/>
+          <p:nvPr/>
+        </p:nvSpPr>
+        <p:spPr>
+          <a:xfrm>
+            <a:off x="914400" y="2743200"/>
+            <a:ext cx="3200400" cy="548640"/>
+          </a:xfrm>
+          <a:prstGeom prst="rect">
+            <a:avLst/>
+          </a:prstGeom>
+          <a:solidFill>
+            <a:srgbClr val="DCF0FF"/>
+          </a:solidFill>
+        </p:spPr>
+        <p:style>
+          <a:lnRef idx="1">
+            <a:schemeClr val="accent1"/>
+          </a:lnRef>
+          <a:fillRef idx="3">
+            <a:schemeClr val="accent1"/>
+          </a:fillRef>
+          <a:effectRef idx="2">
+            <a:schemeClr val="accent1"/>
+          </a:effectRef>
+          <a:fontRef idx="minor">
+            <a:schemeClr val="lt1"/>
+          </a:fontRef>
+        </p:style>
+        <p:txBody>
+          <a:bodyPr rtlCol="0" anchor="ctr"/>
+          <a:lstStyle/>
+          <a:p>
+            <a:pPr algn="ctr"/>
+          </a:p>
+        </p:txBody>
+      </p:sp>
+      <p:sp>
+        <p:nvSpPr>
+          <p:cNvPr id="7" name="TextBox 6"/>
+          <p:cNvSpPr txBox="1"/>
+          <p:nvPr/>
+        </p:nvSpPr>
+        <p:spPr>
+          <a:xfrm>
+            <a:off x="1005840" y="2788920"/>
+            <a:ext cx="3017520" cy="457200"/>
+          </a:xfrm>
+          <a:prstGeom prst="rect">
+            <a:avLst/>
+          </a:prstGeom>
+          <a:noFill/>
+        </p:spPr>
+        <p:txBody>
+          <a:bodyPr wrap="none">
+            <a:spAutoFit/>
+          </a:bodyPr>
+          <a:lstStyle/>
+          <a:p>
+            <a:pPr algn="ctr">
+              <a:defRPr sz="1300">
+                <a:solidFill>
+                  <a:srgbClr val="1E3A5F"/>
                 </a:solidFill>
               </a:defRPr>
             </a:pPr>
@@ -3543,22 +3859,114 @@
               <a:t>サブサポート: 高木さん、中野さん</a:t>
             </a:r>
           </a:p>
-          <a:p>
-            <a:pPr>
-              <a:spcBef>
-                <a:spcPts val="400"/>
-              </a:spcBef>
-              <a:spcAft>
-                <a:spcPts val="400"/>
-              </a:spcAft>
-              <a:defRPr sz="1800">
-                <a:solidFill>
-                  <a:srgbClr val="333333"/>
+        </p:txBody>
+      </p:sp>
+      <p:cxnSp>
+        <p:nvCxnSpPr>
+          <p:cNvPr id="8" name="Connector 7"/>
+          <p:cNvCxnSpPr/>
+          <p:nvPr/>
+        </p:nvCxnSpPr>
+        <p:spPr>
+          <a:xfrm>
+            <a:off x="4572000" y="1920240"/>
+            <a:ext cx="0" cy="822960"/>
+          </a:xfrm>
+          <a:prstGeom prst="curvedConnector3">
+            <a:avLst/>
+          </a:prstGeom>
+          <a:ln w="25400">
+            <a:solidFill>
+              <a:srgbClr val="4682B4"/>
+            </a:solidFill>
+          </a:ln>
+        </p:spPr>
+        <p:style>
+          <a:lnRef idx="2">
+            <a:schemeClr val="accent1"/>
+          </a:lnRef>
+          <a:fillRef idx="0">
+            <a:schemeClr val="accent1"/>
+          </a:fillRef>
+          <a:effectRef idx="1">
+            <a:schemeClr val="accent1"/>
+          </a:effectRef>
+          <a:fontRef idx="minor">
+            <a:schemeClr val="tx1"/>
+          </a:fontRef>
+        </p:style>
+      </p:cxnSp>
+      <p:sp>
+        <p:nvSpPr>
+          <p:cNvPr id="9" name="Rectangle 8"/>
+          <p:cNvSpPr/>
+          <p:nvPr/>
+        </p:nvSpPr>
+        <p:spPr>
+          <a:xfrm>
+            <a:off x="5029200" y="2743200"/>
+            <a:ext cx="3200400" cy="548640"/>
+          </a:xfrm>
+          <a:prstGeom prst="rect">
+            <a:avLst/>
+          </a:prstGeom>
+          <a:solidFill>
+            <a:srgbClr val="DCF0FF"/>
+          </a:solidFill>
+        </p:spPr>
+        <p:style>
+          <a:lnRef idx="1">
+            <a:schemeClr val="accent1"/>
+          </a:lnRef>
+          <a:fillRef idx="3">
+            <a:schemeClr val="accent1"/>
+          </a:fillRef>
+          <a:effectRef idx="2">
+            <a:schemeClr val="accent1"/>
+          </a:effectRef>
+          <a:fontRef idx="minor">
+            <a:schemeClr val="lt1"/>
+          </a:fontRef>
+        </p:style>
+        <p:txBody>
+          <a:bodyPr rtlCol="0" anchor="ctr"/>
+          <a:lstStyle/>
+          <a:p>
+            <a:pPr algn="ctr"/>
+          </a:p>
+        </p:txBody>
+      </p:sp>
+      <p:sp>
+        <p:nvSpPr>
+          <p:cNvPr id="10" name="TextBox 9"/>
+          <p:cNvSpPr txBox="1"/>
+          <p:nvPr/>
+        </p:nvSpPr>
+        <p:spPr>
+          <a:xfrm>
+            <a:off x="5120640" y="2788920"/>
+            <a:ext cx="3017520" cy="457200"/>
+          </a:xfrm>
+          <a:prstGeom prst="rect">
+            <a:avLst/>
+          </a:prstGeom>
+          <a:noFill/>
+        </p:spPr>
+        <p:txBody>
+          <a:bodyPr wrap="none">
+            <a:spAutoFit/>
+          </a:bodyPr>
+          <a:lstStyle/>
+          <a:p>
+            <a:pPr algn="ctr">
+              <a:defRPr sz="1300">
+                <a:solidFill>
+                  <a:srgbClr val="1E3A5F"/>
                 </a:solidFill>
               </a:defRPr>
             </a:pPr>
             <a:r>
-              <a:t>体系化: レクチャー内容の整理・ドキュメント化</a:t>
+              <a:t>体系化: ドキュメント化</a:t>
             </a:r>
           </a:p>
         </p:txBody>
@@ -3671,14 +4079,54 @@
       </p:sp>
       <p:sp>
         <p:nvSpPr>
-          <p:cNvPr id="4" name="TextBox 3"/>
+          <p:cNvPr id="4" name="Rectangle 3"/>
+          <p:cNvSpPr/>
+          <p:nvPr/>
+        </p:nvSpPr>
+        <p:spPr>
+          <a:xfrm>
+            <a:off x="731520" y="1097280"/>
+            <a:ext cx="7680960" cy="457200"/>
+          </a:xfrm>
+          <a:prstGeom prst="rect">
+            <a:avLst/>
+          </a:prstGeom>
+          <a:solidFill>
+            <a:srgbClr val="FFC800"/>
+          </a:solidFill>
+        </p:spPr>
+        <p:style>
+          <a:lnRef idx="1">
+            <a:schemeClr val="accent1"/>
+          </a:lnRef>
+          <a:fillRef idx="3">
+            <a:schemeClr val="accent1"/>
+          </a:fillRef>
+          <a:effectRef idx="2">
+            <a:schemeClr val="accent1"/>
+          </a:effectRef>
+          <a:fontRef idx="minor">
+            <a:schemeClr val="lt1"/>
+          </a:fontRef>
+        </p:style>
+        <p:txBody>
+          <a:bodyPr rtlCol="0" anchor="ctr"/>
+          <a:lstStyle/>
+          <a:p>
+            <a:pPr algn="ctr"/>
+          </a:p>
+        </p:txBody>
+      </p:sp>
+      <p:sp>
+        <p:nvSpPr>
+          <p:cNvPr id="5" name="TextBox 4"/>
           <p:cNvSpPr txBox="1"/>
           <p:nvPr/>
         </p:nvSpPr>
         <p:spPr>
           <a:xfrm>
-            <a:off x="731520" y="1097280"/>
-            <a:ext cx="7680960" cy="3657600"/>
+            <a:off x="914400" y="1143000"/>
+            <a:ext cx="7315200" cy="365760"/>
           </a:xfrm>
           <a:prstGeom prst="rect">
             <a:avLst/>
@@ -3686,88 +4134,238 @@
           <a:noFill/>
         </p:spPr>
         <p:txBody>
-          <a:bodyPr wrap="square">
+          <a:bodyPr wrap="none">
             <a:spAutoFit/>
           </a:bodyPr>
           <a:lstStyle/>
           <a:p>
             <a:pPr>
-              <a:spcBef>
-                <a:spcPts val="400"/>
-              </a:spcBef>
-              <a:spcAft>
-                <a:spcPts val="400"/>
-              </a:spcAft>
-              <a:defRPr sz="1800">
+              <a:defRPr sz="1400" b="1">
+                <a:solidFill>
+                  <a:srgbClr val="1E3A5F"/>
+                </a:solidFill>
+              </a:defRPr>
+            </a:pPr>
+            <a:r>
+              <a:t>Q: Slackチャンネル参加範囲は？</a:t>
+            </a:r>
+          </a:p>
+        </p:txBody>
+      </p:sp>
+      <p:sp>
+        <p:nvSpPr>
+          <p:cNvPr id="6" name="Rectangle 5"/>
+          <p:cNvSpPr/>
+          <p:nvPr/>
+        </p:nvSpPr>
+        <p:spPr>
+          <a:xfrm>
+            <a:off x="914400" y="1645919"/>
+            <a:ext cx="7315200" cy="457200"/>
+          </a:xfrm>
+          <a:prstGeom prst="rect">
+            <a:avLst/>
+          </a:prstGeom>
+          <a:solidFill>
+            <a:srgbClr val="DCF0FF"/>
+          </a:solidFill>
+        </p:spPr>
+        <p:style>
+          <a:lnRef idx="1">
+            <a:schemeClr val="accent1"/>
+          </a:lnRef>
+          <a:fillRef idx="3">
+            <a:schemeClr val="accent1"/>
+          </a:fillRef>
+          <a:effectRef idx="2">
+            <a:schemeClr val="accent1"/>
+          </a:effectRef>
+          <a:fontRef idx="minor">
+            <a:schemeClr val="lt1"/>
+          </a:fontRef>
+        </p:style>
+        <p:txBody>
+          <a:bodyPr rtlCol="0" anchor="ctr"/>
+          <a:lstStyle/>
+          <a:p>
+            <a:pPr algn="ctr"/>
+          </a:p>
+        </p:txBody>
+      </p:sp>
+      <p:sp>
+        <p:nvSpPr>
+          <p:cNvPr id="7" name="TextBox 6"/>
+          <p:cNvSpPr txBox="1"/>
+          <p:nvPr/>
+        </p:nvSpPr>
+        <p:spPr>
+          <a:xfrm>
+            <a:off x="1097280" y="1691639"/>
+            <a:ext cx="6949440" cy="365760"/>
+          </a:xfrm>
+          <a:prstGeom prst="rect">
+            <a:avLst/>
+          </a:prstGeom>
+          <a:noFill/>
+        </p:spPr>
+        <p:txBody>
+          <a:bodyPr wrap="none">
+            <a:spAutoFit/>
+          </a:bodyPr>
+          <a:lstStyle/>
+          <a:p>
+            <a:pPr>
+              <a:defRPr sz="1400">
                 <a:solidFill>
                   <a:srgbClr val="333333"/>
                 </a:solidFill>
               </a:defRPr>
             </a:pPr>
             <a:r>
-              <a:t>Q: Slackチャンネル参加範囲は？</a:t>
-            </a:r>
-          </a:p>
+              <a:t>A: 現状のみか他チャンネルも確認要</a:t>
+            </a:r>
+          </a:p>
+        </p:txBody>
+      </p:sp>
+      <p:sp>
+        <p:nvSpPr>
+          <p:cNvPr id="8" name="Rectangle 7"/>
+          <p:cNvSpPr/>
+          <p:nvPr/>
+        </p:nvSpPr>
+        <p:spPr>
+          <a:xfrm>
+            <a:off x="731520" y="2651760"/>
+            <a:ext cx="7680960" cy="457200"/>
+          </a:xfrm>
+          <a:prstGeom prst="rect">
+            <a:avLst/>
+          </a:prstGeom>
+          <a:solidFill>
+            <a:srgbClr val="FFC800"/>
+          </a:solidFill>
+        </p:spPr>
+        <p:style>
+          <a:lnRef idx="1">
+            <a:schemeClr val="accent1"/>
+          </a:lnRef>
+          <a:fillRef idx="3">
+            <a:schemeClr val="accent1"/>
+          </a:fillRef>
+          <a:effectRef idx="2">
+            <a:schemeClr val="accent1"/>
+          </a:effectRef>
+          <a:fontRef idx="minor">
+            <a:schemeClr val="lt1"/>
+          </a:fontRef>
+        </p:style>
+        <p:txBody>
+          <a:bodyPr rtlCol="0" anchor="ctr"/>
+          <a:lstStyle/>
+          <a:p>
+            <a:pPr algn="ctr"/>
+          </a:p>
+        </p:txBody>
+      </p:sp>
+      <p:sp>
+        <p:nvSpPr>
+          <p:cNvPr id="9" name="TextBox 8"/>
+          <p:cNvSpPr txBox="1"/>
+          <p:nvPr/>
+        </p:nvSpPr>
+        <p:spPr>
+          <a:xfrm>
+            <a:off x="914400" y="2697479"/>
+            <a:ext cx="7315200" cy="365760"/>
+          </a:xfrm>
+          <a:prstGeom prst="rect">
+            <a:avLst/>
+          </a:prstGeom>
+          <a:noFill/>
+        </p:spPr>
+        <p:txBody>
+          <a:bodyPr wrap="none">
+            <a:spAutoFit/>
+          </a:bodyPr>
+          <a:lstStyle/>
           <a:p>
             <a:pPr>
-              <a:spcBef>
-                <a:spcPts val="400"/>
-              </a:spcBef>
-              <a:spcAft>
-                <a:spcPts val="400"/>
-              </a:spcAft>
-              <a:defRPr sz="1800">
-                <a:solidFill>
-                  <a:srgbClr val="333333"/>
+              <a:defRPr sz="1400" b="1">
+                <a:solidFill>
+                  <a:srgbClr val="1E3A5F"/>
                 </a:solidFill>
               </a:defRPr>
             </a:pPr>
             <a:r>
-              <a:t>A: 現状のみか他チャンネルも確認要</a:t>
-            </a:r>
-          </a:p>
+              <a:t>Q: アカウント発行タイムラインは？</a:t>
+            </a:r>
+          </a:p>
+        </p:txBody>
+      </p:sp>
+      <p:sp>
+        <p:nvSpPr>
+          <p:cNvPr id="10" name="Rectangle 9"/>
+          <p:cNvSpPr/>
+          <p:nvPr/>
+        </p:nvSpPr>
+        <p:spPr>
+          <a:xfrm>
+            <a:off x="914400" y="3200400"/>
+            <a:ext cx="7315200" cy="457200"/>
+          </a:xfrm>
+          <a:prstGeom prst="rect">
+            <a:avLst/>
+          </a:prstGeom>
+          <a:solidFill>
+            <a:srgbClr val="DCF0FF"/>
+          </a:solidFill>
+        </p:spPr>
+        <p:style>
+          <a:lnRef idx="1">
+            <a:schemeClr val="accent1"/>
+          </a:lnRef>
+          <a:fillRef idx="3">
+            <a:schemeClr val="accent1"/>
+          </a:fillRef>
+          <a:effectRef idx="2">
+            <a:schemeClr val="accent1"/>
+          </a:effectRef>
+          <a:fontRef idx="minor">
+            <a:schemeClr val="lt1"/>
+          </a:fontRef>
+        </p:style>
+        <p:txBody>
+          <a:bodyPr rtlCol="0" anchor="ctr"/>
+          <a:lstStyle/>
+          <a:p>
+            <a:pPr algn="ctr"/>
+          </a:p>
+        </p:txBody>
+      </p:sp>
+      <p:sp>
+        <p:nvSpPr>
+          <p:cNvPr id="11" name="TextBox 10"/>
+          <p:cNvSpPr txBox="1"/>
+          <p:nvPr/>
+        </p:nvSpPr>
+        <p:spPr>
+          <a:xfrm>
+            <a:off x="1097280" y="3246120"/>
+            <a:ext cx="6949440" cy="365760"/>
+          </a:xfrm>
+          <a:prstGeom prst="rect">
+            <a:avLst/>
+          </a:prstGeom>
+          <a:noFill/>
+        </p:spPr>
+        <p:txBody>
+          <a:bodyPr wrap="none">
+            <a:spAutoFit/>
+          </a:bodyPr>
+          <a:lstStyle/>
           <a:p>
             <a:pPr>
-              <a:spcBef>
-                <a:spcPts val="400"/>
-              </a:spcBef>
-              <a:spcAft>
-                <a:spcPts val="400"/>
-              </a:spcAft>
-              <a:defRPr sz="1800">
-                <a:solidFill>
-                  <a:srgbClr val="333333"/>
-                </a:solidFill>
-              </a:defRPr>
-            </a:pPr>
-          </a:p>
-          <a:p>
-            <a:pPr>
-              <a:spcBef>
-                <a:spcPts val="400"/>
-              </a:spcBef>
-              <a:spcAft>
-                <a:spcPts val="400"/>
-              </a:spcAft>
-              <a:defRPr sz="1800">
-                <a:solidFill>
-                  <a:srgbClr val="333333"/>
-                </a:solidFill>
-              </a:defRPr>
-            </a:pPr>
-            <a:r>
-              <a:t>Q: アカウント発行タイムライン？</a:t>
-            </a:r>
-          </a:p>
-          <a:p>
-            <a:pPr>
-              <a:spcBef>
-                <a:spcPts val="400"/>
-              </a:spcBef>
-              <a:spcAft>
-                <a:spcPts val="400"/>
-              </a:spcAft>
-              <a:defRPr sz="1800">
+              <a:defRPr sz="1400">
                 <a:solidFill>
                   <a:srgbClr val="333333"/>
                 </a:solidFill>
@@ -3887,14 +4485,54 @@
       </p:sp>
       <p:sp>
         <p:nvSpPr>
-          <p:cNvPr id="4" name="TextBox 3"/>
+          <p:cNvPr id="4" name="Rectangle 3"/>
+          <p:cNvSpPr/>
+          <p:nvPr/>
+        </p:nvSpPr>
+        <p:spPr>
+          <a:xfrm>
+            <a:off x="731520" y="1097280"/>
+            <a:ext cx="2286000" cy="548640"/>
+          </a:xfrm>
+          <a:prstGeom prst="rect">
+            <a:avLst/>
+          </a:prstGeom>
+          <a:solidFill>
+            <a:srgbClr val="4682B4"/>
+          </a:solidFill>
+        </p:spPr>
+        <p:style>
+          <a:lnRef idx="1">
+            <a:schemeClr val="accent1"/>
+          </a:lnRef>
+          <a:fillRef idx="3">
+            <a:schemeClr val="accent1"/>
+          </a:fillRef>
+          <a:effectRef idx="2">
+            <a:schemeClr val="accent1"/>
+          </a:effectRef>
+          <a:fontRef idx="minor">
+            <a:schemeClr val="lt1"/>
+          </a:fontRef>
+        </p:style>
+        <p:txBody>
+          <a:bodyPr rtlCol="0" anchor="ctr"/>
+          <a:lstStyle/>
+          <a:p>
+            <a:pPr algn="ctr"/>
+          </a:p>
+        </p:txBody>
+      </p:sp>
+      <p:sp>
+        <p:nvSpPr>
+          <p:cNvPr id="5" name="TextBox 4"/>
           <p:cNvSpPr txBox="1"/>
           <p:nvPr/>
         </p:nvSpPr>
         <p:spPr>
           <a:xfrm>
-            <a:off x="731520" y="1097280"/>
-            <a:ext cx="7680960" cy="3657600"/>
+            <a:off x="822960" y="1143000"/>
+            <a:ext cx="2103120" cy="457200"/>
           </a:xfrm>
           <a:prstGeom prst="rect">
             <a:avLst/>
@@ -3902,55 +4540,385 @@
           <a:noFill/>
         </p:spPr>
         <p:txBody>
-          <a:bodyPr wrap="square">
+          <a:bodyPr wrap="none">
             <a:spAutoFit/>
           </a:bodyPr>
           <a:lstStyle/>
           <a:p>
             <a:pPr>
-              <a:spcBef>
-                <a:spcPts val="400"/>
-              </a:spcBef>
-              <a:spcAft>
-                <a:spcPts val="400"/>
-              </a:spcAft>
-              <a:defRPr sz="1800">
+              <a:defRPr sz="1400" b="1">
+                <a:solidFill>
+                  <a:srgbClr val="FFFFFF"/>
+                </a:solidFill>
+              </a:defRPr>
+            </a:pPr>
+            <a:r>
+              <a:t>匠技研工業様</a:t>
+            </a:r>
+          </a:p>
+        </p:txBody>
+      </p:sp>
+      <p:sp>
+        <p:nvSpPr>
+          <p:cNvPr id="6" name="Rectangle 5"/>
+          <p:cNvSpPr/>
+          <p:nvPr/>
+        </p:nvSpPr>
+        <p:spPr>
+          <a:xfrm>
+            <a:off x="3108960" y="1097280"/>
+            <a:ext cx="5303520" cy="548640"/>
+          </a:xfrm>
+          <a:prstGeom prst="rect">
+            <a:avLst/>
+          </a:prstGeom>
+          <a:solidFill>
+            <a:srgbClr val="DCF0FF"/>
+          </a:solidFill>
+        </p:spPr>
+        <p:style>
+          <a:lnRef idx="1">
+            <a:schemeClr val="accent1"/>
+          </a:lnRef>
+          <a:fillRef idx="3">
+            <a:schemeClr val="accent1"/>
+          </a:fillRef>
+          <a:effectRef idx="2">
+            <a:schemeClr val="accent1"/>
+          </a:effectRef>
+          <a:fontRef idx="minor">
+            <a:schemeClr val="lt1"/>
+          </a:fontRef>
+        </p:style>
+        <p:txBody>
+          <a:bodyPr rtlCol="0" anchor="ctr"/>
+          <a:lstStyle/>
+          <a:p>
+            <a:pPr algn="ctr"/>
+          </a:p>
+        </p:txBody>
+      </p:sp>
+      <p:sp>
+        <p:nvSpPr>
+          <p:cNvPr id="7" name="TextBox 6"/>
+          <p:cNvSpPr txBox="1"/>
+          <p:nvPr/>
+        </p:nvSpPr>
+        <p:spPr>
+          <a:xfrm>
+            <a:off x="3291840" y="1143000"/>
+            <a:ext cx="4937760" cy="457200"/>
+          </a:xfrm>
+          <a:prstGeom prst="rect">
+            <a:avLst/>
+          </a:prstGeom>
+          <a:noFill/>
+        </p:spPr>
+        <p:txBody>
+          <a:bodyPr wrap="none">
+            <a:spAutoFit/>
+          </a:bodyPr>
+          <a:lstStyle/>
+          <a:p>
+            <a:pPr>
+              <a:defRPr sz="1400">
                 <a:solidFill>
                   <a:srgbClr val="333333"/>
                 </a:solidFill>
               </a:defRPr>
             </a:pPr>
             <a:r>
-              <a:t>匠技研工業様: アカウント準備、Slack確認</a:t>
-            </a:r>
-          </a:p>
+              <a:t>アカウント準備、Slack確認</a:t>
+            </a:r>
+          </a:p>
+        </p:txBody>
+      </p:sp>
+      <p:sp>
+        <p:nvSpPr>
+          <p:cNvPr id="8" name="Rectangle 7"/>
+          <p:cNvSpPr/>
+          <p:nvPr/>
+        </p:nvSpPr>
+        <p:spPr>
+          <a:xfrm>
+            <a:off x="731520" y="1828800"/>
+            <a:ext cx="2286000" cy="548640"/>
+          </a:xfrm>
+          <a:prstGeom prst="rect">
+            <a:avLst/>
+          </a:prstGeom>
+          <a:solidFill>
+            <a:srgbClr val="4682B4"/>
+          </a:solidFill>
+        </p:spPr>
+        <p:style>
+          <a:lnRef idx="1">
+            <a:schemeClr val="accent1"/>
+          </a:lnRef>
+          <a:fillRef idx="3">
+            <a:schemeClr val="accent1"/>
+          </a:fillRef>
+          <a:effectRef idx="2">
+            <a:schemeClr val="accent1"/>
+          </a:effectRef>
+          <a:fontRef idx="minor">
+            <a:schemeClr val="lt1"/>
+          </a:fontRef>
+        </p:style>
+        <p:txBody>
+          <a:bodyPr rtlCol="0" anchor="ctr"/>
+          <a:lstStyle/>
+          <a:p>
+            <a:pPr algn="ctr"/>
+          </a:p>
+        </p:txBody>
+      </p:sp>
+      <p:sp>
+        <p:nvSpPr>
+          <p:cNvPr id="9" name="TextBox 8"/>
+          <p:cNvSpPr txBox="1"/>
+          <p:nvPr/>
+        </p:nvSpPr>
+        <p:spPr>
+          <a:xfrm>
+            <a:off x="822960" y="1874519"/>
+            <a:ext cx="2103120" cy="457200"/>
+          </a:xfrm>
+          <a:prstGeom prst="rect">
+            <a:avLst/>
+          </a:prstGeom>
+          <a:noFill/>
+        </p:spPr>
+        <p:txBody>
+          <a:bodyPr wrap="none">
+            <a:spAutoFit/>
+          </a:bodyPr>
+          <a:lstStyle/>
           <a:p>
             <a:pPr>
-              <a:spcBef>
-                <a:spcPts val="400"/>
-              </a:spcBef>
-              <a:spcAft>
-                <a:spcPts val="400"/>
-              </a:spcAft>
-              <a:defRPr sz="1800">
+              <a:defRPr sz="1400" b="1">
+                <a:solidFill>
+                  <a:srgbClr val="FFFFFF"/>
+                </a:solidFill>
+              </a:defRPr>
+            </a:pPr>
+            <a:r>
+              <a:t>KOMMONS</a:t>
+            </a:r>
+          </a:p>
+        </p:txBody>
+      </p:sp>
+      <p:sp>
+        <p:nvSpPr>
+          <p:cNvPr id="10" name="Rectangle 9"/>
+          <p:cNvSpPr/>
+          <p:nvPr/>
+        </p:nvSpPr>
+        <p:spPr>
+          <a:xfrm>
+            <a:off x="3108960" y="1828800"/>
+            <a:ext cx="5303520" cy="548640"/>
+          </a:xfrm>
+          <a:prstGeom prst="rect">
+            <a:avLst/>
+          </a:prstGeom>
+          <a:solidFill>
+            <a:srgbClr val="DCF0FF"/>
+          </a:solidFill>
+        </p:spPr>
+        <p:style>
+          <a:lnRef idx="1">
+            <a:schemeClr val="accent1"/>
+          </a:lnRef>
+          <a:fillRef idx="3">
+            <a:schemeClr val="accent1"/>
+          </a:fillRef>
+          <a:effectRef idx="2">
+            <a:schemeClr val="accent1"/>
+          </a:effectRef>
+          <a:fontRef idx="minor">
+            <a:schemeClr val="lt1"/>
+          </a:fontRef>
+        </p:style>
+        <p:txBody>
+          <a:bodyPr rtlCol="0" anchor="ctr"/>
+          <a:lstStyle/>
+          <a:p>
+            <a:pPr algn="ctr"/>
+          </a:p>
+        </p:txBody>
+      </p:sp>
+      <p:sp>
+        <p:nvSpPr>
+          <p:cNvPr id="11" name="TextBox 10"/>
+          <p:cNvSpPr txBox="1"/>
+          <p:nvPr/>
+        </p:nvSpPr>
+        <p:spPr>
+          <a:xfrm>
+            <a:off x="3291840" y="1874519"/>
+            <a:ext cx="4937760" cy="457200"/>
+          </a:xfrm>
+          <a:prstGeom prst="rect">
+            <a:avLst/>
+          </a:prstGeom>
+          <a:noFill/>
+        </p:spPr>
+        <p:txBody>
+          <a:bodyPr wrap="none">
+            <a:spAutoFit/>
+          </a:bodyPr>
+          <a:lstStyle/>
+          <a:p>
+            <a:pPr>
+              <a:defRPr sz="1400">
                 <a:solidFill>
                   <a:srgbClr val="333333"/>
                 </a:solidFill>
               </a:defRPr>
             </a:pPr>
             <a:r>
-              <a:t>KOMMONS: 契約手続き、アカウント発行</a:t>
-            </a:r>
-          </a:p>
+              <a:t>契約手続き、アカウント発行</a:t>
+            </a:r>
+          </a:p>
+        </p:txBody>
+      </p:sp>
+      <p:sp>
+        <p:nvSpPr>
+          <p:cNvPr id="12" name="Rectangle 11"/>
+          <p:cNvSpPr/>
+          <p:nvPr/>
+        </p:nvSpPr>
+        <p:spPr>
+          <a:xfrm>
+            <a:off x="731520" y="2560320"/>
+            <a:ext cx="2286000" cy="548640"/>
+          </a:xfrm>
+          <a:prstGeom prst="rect">
+            <a:avLst/>
+          </a:prstGeom>
+          <a:solidFill>
+            <a:srgbClr val="4682B4"/>
+          </a:solidFill>
+        </p:spPr>
+        <p:style>
+          <a:lnRef idx="1">
+            <a:schemeClr val="accent1"/>
+          </a:lnRef>
+          <a:fillRef idx="3">
+            <a:schemeClr val="accent1"/>
+          </a:fillRef>
+          <a:effectRef idx="2">
+            <a:schemeClr val="accent1"/>
+          </a:effectRef>
+          <a:fontRef idx="minor">
+            <a:schemeClr val="lt1"/>
+          </a:fontRef>
+        </p:style>
+        <p:txBody>
+          <a:bodyPr rtlCol="0" anchor="ctr"/>
+          <a:lstStyle/>
+          <a:p>
+            <a:pPr algn="ctr"/>
+          </a:p>
+        </p:txBody>
+      </p:sp>
+      <p:sp>
+        <p:nvSpPr>
+          <p:cNvPr id="13" name="TextBox 12"/>
+          <p:cNvSpPr txBox="1"/>
+          <p:nvPr/>
+        </p:nvSpPr>
+        <p:spPr>
+          <a:xfrm>
+            <a:off x="822960" y="2606039"/>
+            <a:ext cx="2103120" cy="457200"/>
+          </a:xfrm>
+          <a:prstGeom prst="rect">
+            <a:avLst/>
+          </a:prstGeom>
+          <a:noFill/>
+        </p:spPr>
+        <p:txBody>
+          <a:bodyPr wrap="none">
+            <a:spAutoFit/>
+          </a:bodyPr>
+          <a:lstStyle/>
           <a:p>
             <a:pPr>
-              <a:spcBef>
-                <a:spcPts val="400"/>
-              </a:spcBef>
-              <a:spcAft>
-                <a:spcPts val="400"/>
-              </a:spcAft>
-              <a:defRPr sz="1800">
+              <a:defRPr sz="1400" b="1">
+                <a:solidFill>
+                  <a:srgbClr val="FFFFFF"/>
+                </a:solidFill>
+              </a:defRPr>
+            </a:pPr>
+          </a:p>
+        </p:txBody>
+      </p:sp>
+      <p:sp>
+        <p:nvSpPr>
+          <p:cNvPr id="14" name="Rectangle 13"/>
+          <p:cNvSpPr/>
+          <p:nvPr/>
+        </p:nvSpPr>
+        <p:spPr>
+          <a:xfrm>
+            <a:off x="3108960" y="2560320"/>
+            <a:ext cx="5303520" cy="548640"/>
+          </a:xfrm>
+          <a:prstGeom prst="rect">
+            <a:avLst/>
+          </a:prstGeom>
+          <a:solidFill>
+            <a:srgbClr val="DCF0FF"/>
+          </a:solidFill>
+        </p:spPr>
+        <p:style>
+          <a:lnRef idx="1">
+            <a:schemeClr val="accent1"/>
+          </a:lnRef>
+          <a:fillRef idx="3">
+            <a:schemeClr val="accent1"/>
+          </a:fillRef>
+          <a:effectRef idx="2">
+            <a:schemeClr val="accent1"/>
+          </a:effectRef>
+          <a:fontRef idx="minor">
+            <a:schemeClr val="lt1"/>
+          </a:fontRef>
+        </p:style>
+        <p:txBody>
+          <a:bodyPr rtlCol="0" anchor="ctr"/>
+          <a:lstStyle/>
+          <a:p>
+            <a:pPr algn="ctr"/>
+          </a:p>
+        </p:txBody>
+      </p:sp>
+      <p:sp>
+        <p:nvSpPr>
+          <p:cNvPr id="15" name="TextBox 14"/>
+          <p:cNvSpPr txBox="1"/>
+          <p:nvPr/>
+        </p:nvSpPr>
+        <p:spPr>
+          <a:xfrm>
+            <a:off x="3291840" y="2606039"/>
+            <a:ext cx="4937760" cy="457200"/>
+          </a:xfrm>
+          <a:prstGeom prst="rect">
+            <a:avLst/>
+          </a:prstGeom>
+          <a:noFill/>
+        </p:spPr>
+        <p:txBody>
+          <a:bodyPr wrap="none">
+            <a:spAutoFit/>
+          </a:bodyPr>
+          <a:lstStyle/>
+          <a:p>
+            <a:pPr>
+              <a:defRPr sz="1400">
                 <a:solidFill>
                   <a:srgbClr val="333333"/>
                 </a:solidFill>
@@ -4070,14 +5038,94 @@
       </p:sp>
       <p:sp>
         <p:nvSpPr>
-          <p:cNvPr id="4" name="TextBox 3"/>
+          <p:cNvPr id="4" name="Rectangle 3"/>
+          <p:cNvSpPr/>
+          <p:nvPr/>
+        </p:nvSpPr>
+        <p:spPr>
+          <a:xfrm>
+            <a:off x="914400" y="1371600"/>
+            <a:ext cx="457200" cy="457200"/>
+          </a:xfrm>
+          <a:prstGeom prst="rect">
+            <a:avLst/>
+          </a:prstGeom>
+          <a:solidFill>
+            <a:srgbClr val="4682B4"/>
+          </a:solidFill>
+          <a:ln>
+            <a:solidFill>
+              <a:srgbClr val="1E3A5F"/>
+            </a:solidFill>
+          </a:ln>
+        </p:spPr>
+        <p:style>
+          <a:lnRef idx="1">
+            <a:schemeClr val="accent1"/>
+          </a:lnRef>
+          <a:fillRef idx="3">
+            <a:schemeClr val="accent1"/>
+          </a:fillRef>
+          <a:effectRef idx="2">
+            <a:schemeClr val="accent1"/>
+          </a:effectRef>
+          <a:fontRef idx="minor">
+            <a:schemeClr val="lt1"/>
+          </a:fontRef>
+        </p:style>
+        <p:txBody>
+          <a:bodyPr rtlCol="0" anchor="ctr"/>
+          <a:lstStyle/>
+          <a:p>
+            <a:pPr algn="ctr"/>
+          </a:p>
+        </p:txBody>
+      </p:sp>
+      <p:sp>
+        <p:nvSpPr>
+          <p:cNvPr id="5" name="TextBox 4"/>
           <p:cNvSpPr txBox="1"/>
           <p:nvPr/>
         </p:nvSpPr>
         <p:spPr>
           <a:xfrm>
-            <a:off x="731520" y="1097280"/>
-            <a:ext cx="7680960" cy="3657600"/>
+            <a:off x="987552" y="1417320"/>
+            <a:ext cx="320040" cy="365760"/>
+          </a:xfrm>
+          <a:prstGeom prst="rect">
+            <a:avLst/>
+          </a:prstGeom>
+          <a:noFill/>
+        </p:spPr>
+        <p:txBody>
+          <a:bodyPr wrap="none">
+            <a:spAutoFit/>
+          </a:bodyPr>
+          <a:lstStyle/>
+          <a:p>
+            <a:pPr algn="ctr">
+              <a:defRPr sz="1600" b="1">
+                <a:solidFill>
+                  <a:srgbClr val="FFFFFF"/>
+                </a:solidFill>
+              </a:defRPr>
+            </a:pPr>
+            <a:r>
+              <a:t>1</a:t>
+            </a:r>
+          </a:p>
+        </p:txBody>
+      </p:sp>
+      <p:sp>
+        <p:nvSpPr>
+          <p:cNvPr id="6" name="TextBox 5"/>
+          <p:cNvSpPr txBox="1"/>
+          <p:nvPr/>
+        </p:nvSpPr>
+        <p:spPr>
+          <a:xfrm>
+            <a:off x="1645920" y="1371600"/>
+            <a:ext cx="6858000" cy="548640"/>
           </a:xfrm>
           <a:prstGeom prst="rect">
             <a:avLst/>
@@ -4091,15 +5139,9 @@
           <a:lstStyle/>
           <a:p>
             <a:pPr>
-              <a:spcBef>
-                <a:spcPts val="400"/>
-              </a:spcBef>
-              <a:spcAft>
-                <a:spcPts val="400"/>
-              </a:spcAft>
-              <a:defRPr sz="1800">
-                <a:solidFill>
-                  <a:srgbClr val="333333"/>
+              <a:defRPr sz="1800" b="1">
+                <a:solidFill>
+                  <a:srgbClr val="1E3A5F"/>
                 </a:solidFill>
               </a:defRPr>
             </a:pPr>
@@ -4107,17 +5149,114 @@
               <a:t>ご契約・アカウント準備を急ぎ進め</a:t>
             </a:r>
           </a:p>
+        </p:txBody>
+      </p:sp>
+      <p:sp>
+        <p:nvSpPr>
+          <p:cNvPr id="7" name="Rectangle 6"/>
+          <p:cNvSpPr/>
+          <p:nvPr/>
+        </p:nvSpPr>
+        <p:spPr>
+          <a:xfrm>
+            <a:off x="914400" y="2286000"/>
+            <a:ext cx="457200" cy="457200"/>
+          </a:xfrm>
+          <a:prstGeom prst="rect">
+            <a:avLst/>
+          </a:prstGeom>
+          <a:solidFill>
+            <a:srgbClr val="4682B4"/>
+          </a:solidFill>
+          <a:ln>
+            <a:solidFill>
+              <a:srgbClr val="1E3A5F"/>
+            </a:solidFill>
+          </a:ln>
+        </p:spPr>
+        <p:style>
+          <a:lnRef idx="1">
+            <a:schemeClr val="accent1"/>
+          </a:lnRef>
+          <a:fillRef idx="3">
+            <a:schemeClr val="accent1"/>
+          </a:fillRef>
+          <a:effectRef idx="2">
+            <a:schemeClr val="accent1"/>
+          </a:effectRef>
+          <a:fontRef idx="minor">
+            <a:schemeClr val="lt1"/>
+          </a:fontRef>
+        </p:style>
+        <p:txBody>
+          <a:bodyPr rtlCol="0" anchor="ctr"/>
+          <a:lstStyle/>
+          <a:p>
+            <a:pPr algn="ctr"/>
+          </a:p>
+        </p:txBody>
+      </p:sp>
+      <p:sp>
+        <p:nvSpPr>
+          <p:cNvPr id="8" name="TextBox 7"/>
+          <p:cNvSpPr txBox="1"/>
+          <p:nvPr/>
+        </p:nvSpPr>
+        <p:spPr>
+          <a:xfrm>
+            <a:off x="987552" y="2331720"/>
+            <a:ext cx="320040" cy="365760"/>
+          </a:xfrm>
+          <a:prstGeom prst="rect">
+            <a:avLst/>
+          </a:prstGeom>
+          <a:noFill/>
+        </p:spPr>
+        <p:txBody>
+          <a:bodyPr wrap="none">
+            <a:spAutoFit/>
+          </a:bodyPr>
+          <a:lstStyle/>
+          <a:p>
+            <a:pPr algn="ctr">
+              <a:defRPr sz="1600" b="1">
+                <a:solidFill>
+                  <a:srgbClr val="FFFFFF"/>
+                </a:solidFill>
+              </a:defRPr>
+            </a:pPr>
+            <a:r>
+              <a:t>2</a:t>
+            </a:r>
+          </a:p>
+        </p:txBody>
+      </p:sp>
+      <p:sp>
+        <p:nvSpPr>
+          <p:cNvPr id="9" name="TextBox 8"/>
+          <p:cNvSpPr txBox="1"/>
+          <p:nvPr/>
+        </p:nvSpPr>
+        <p:spPr>
+          <a:xfrm>
+            <a:off x="1645920" y="2286000"/>
+            <a:ext cx="6858000" cy="548640"/>
+          </a:xfrm>
+          <a:prstGeom prst="rect">
+            <a:avLst/>
+          </a:prstGeom>
+          <a:noFill/>
+        </p:spPr>
+        <p:txBody>
+          <a:bodyPr wrap="square">
+            <a:spAutoFit/>
+          </a:bodyPr>
+          <a:lstStyle/>
           <a:p>
             <a:pPr>
-              <a:spcBef>
-                <a:spcPts val="400"/>
-              </a:spcBef>
-              <a:spcAft>
-                <a:spcPts val="400"/>
-              </a:spcAft>
-              <a:defRPr sz="1800">
-                <a:solidFill>
-                  <a:srgbClr val="333333"/>
+              <a:defRPr sz="1800" b="1">
+                <a:solidFill>
+                  <a:srgbClr val="1E3A5F"/>
                 </a:solidFill>
               </a:defRPr>
             </a:pPr>
@@ -4125,17 +5264,114 @@
               <a:t>3月3日稼働開始に向けて準備を加速</a:t>
             </a:r>
           </a:p>
+        </p:txBody>
+      </p:sp>
+      <p:sp>
+        <p:nvSpPr>
+          <p:cNvPr id="10" name="Rectangle 9"/>
+          <p:cNvSpPr/>
+          <p:nvPr/>
+        </p:nvSpPr>
+        <p:spPr>
+          <a:xfrm>
+            <a:off x="914400" y="3200400"/>
+            <a:ext cx="457200" cy="457200"/>
+          </a:xfrm>
+          <a:prstGeom prst="rect">
+            <a:avLst/>
+          </a:prstGeom>
+          <a:solidFill>
+            <a:srgbClr val="4682B4"/>
+          </a:solidFill>
+          <a:ln>
+            <a:solidFill>
+              <a:srgbClr val="1E3A5F"/>
+            </a:solidFill>
+          </a:ln>
+        </p:spPr>
+        <p:style>
+          <a:lnRef idx="1">
+            <a:schemeClr val="accent1"/>
+          </a:lnRef>
+          <a:fillRef idx="3">
+            <a:schemeClr val="accent1"/>
+          </a:fillRef>
+          <a:effectRef idx="2">
+            <a:schemeClr val="accent1"/>
+          </a:effectRef>
+          <a:fontRef idx="minor">
+            <a:schemeClr val="lt1"/>
+          </a:fontRef>
+        </p:style>
+        <p:txBody>
+          <a:bodyPr rtlCol="0" anchor="ctr"/>
+          <a:lstStyle/>
+          <a:p>
+            <a:pPr algn="ctr"/>
+          </a:p>
+        </p:txBody>
+      </p:sp>
+      <p:sp>
+        <p:nvSpPr>
+          <p:cNvPr id="11" name="TextBox 10"/>
+          <p:cNvSpPr txBox="1"/>
+          <p:nvPr/>
+        </p:nvSpPr>
+        <p:spPr>
+          <a:xfrm>
+            <a:off x="987552" y="3246120"/>
+            <a:ext cx="320040" cy="365760"/>
+          </a:xfrm>
+          <a:prstGeom prst="rect">
+            <a:avLst/>
+          </a:prstGeom>
+          <a:noFill/>
+        </p:spPr>
+        <p:txBody>
+          <a:bodyPr wrap="none">
+            <a:spAutoFit/>
+          </a:bodyPr>
+          <a:lstStyle/>
+          <a:p>
+            <a:pPr algn="ctr">
+              <a:defRPr sz="1600" b="1">
+                <a:solidFill>
+                  <a:srgbClr val="FFFFFF"/>
+                </a:solidFill>
+              </a:defRPr>
+            </a:pPr>
+            <a:r>
+              <a:t>3</a:t>
+            </a:r>
+          </a:p>
+        </p:txBody>
+      </p:sp>
+      <p:sp>
+        <p:nvSpPr>
+          <p:cNvPr id="12" name="TextBox 11"/>
+          <p:cNvSpPr txBox="1"/>
+          <p:nvPr/>
+        </p:nvSpPr>
+        <p:spPr>
+          <a:xfrm>
+            <a:off x="1645920" y="3200400"/>
+            <a:ext cx="6858000" cy="548640"/>
+          </a:xfrm>
+          <a:prstGeom prst="rect">
+            <a:avLst/>
+          </a:prstGeom>
+          <a:noFill/>
+        </p:spPr>
+        <p:txBody>
+          <a:bodyPr wrap="square">
+            <a:spAutoFit/>
+          </a:bodyPr>
+          <a:lstStyle/>
           <a:p>
             <a:pPr>
-              <a:spcBef>
-                <a:spcPts val="400"/>
-              </a:spcBef>
-              <a:spcAft>
-                <a:spcPts val="400"/>
-              </a:spcAft>
-              <a:defRPr sz="1800">
-                <a:solidFill>
-                  <a:srgbClr val="333333"/>
+              <a:defRPr sz="1800" b="1">
+                <a:solidFill>
+                  <a:srgbClr val="1E3A5F"/>
                 </a:solidFill>
               </a:defRPr>
             </a:pPr>
@@ -4268,18 +5504,12 @@
           <a:noFill/>
         </p:spPr>
         <p:txBody>
-          <a:bodyPr wrap="square">
+          <a:bodyPr wrap="none">
             <a:spAutoFit/>
           </a:bodyPr>
           <a:lstStyle/>
           <a:p>
             <a:pPr>
-              <a:spcBef>
-                <a:spcPts val="400"/>
-              </a:spcBef>
-              <a:spcAft>
-                <a:spcPts val="400"/>
-              </a:spcAft>
               <a:defRPr sz="1800">
                 <a:solidFill>
                   <a:srgbClr val="333333"/>
@@ -4292,12 +5522,6 @@
           </a:p>
           <a:p>
             <a:pPr>
-              <a:spcBef>
-                <a:spcPts val="400"/>
-              </a:spcBef>
-              <a:spcAft>
-                <a:spcPts val="400"/>
-              </a:spcAft>
               <a:defRPr sz="1800">
                 <a:solidFill>
                   <a:srgbClr val="333333"/>
@@ -4310,12 +5534,6 @@
           </a:p>
           <a:p>
             <a:pPr>
-              <a:spcBef>
-                <a:spcPts val="400"/>
-              </a:spcBef>
-              <a:spcAft>
-                <a:spcPts val="400"/>
-              </a:spcAft>
               <a:defRPr sz="1800">
                 <a:solidFill>
                   <a:srgbClr val="333333"/>
@@ -4436,14 +5654,59 @@
       </p:sp>
       <p:sp>
         <p:nvSpPr>
-          <p:cNvPr id="4" name="TextBox 3"/>
+          <p:cNvPr id="4" name="Rectangle 3"/>
+          <p:cNvSpPr/>
+          <p:nvPr/>
+        </p:nvSpPr>
+        <p:spPr>
+          <a:xfrm>
+            <a:off x="914400" y="1097280"/>
+            <a:ext cx="3200400" cy="548640"/>
+          </a:xfrm>
+          <a:prstGeom prst="rect">
+            <a:avLst/>
+          </a:prstGeom>
+          <a:solidFill>
+            <a:srgbClr val="DCF0FF"/>
+          </a:solidFill>
+          <a:ln>
+            <a:solidFill>
+              <a:srgbClr val="4682B4"/>
+            </a:solidFill>
+          </a:ln>
+        </p:spPr>
+        <p:style>
+          <a:lnRef idx="1">
+            <a:schemeClr val="accent1"/>
+          </a:lnRef>
+          <a:fillRef idx="3">
+            <a:schemeClr val="accent1"/>
+          </a:fillRef>
+          <a:effectRef idx="2">
+            <a:schemeClr val="accent1"/>
+          </a:effectRef>
+          <a:fontRef idx="minor">
+            <a:schemeClr val="lt1"/>
+          </a:fontRef>
+        </p:style>
+        <p:txBody>
+          <a:bodyPr rtlCol="0" anchor="ctr"/>
+          <a:lstStyle/>
+          <a:p>
+            <a:pPr algn="ctr"/>
+          </a:p>
+        </p:txBody>
+      </p:sp>
+      <p:sp>
+        <p:nvSpPr>
+          <p:cNvPr id="5" name="TextBox 4"/>
           <p:cNvSpPr txBox="1"/>
           <p:nvPr/>
         </p:nvSpPr>
         <p:spPr>
           <a:xfrm>
-            <a:off x="731520" y="1097280"/>
-            <a:ext cx="7680960" cy="3657600"/>
+            <a:off x="1005840" y="1143000"/>
+            <a:ext cx="3017520" cy="457200"/>
           </a:xfrm>
           <a:prstGeom prst="rect">
             <a:avLst/>
@@ -4451,21 +5714,15 @@
           <a:noFill/>
         </p:spPr>
         <p:txBody>
-          <a:bodyPr wrap="square">
+          <a:bodyPr wrap="none">
             <a:spAutoFit/>
           </a:bodyPr>
           <a:lstStyle/>
           <a:p>
             <a:pPr>
-              <a:spcBef>
-                <a:spcPts val="400"/>
-              </a:spcBef>
-              <a:spcAft>
-                <a:spcPts val="400"/>
-              </a:spcAft>
-              <a:defRPr sz="1800">
-                <a:solidFill>
-                  <a:srgbClr val="333333"/>
+              <a:defRPr sz="1600" b="1">
+                <a:solidFill>
+                  <a:srgbClr val="1E3A5F"/>
                 </a:solidFill>
               </a:defRPr>
             </a:pPr>
@@ -4473,17 +5730,79 @@
               <a:t>稼働時間: 80時間</a:t>
             </a:r>
           </a:p>
+        </p:txBody>
+      </p:sp>
+      <p:sp>
+        <p:nvSpPr>
+          <p:cNvPr id="6" name="Rectangle 5"/>
+          <p:cNvSpPr/>
+          <p:nvPr/>
+        </p:nvSpPr>
+        <p:spPr>
+          <a:xfrm>
+            <a:off x="914400" y="1828800"/>
+            <a:ext cx="3200400" cy="548640"/>
+          </a:xfrm>
+          <a:prstGeom prst="rect">
+            <a:avLst/>
+          </a:prstGeom>
+          <a:solidFill>
+            <a:srgbClr val="DCF0FF"/>
+          </a:solidFill>
+          <a:ln>
+            <a:solidFill>
+              <a:srgbClr val="4682B4"/>
+            </a:solidFill>
+          </a:ln>
+        </p:spPr>
+        <p:style>
+          <a:lnRef idx="1">
+            <a:schemeClr val="accent1"/>
+          </a:lnRef>
+          <a:fillRef idx="3">
+            <a:schemeClr val="accent1"/>
+          </a:fillRef>
+          <a:effectRef idx="2">
+            <a:schemeClr val="accent1"/>
+          </a:effectRef>
+          <a:fontRef idx="minor">
+            <a:schemeClr val="lt1"/>
+          </a:fontRef>
+        </p:style>
+        <p:txBody>
+          <a:bodyPr rtlCol="0" anchor="ctr"/>
+          <a:lstStyle/>
+          <a:p>
+            <a:pPr algn="ctr"/>
+          </a:p>
+        </p:txBody>
+      </p:sp>
+      <p:sp>
+        <p:nvSpPr>
+          <p:cNvPr id="7" name="TextBox 6"/>
+          <p:cNvSpPr txBox="1"/>
+          <p:nvPr/>
+        </p:nvSpPr>
+        <p:spPr>
+          <a:xfrm>
+            <a:off x="1005840" y="1874519"/>
+            <a:ext cx="3017520" cy="457200"/>
+          </a:xfrm>
+          <a:prstGeom prst="rect">
+            <a:avLst/>
+          </a:prstGeom>
+          <a:noFill/>
+        </p:spPr>
+        <p:txBody>
+          <a:bodyPr wrap="none">
+            <a:spAutoFit/>
+          </a:bodyPr>
+          <a:lstStyle/>
           <a:p>
             <a:pPr>
-              <a:spcBef>
-                <a:spcPts val="400"/>
-              </a:spcBef>
-              <a:spcAft>
-                <a:spcPts val="400"/>
-              </a:spcAft>
-              <a:defRPr sz="1800">
-                <a:solidFill>
-                  <a:srgbClr val="333333"/>
+              <a:defRPr sz="1600" b="1">
+                <a:solidFill>
+                  <a:srgbClr val="1E3A5F"/>
                 </a:solidFill>
               </a:defRPr>
             </a:pPr>
@@ -4491,17 +5810,79 @@
               <a:t>PM: 定額課金</a:t>
             </a:r>
           </a:p>
+        </p:txBody>
+      </p:sp>
+      <p:sp>
+        <p:nvSpPr>
+          <p:cNvPr id="8" name="Rectangle 7"/>
+          <p:cNvSpPr/>
+          <p:nvPr/>
+        </p:nvSpPr>
+        <p:spPr>
+          <a:xfrm>
+            <a:off x="914400" y="2560320"/>
+            <a:ext cx="3200400" cy="548640"/>
+          </a:xfrm>
+          <a:prstGeom prst="rect">
+            <a:avLst/>
+          </a:prstGeom>
+          <a:solidFill>
+            <a:srgbClr val="DCF0FF"/>
+          </a:solidFill>
+          <a:ln>
+            <a:solidFill>
+              <a:srgbClr val="4682B4"/>
+            </a:solidFill>
+          </a:ln>
+        </p:spPr>
+        <p:style>
+          <a:lnRef idx="1">
+            <a:schemeClr val="accent1"/>
+          </a:lnRef>
+          <a:fillRef idx="3">
+            <a:schemeClr val="accent1"/>
+          </a:fillRef>
+          <a:effectRef idx="2">
+            <a:schemeClr val="accent1"/>
+          </a:effectRef>
+          <a:fontRef idx="minor">
+            <a:schemeClr val="lt1"/>
+          </a:fontRef>
+        </p:style>
+        <p:txBody>
+          <a:bodyPr rtlCol="0" anchor="ctr"/>
+          <a:lstStyle/>
+          <a:p>
+            <a:pPr algn="ctr"/>
+          </a:p>
+        </p:txBody>
+      </p:sp>
+      <p:sp>
+        <p:nvSpPr>
+          <p:cNvPr id="9" name="TextBox 8"/>
+          <p:cNvSpPr txBox="1"/>
+          <p:nvPr/>
+        </p:nvSpPr>
+        <p:spPr>
+          <a:xfrm>
+            <a:off x="1005840" y="2606039"/>
+            <a:ext cx="3017520" cy="457200"/>
+          </a:xfrm>
+          <a:prstGeom prst="rect">
+            <a:avLst/>
+          </a:prstGeom>
+          <a:noFill/>
+        </p:spPr>
+        <p:txBody>
+          <a:bodyPr wrap="none">
+            <a:spAutoFit/>
+          </a:bodyPr>
+          <a:lstStyle/>
           <a:p>
             <a:pPr>
-              <a:spcBef>
-                <a:spcPts val="400"/>
-              </a:spcBef>
-              <a:spcAft>
-                <a:spcPts val="400"/>
-              </a:spcAft>
-              <a:defRPr sz="1800">
-                <a:solidFill>
-                  <a:srgbClr val="333333"/>
+              <a:defRPr sz="1600" b="1">
+                <a:solidFill>
+                  <a:srgbClr val="1E3A5F"/>
                 </a:solidFill>
               </a:defRPr>
             </a:pPr>
@@ -4509,17 +5890,79 @@
               <a:t>実働: 従量課金</a:t>
             </a:r>
           </a:p>
+        </p:txBody>
+      </p:sp>
+      <p:sp>
+        <p:nvSpPr>
+          <p:cNvPr id="10" name="Rectangle 9"/>
+          <p:cNvSpPr/>
+          <p:nvPr/>
+        </p:nvSpPr>
+        <p:spPr>
+          <a:xfrm>
+            <a:off x="914400" y="3291839"/>
+            <a:ext cx="3200400" cy="548640"/>
+          </a:xfrm>
+          <a:prstGeom prst="rect">
+            <a:avLst/>
+          </a:prstGeom>
+          <a:solidFill>
+            <a:srgbClr val="DCF0FF"/>
+          </a:solidFill>
+          <a:ln>
+            <a:solidFill>
+              <a:srgbClr val="4682B4"/>
+            </a:solidFill>
+          </a:ln>
+        </p:spPr>
+        <p:style>
+          <a:lnRef idx="1">
+            <a:schemeClr val="accent1"/>
+          </a:lnRef>
+          <a:fillRef idx="3">
+            <a:schemeClr val="accent1"/>
+          </a:fillRef>
+          <a:effectRef idx="2">
+            <a:schemeClr val="accent1"/>
+          </a:effectRef>
+          <a:fontRef idx="minor">
+            <a:schemeClr val="lt1"/>
+          </a:fontRef>
+        </p:style>
+        <p:txBody>
+          <a:bodyPr rtlCol="0" anchor="ctr"/>
+          <a:lstStyle/>
+          <a:p>
+            <a:pPr algn="ctr"/>
+          </a:p>
+        </p:txBody>
+      </p:sp>
+      <p:sp>
+        <p:nvSpPr>
+          <p:cNvPr id="11" name="TextBox 10"/>
+          <p:cNvSpPr txBox="1"/>
+          <p:nvPr/>
+        </p:nvSpPr>
+        <p:spPr>
+          <a:xfrm>
+            <a:off x="1005840" y="3337559"/>
+            <a:ext cx="3017520" cy="457200"/>
+          </a:xfrm>
+          <a:prstGeom prst="rect">
+            <a:avLst/>
+          </a:prstGeom>
+          <a:noFill/>
+        </p:spPr>
+        <p:txBody>
+          <a:bodyPr wrap="none">
+            <a:spAutoFit/>
+          </a:bodyPr>
+          <a:lstStyle/>
           <a:p>
             <a:pPr>
-              <a:spcBef>
-                <a:spcPts val="400"/>
-              </a:spcBef>
-              <a:spcAft>
-                <a:spcPts val="400"/>
-              </a:spcAft>
-              <a:defRPr sz="1800">
-                <a:solidFill>
-                  <a:srgbClr val="333333"/>
+              <a:defRPr sz="1600" b="1">
+                <a:solidFill>
+                  <a:srgbClr val="1E3A5F"/>
                 </a:solidFill>
               </a:defRPr>
             </a:pPr>
@@ -4637,14 +6080,59 @@
       </p:sp>
       <p:sp>
         <p:nvSpPr>
-          <p:cNvPr id="4" name="TextBox 3"/>
+          <p:cNvPr id="4" name="Rectangle 3"/>
+          <p:cNvSpPr/>
+          <p:nvPr/>
+        </p:nvSpPr>
+        <p:spPr>
+          <a:xfrm>
+            <a:off x="731520" y="1097280"/>
+            <a:ext cx="7680960" cy="457200"/>
+          </a:xfrm>
+          <a:prstGeom prst="rect">
+            <a:avLst/>
+          </a:prstGeom>
+          <a:solidFill>
+            <a:srgbClr val="DCF0FF"/>
+          </a:solidFill>
+          <a:ln>
+            <a:solidFill>
+              <a:srgbClr val="4682B4"/>
+            </a:solidFill>
+          </a:ln>
+        </p:spPr>
+        <p:style>
+          <a:lnRef idx="1">
+            <a:schemeClr val="accent1"/>
+          </a:lnRef>
+          <a:fillRef idx="3">
+            <a:schemeClr val="accent1"/>
+          </a:fillRef>
+          <a:effectRef idx="2">
+            <a:schemeClr val="accent1"/>
+          </a:effectRef>
+          <a:fontRef idx="minor">
+            <a:schemeClr val="lt1"/>
+          </a:fontRef>
+        </p:style>
+        <p:txBody>
+          <a:bodyPr rtlCol="0" anchor="ctr"/>
+          <a:lstStyle/>
+          <a:p>
+            <a:pPr algn="ctr"/>
+          </a:p>
+        </p:txBody>
+      </p:sp>
+      <p:sp>
+        <p:nvSpPr>
+          <p:cNvPr id="5" name="TextBox 4"/>
           <p:cNvSpPr txBox="1"/>
           <p:nvPr/>
         </p:nvSpPr>
         <p:spPr>
           <a:xfrm>
-            <a:off x="731520" y="1097280"/>
-            <a:ext cx="7680960" cy="3657600"/>
+            <a:off x="914400" y="1143000"/>
+            <a:ext cx="5486400" cy="365760"/>
           </a:xfrm>
           <a:prstGeom prst="rect">
             <a:avLst/>
@@ -4652,37 +6140,128 @@
           <a:noFill/>
         </p:spPr>
         <p:txBody>
-          <a:bodyPr wrap="square">
+          <a:bodyPr wrap="none">
             <a:spAutoFit/>
           </a:bodyPr>
           <a:lstStyle/>
           <a:p>
             <a:pPr>
-              <a:spcBef>
-                <a:spcPts val="400"/>
-              </a:spcBef>
-              <a:spcAft>
-                <a:spcPts val="400"/>
-              </a:spcAft>
-              <a:defRPr sz="1800">
+              <a:defRPr sz="1600">
                 <a:solidFill>
                   <a:srgbClr val="333333"/>
                 </a:solidFill>
               </a:defRPr>
             </a:pPr>
             <a:r>
-              <a:t>稼働開始: 3月3日（月）13:00</a:t>
-            </a:r>
-          </a:p>
+              <a:t>稼働開始: 3月3日</a:t>
+            </a:r>
+          </a:p>
+        </p:txBody>
+      </p:sp>
+      <p:sp>
+        <p:nvSpPr>
+          <p:cNvPr id="6" name="TextBox 5"/>
+          <p:cNvSpPr txBox="1"/>
+          <p:nvPr/>
+        </p:nvSpPr>
+        <p:spPr>
+          <a:xfrm>
+            <a:off x="6858000" y="1143000"/>
+            <a:ext cx="1371600" cy="365760"/>
+          </a:xfrm>
+          <a:prstGeom prst="rect">
+            <a:avLst/>
+          </a:prstGeom>
+          <a:noFill/>
+        </p:spPr>
+        <p:txBody>
+          <a:bodyPr wrap="none">
+            <a:spAutoFit/>
+          </a:bodyPr>
+          <a:lstStyle/>
           <a:p>
             <a:pPr>
-              <a:spcBef>
-                <a:spcPts val="400"/>
-              </a:spcBef>
-              <a:spcAft>
-                <a:spcPts val="400"/>
-              </a:spcAft>
-              <a:defRPr sz="1800">
+              <a:defRPr sz="1200" i="1">
+                <a:solidFill>
+                  <a:srgbClr val="4682B4"/>
+                </a:solidFill>
+              </a:defRPr>
+            </a:pPr>
+            <a:r>
+              <a:t>明日</a:t>
+            </a:r>
+          </a:p>
+        </p:txBody>
+      </p:sp>
+      <p:sp>
+        <p:nvSpPr>
+          <p:cNvPr id="7" name="Rectangle 6"/>
+          <p:cNvSpPr/>
+          <p:nvPr/>
+        </p:nvSpPr>
+        <p:spPr>
+          <a:xfrm>
+            <a:off x="731520" y="1737360"/>
+            <a:ext cx="7680960" cy="457200"/>
+          </a:xfrm>
+          <a:prstGeom prst="rect">
+            <a:avLst/>
+          </a:prstGeom>
+          <a:solidFill>
+            <a:srgbClr val="DCF0FF"/>
+          </a:solidFill>
+          <a:ln>
+            <a:solidFill>
+              <a:srgbClr val="4682B4"/>
+            </a:solidFill>
+          </a:ln>
+        </p:spPr>
+        <p:style>
+          <a:lnRef idx="1">
+            <a:schemeClr val="accent1"/>
+          </a:lnRef>
+          <a:fillRef idx="3">
+            <a:schemeClr val="accent1"/>
+          </a:fillRef>
+          <a:effectRef idx="2">
+            <a:schemeClr val="accent1"/>
+          </a:effectRef>
+          <a:fontRef idx="minor">
+            <a:schemeClr val="lt1"/>
+          </a:fontRef>
+        </p:style>
+        <p:txBody>
+          <a:bodyPr rtlCol="0" anchor="ctr"/>
+          <a:lstStyle/>
+          <a:p>
+            <a:pPr algn="ctr"/>
+          </a:p>
+        </p:txBody>
+      </p:sp>
+      <p:sp>
+        <p:nvSpPr>
+          <p:cNvPr id="8" name="TextBox 7"/>
+          <p:cNvSpPr txBox="1"/>
+          <p:nvPr/>
+        </p:nvSpPr>
+        <p:spPr>
+          <a:xfrm>
+            <a:off x="914400" y="1783080"/>
+            <a:ext cx="5486400" cy="365760"/>
+          </a:xfrm>
+          <a:prstGeom prst="rect">
+            <a:avLst/>
+          </a:prstGeom>
+          <a:noFill/>
+        </p:spPr>
+        <p:txBody>
+          <a:bodyPr wrap="none">
+            <a:spAutoFit/>
+          </a:bodyPr>
+          <a:lstStyle/>
+          <a:p>
+            <a:pPr>
+              <a:defRPr sz="1600">
                 <a:solidFill>
                   <a:srgbClr val="333333"/>
                 </a:solidFill>
@@ -4692,15 +6271,112 @@
               <a:t>1. 稼働条件すり合わせ</a:t>
             </a:r>
           </a:p>
+        </p:txBody>
+      </p:sp>
+      <p:sp>
+        <p:nvSpPr>
+          <p:cNvPr id="9" name="TextBox 8"/>
+          <p:cNvSpPr txBox="1"/>
+          <p:nvPr/>
+        </p:nvSpPr>
+        <p:spPr>
+          <a:xfrm>
+            <a:off x="6858000" y="1783080"/>
+            <a:ext cx="1371600" cy="365760"/>
+          </a:xfrm>
+          <a:prstGeom prst="rect">
+            <a:avLst/>
+          </a:prstGeom>
+          <a:noFill/>
+        </p:spPr>
+        <p:txBody>
+          <a:bodyPr wrap="none">
+            <a:spAutoFit/>
+          </a:bodyPr>
+          <a:lstStyle/>
           <a:p>
             <a:pPr>
-              <a:spcBef>
-                <a:spcPts val="400"/>
-              </a:spcBef>
-              <a:spcAft>
-                <a:spcPts val="400"/>
-              </a:spcAft>
-              <a:defRPr sz="1800">
+              <a:defRPr sz="1200" i="1">
+                <a:solidFill>
+                  <a:srgbClr val="4682B4"/>
+                </a:solidFill>
+              </a:defRPr>
+            </a:pPr>
+            <a:r>
+              <a:t>3月3日</a:t>
+            </a:r>
+          </a:p>
+        </p:txBody>
+      </p:sp>
+      <p:sp>
+        <p:nvSpPr>
+          <p:cNvPr id="10" name="Rectangle 9"/>
+          <p:cNvSpPr/>
+          <p:nvPr/>
+        </p:nvSpPr>
+        <p:spPr>
+          <a:xfrm>
+            <a:off x="731520" y="2377439"/>
+            <a:ext cx="7680960" cy="457200"/>
+          </a:xfrm>
+          <a:prstGeom prst="rect">
+            <a:avLst/>
+          </a:prstGeom>
+          <a:solidFill>
+            <a:srgbClr val="DCF0FF"/>
+          </a:solidFill>
+          <a:ln>
+            <a:solidFill>
+              <a:srgbClr val="4682B4"/>
+            </a:solidFill>
+          </a:ln>
+        </p:spPr>
+        <p:style>
+          <a:lnRef idx="1">
+            <a:schemeClr val="accent1"/>
+          </a:lnRef>
+          <a:fillRef idx="3">
+            <a:schemeClr val="accent1"/>
+          </a:fillRef>
+          <a:effectRef idx="2">
+            <a:schemeClr val="accent1"/>
+          </a:effectRef>
+          <a:fontRef idx="minor">
+            <a:schemeClr val="lt1"/>
+          </a:fontRef>
+        </p:style>
+        <p:txBody>
+          <a:bodyPr rtlCol="0" anchor="ctr"/>
+          <a:lstStyle/>
+          <a:p>
+            <a:pPr algn="ctr"/>
+          </a:p>
+        </p:txBody>
+      </p:sp>
+      <p:sp>
+        <p:nvSpPr>
+          <p:cNvPr id="11" name="TextBox 10"/>
+          <p:cNvSpPr txBox="1"/>
+          <p:nvPr/>
+        </p:nvSpPr>
+        <p:spPr>
+          <a:xfrm>
+            <a:off x="914400" y="2423159"/>
+            <a:ext cx="5486400" cy="365760"/>
+          </a:xfrm>
+          <a:prstGeom prst="rect">
+            <a:avLst/>
+          </a:prstGeom>
+          <a:noFill/>
+        </p:spPr>
+        <p:txBody>
+          <a:bodyPr wrap="none">
+            <a:spAutoFit/>
+          </a:bodyPr>
+          <a:lstStyle/>
+          <a:p>
+            <a:pPr>
+              <a:defRPr sz="1600">
                 <a:solidFill>
                   <a:srgbClr val="333333"/>
                 </a:solidFill>
@@ -4710,22 +6386,154 @@
               <a:t>2. 稼働準備</a:t>
             </a:r>
           </a:p>
+        </p:txBody>
+      </p:sp>
+      <p:sp>
+        <p:nvSpPr>
+          <p:cNvPr id="12" name="TextBox 11"/>
+          <p:cNvSpPr txBox="1"/>
+          <p:nvPr/>
+        </p:nvSpPr>
+        <p:spPr>
+          <a:xfrm>
+            <a:off x="6858000" y="2423159"/>
+            <a:ext cx="1371600" cy="365760"/>
+          </a:xfrm>
+          <a:prstGeom prst="rect">
+            <a:avLst/>
+          </a:prstGeom>
+          <a:noFill/>
+        </p:spPr>
+        <p:txBody>
+          <a:bodyPr wrap="none">
+            <a:spAutoFit/>
+          </a:bodyPr>
+          <a:lstStyle/>
           <a:p>
             <a:pPr>
-              <a:spcBef>
-                <a:spcPts val="400"/>
-              </a:spcBef>
-              <a:spcAft>
-                <a:spcPts val="400"/>
-              </a:spcAft>
-              <a:defRPr sz="1800">
+              <a:defRPr sz="1200" i="1">
+                <a:solidFill>
+                  <a:srgbClr val="4682B4"/>
+                </a:solidFill>
+              </a:defRPr>
+            </a:pPr>
+            <a:r>
+              <a:t>3月3-4日</a:t>
+            </a:r>
+          </a:p>
+        </p:txBody>
+      </p:sp>
+      <p:sp>
+        <p:nvSpPr>
+          <p:cNvPr id="13" name="Rectangle 12"/>
+          <p:cNvSpPr/>
+          <p:nvPr/>
+        </p:nvSpPr>
+        <p:spPr>
+          <a:xfrm>
+            <a:off x="731520" y="3017520"/>
+            <a:ext cx="7680960" cy="457200"/>
+          </a:xfrm>
+          <a:prstGeom prst="rect">
+            <a:avLst/>
+          </a:prstGeom>
+          <a:solidFill>
+            <a:srgbClr val="DCF0FF"/>
+          </a:solidFill>
+          <a:ln>
+            <a:solidFill>
+              <a:srgbClr val="4682B4"/>
+            </a:solidFill>
+          </a:ln>
+        </p:spPr>
+        <p:style>
+          <a:lnRef idx="1">
+            <a:schemeClr val="accent1"/>
+          </a:lnRef>
+          <a:fillRef idx="3">
+            <a:schemeClr val="accent1"/>
+          </a:fillRef>
+          <a:effectRef idx="2">
+            <a:schemeClr val="accent1"/>
+          </a:effectRef>
+          <a:fontRef idx="minor">
+            <a:schemeClr val="lt1"/>
+          </a:fontRef>
+        </p:style>
+        <p:txBody>
+          <a:bodyPr rtlCol="0" anchor="ctr"/>
+          <a:lstStyle/>
+          <a:p>
+            <a:pPr algn="ctr"/>
+          </a:p>
+        </p:txBody>
+      </p:sp>
+      <p:sp>
+        <p:nvSpPr>
+          <p:cNvPr id="14" name="TextBox 13"/>
+          <p:cNvSpPr txBox="1"/>
+          <p:nvPr/>
+        </p:nvSpPr>
+        <p:spPr>
+          <a:xfrm>
+            <a:off x="914400" y="3063239"/>
+            <a:ext cx="5486400" cy="365760"/>
+          </a:xfrm>
+          <a:prstGeom prst="rect">
+            <a:avLst/>
+          </a:prstGeom>
+          <a:noFill/>
+        </p:spPr>
+        <p:txBody>
+          <a:bodyPr wrap="none">
+            <a:spAutoFit/>
+          </a:bodyPr>
+          <a:lstStyle/>
+          <a:p>
+            <a:pPr>
+              <a:defRPr sz="1600">
                 <a:solidFill>
                   <a:srgbClr val="333333"/>
                 </a:solidFill>
               </a:defRPr>
             </a:pPr>
             <a:r>
-              <a:t>3. キックオフMTG開催</a:t>
+              <a:t>3. キックオフMTG</a:t>
+            </a:r>
+          </a:p>
+        </p:txBody>
+      </p:sp>
+      <p:sp>
+        <p:nvSpPr>
+          <p:cNvPr id="15" name="TextBox 14"/>
+          <p:cNvSpPr txBox="1"/>
+          <p:nvPr/>
+        </p:nvSpPr>
+        <p:spPr>
+          <a:xfrm>
+            <a:off x="6858000" y="3063239"/>
+            <a:ext cx="1371600" cy="365760"/>
+          </a:xfrm>
+          <a:prstGeom prst="rect">
+            <a:avLst/>
+          </a:prstGeom>
+          <a:noFill/>
+        </p:spPr>
+        <p:txBody>
+          <a:bodyPr wrap="none">
+            <a:spAutoFit/>
+          </a:bodyPr>
+          <a:lstStyle/>
+          <a:p>
+            <a:pPr>
+              <a:defRPr sz="1200" i="1">
+                <a:solidFill>
+                  <a:srgbClr val="4682B4"/>
+                </a:solidFill>
+              </a:defRPr>
+            </a:pPr>
+            <a:r>
+              <a:t>3月5日</a:t>
             </a:r>
           </a:p>
         </p:txBody>
@@ -4838,14 +6646,59 @@
       </p:sp>
       <p:sp>
         <p:nvSpPr>
-          <p:cNvPr id="4" name="TextBox 3"/>
+          <p:cNvPr id="4" name="Rectangle 3"/>
+          <p:cNvSpPr/>
+          <p:nvPr/>
+        </p:nvSpPr>
+        <p:spPr>
+          <a:xfrm>
+            <a:off x="731520" y="1097280"/>
+            <a:ext cx="7680960" cy="3474720"/>
+          </a:xfrm>
+          <a:prstGeom prst="rect">
+            <a:avLst/>
+          </a:prstGeom>
+          <a:solidFill>
+            <a:srgbClr val="DCF0FF"/>
+          </a:solidFill>
+          <a:ln w="25400">
+            <a:solidFill>
+              <a:srgbClr val="4682B4"/>
+            </a:solidFill>
+          </a:ln>
+        </p:spPr>
+        <p:style>
+          <a:lnRef idx="1">
+            <a:schemeClr val="accent1"/>
+          </a:lnRef>
+          <a:fillRef idx="3">
+            <a:schemeClr val="accent1"/>
+          </a:fillRef>
+          <a:effectRef idx="2">
+            <a:schemeClr val="accent1"/>
+          </a:effectRef>
+          <a:fontRef idx="minor">
+            <a:schemeClr val="lt1"/>
+          </a:fontRef>
+        </p:style>
+        <p:txBody>
+          <a:bodyPr rtlCol="0" anchor="ctr"/>
+          <a:lstStyle/>
+          <a:p>
+            <a:pPr algn="ctr"/>
+          </a:p>
+        </p:txBody>
+      </p:sp>
+      <p:sp>
+        <p:nvSpPr>
+          <p:cNvPr id="5" name="TextBox 4"/>
           <p:cNvSpPr txBox="1"/>
           <p:nvPr/>
         </p:nvSpPr>
         <p:spPr>
           <a:xfrm>
-            <a:off x="731520" y="1097280"/>
-            <a:ext cx="7680960" cy="3657600"/>
+            <a:off x="1097280" y="1371600"/>
+            <a:ext cx="6949440" cy="2926080"/>
           </a:xfrm>
           <a:prstGeom prst="rect">
             <a:avLst/>
@@ -4853,55 +6706,37 @@
           <a:noFill/>
         </p:spPr>
         <p:txBody>
-          <a:bodyPr wrap="square">
+          <a:bodyPr wrap="none">
             <a:spAutoFit/>
           </a:bodyPr>
           <a:lstStyle/>
           <a:p>
             <a:pPr>
-              <a:spcBef>
-                <a:spcPts val="400"/>
-              </a:spcBef>
-              <a:spcAft>
-                <a:spcPts val="400"/>
-              </a:spcAft>
-              <a:defRPr sz="1800">
+              <a:defRPr sz="1600" b="1">
+                <a:solidFill>
+                  <a:srgbClr val="1E3A5F"/>
+                </a:solidFill>
+              </a:defRPr>
+            </a:pPr>
+            <a:r>
+              <a:t>必要なキャッチアップ内容を一通り理解</a:t>
+            </a:r>
+          </a:p>
+          <a:p>
+            <a:pPr>
+              <a:defRPr sz="1400" b="0">
                 <a:solidFill>
                   <a:srgbClr val="333333"/>
                 </a:solidFill>
               </a:defRPr>
             </a:pPr>
             <a:r>
-              <a:t>必要なキャッチアップ内容を一通り理解</a:t>
+              <a:t>・各種レクチャーMTG実施</a:t>
             </a:r>
           </a:p>
           <a:p>
             <a:pPr>
-              <a:spcBef>
-                <a:spcPts val="400"/>
-              </a:spcBef>
-              <a:spcAft>
-                <a:spcPts val="400"/>
-              </a:spcAft>
-              <a:defRPr sz="1800">
-                <a:solidFill>
-                  <a:srgbClr val="333333"/>
-                </a:solidFill>
-              </a:defRPr>
-            </a:pPr>
-            <a:r>
-              <a:t>・各種レクチャーMTG実施</a:t>
-            </a:r>
-          </a:p>
-          <a:p>
-            <a:pPr>
-              <a:spcBef>
-                <a:spcPts val="400"/>
-              </a:spcBef>
-              <a:spcAft>
-                <a:spcPts val="400"/>
-              </a:spcAft>
-              <a:defRPr sz="1800">
+              <a:defRPr sz="1400" b="0">
                 <a:solidFill>
                   <a:srgbClr val="333333"/>
                 </a:solidFill>
@@ -5021,14 +6856,59 @@
       </p:sp>
       <p:sp>
         <p:nvSpPr>
-          <p:cNvPr id="4" name="TextBox 3"/>
+          <p:cNvPr id="4" name="Rectangle 3"/>
+          <p:cNvSpPr/>
+          <p:nvPr/>
+        </p:nvSpPr>
+        <p:spPr>
+          <a:xfrm>
+            <a:off x="731520" y="1097280"/>
+            <a:ext cx="7680960" cy="3474720"/>
+          </a:xfrm>
+          <a:prstGeom prst="rect">
+            <a:avLst/>
+          </a:prstGeom>
+          <a:solidFill>
+            <a:srgbClr val="DCF0FF"/>
+          </a:solidFill>
+          <a:ln w="25400">
+            <a:solidFill>
+              <a:srgbClr val="4682B4"/>
+            </a:solidFill>
+          </a:ln>
+        </p:spPr>
+        <p:style>
+          <a:lnRef idx="1">
+            <a:schemeClr val="accent1"/>
+          </a:lnRef>
+          <a:fillRef idx="3">
+            <a:schemeClr val="accent1"/>
+          </a:fillRef>
+          <a:effectRef idx="2">
+            <a:schemeClr val="accent1"/>
+          </a:effectRef>
+          <a:fontRef idx="minor">
+            <a:schemeClr val="lt1"/>
+          </a:fontRef>
+        </p:style>
+        <p:txBody>
+          <a:bodyPr rtlCol="0" anchor="ctr"/>
+          <a:lstStyle/>
+          <a:p>
+            <a:pPr algn="ctr"/>
+          </a:p>
+        </p:txBody>
+      </p:sp>
+      <p:sp>
+        <p:nvSpPr>
+          <p:cNvPr id="5" name="TextBox 4"/>
           <p:cNvSpPr txBox="1"/>
           <p:nvPr/>
         </p:nvSpPr>
         <p:spPr>
           <a:xfrm>
-            <a:off x="731520" y="1097280"/>
-            <a:ext cx="7680960" cy="3657600"/>
+            <a:off x="1097280" y="1371600"/>
+            <a:ext cx="6949440" cy="2926080"/>
           </a:xfrm>
           <a:prstGeom prst="rect">
             <a:avLst/>
@@ -5036,55 +6916,37 @@
           <a:noFill/>
         </p:spPr>
         <p:txBody>
-          <a:bodyPr wrap="square">
+          <a:bodyPr wrap="none">
             <a:spAutoFit/>
           </a:bodyPr>
           <a:lstStyle/>
           <a:p>
             <a:pPr>
-              <a:spcBef>
-                <a:spcPts val="400"/>
-              </a:spcBef>
-              <a:spcAft>
-                <a:spcPts val="400"/>
-              </a:spcAft>
-              <a:defRPr sz="1800">
+              <a:defRPr sz="1600" b="1">
+                <a:solidFill>
+                  <a:srgbClr val="1E3A5F"/>
+                </a:solidFill>
+              </a:defRPr>
+            </a:pPr>
+            <a:r>
+              <a:t>部分的にテックエキスパート業務に対応開始</a:t>
+            </a:r>
+          </a:p>
+          <a:p>
+            <a:pPr>
+              <a:defRPr sz="1400" b="0">
                 <a:solidFill>
                   <a:srgbClr val="333333"/>
                 </a:solidFill>
               </a:defRPr>
             </a:pPr>
             <a:r>
-              <a:t>部分的にテックエキスパート業務に対応開始</a:t>
+              <a:t>・既存顧客修正対応: 1日1-2件</a:t>
             </a:r>
           </a:p>
           <a:p>
             <a:pPr>
-              <a:spcBef>
-                <a:spcPts val="400"/>
-              </a:spcBef>
-              <a:spcAft>
-                <a:spcPts val="400"/>
-              </a:spcAft>
-              <a:defRPr sz="1800">
-                <a:solidFill>
-                  <a:srgbClr val="333333"/>
-                </a:solidFill>
-              </a:defRPr>
-            </a:pPr>
-            <a:r>
-              <a:t>・既存顧客修正対応: 1日1-2件</a:t>
-            </a:r>
-          </a:p>
-          <a:p>
-            <a:pPr>
-              <a:spcBef>
-                <a:spcPts val="400"/>
-              </a:spcBef>
-              <a:spcAft>
-                <a:spcPts val="400"/>
-              </a:spcAft>
-              <a:defRPr sz="1800">
+              <a:defRPr sz="1400" b="0">
                 <a:solidFill>
                   <a:srgbClr val="333333"/>
                 </a:solidFill>
@@ -5204,14 +7066,59 @@
       </p:sp>
       <p:sp>
         <p:nvSpPr>
-          <p:cNvPr id="4" name="TextBox 3"/>
+          <p:cNvPr id="4" name="Rectangle 3"/>
+          <p:cNvSpPr/>
+          <p:nvPr/>
+        </p:nvSpPr>
+        <p:spPr>
+          <a:xfrm>
+            <a:off x="731520" y="1097280"/>
+            <a:ext cx="7680960" cy="3474720"/>
+          </a:xfrm>
+          <a:prstGeom prst="rect">
+            <a:avLst/>
+          </a:prstGeom>
+          <a:solidFill>
+            <a:srgbClr val="DCF0FF"/>
+          </a:solidFill>
+          <a:ln w="25400">
+            <a:solidFill>
+              <a:srgbClr val="4682B4"/>
+            </a:solidFill>
+          </a:ln>
+        </p:spPr>
+        <p:style>
+          <a:lnRef idx="1">
+            <a:schemeClr val="accent1"/>
+          </a:lnRef>
+          <a:fillRef idx="3">
+            <a:schemeClr val="accent1"/>
+          </a:fillRef>
+          <a:effectRef idx="2">
+            <a:schemeClr val="accent1"/>
+          </a:effectRef>
+          <a:fontRef idx="minor">
+            <a:schemeClr val="lt1"/>
+          </a:fontRef>
+        </p:style>
+        <p:txBody>
+          <a:bodyPr rtlCol="0" anchor="ctr"/>
+          <a:lstStyle/>
+          <a:p>
+            <a:pPr algn="ctr"/>
+          </a:p>
+        </p:txBody>
+      </p:sp>
+      <p:sp>
+        <p:nvSpPr>
+          <p:cNvPr id="5" name="TextBox 4"/>
           <p:cNvSpPr txBox="1"/>
           <p:nvPr/>
         </p:nvSpPr>
         <p:spPr>
           <a:xfrm>
-            <a:off x="731520" y="1097280"/>
-            <a:ext cx="7680960" cy="3657600"/>
+            <a:off x="1097280" y="1371600"/>
+            <a:ext cx="6949440" cy="2926080"/>
           </a:xfrm>
           <a:prstGeom prst="rect">
             <a:avLst/>
@@ -5219,55 +7126,37 @@
           <a:noFill/>
         </p:spPr>
         <p:txBody>
-          <a:bodyPr wrap="square">
+          <a:bodyPr wrap="none">
             <a:spAutoFit/>
           </a:bodyPr>
           <a:lstStyle/>
           <a:p>
             <a:pPr>
-              <a:spcBef>
-                <a:spcPts val="400"/>
-              </a:spcBef>
-              <a:spcAft>
-                <a:spcPts val="400"/>
-              </a:spcAft>
-              <a:defRPr sz="1800">
+              <a:defRPr sz="1600" b="1">
+                <a:solidFill>
+                  <a:srgbClr val="1E3A5F"/>
+                </a:solidFill>
+              </a:defRPr>
+            </a:pPr>
+            <a:r>
+              <a:t>一通りのテックエキスパート業務に対応可能</a:t>
+            </a:r>
+          </a:p>
+          <a:p>
+            <a:pPr>
+              <a:defRPr sz="1400" b="0">
                 <a:solidFill>
                   <a:srgbClr val="333333"/>
                 </a:solidFill>
               </a:defRPr>
             </a:pPr>
             <a:r>
-              <a:t>一通りのテックエキスパート業務に対応可能</a:t>
+              <a:t>・新規顧客対応: 1週間1-2件</a:t>
             </a:r>
           </a:p>
           <a:p>
             <a:pPr>
-              <a:spcBef>
-                <a:spcPts val="400"/>
-              </a:spcBef>
-              <a:spcAft>
-                <a:spcPts val="400"/>
-              </a:spcAft>
-              <a:defRPr sz="1800">
-                <a:solidFill>
-                  <a:srgbClr val="333333"/>
-                </a:solidFill>
-              </a:defRPr>
-            </a:pPr>
-            <a:r>
-              <a:t>・新規顧客対応: 1週間1-2件</a:t>
-            </a:r>
-          </a:p>
-          <a:p>
-            <a:pPr>
-              <a:spcBef>
-                <a:spcPts val="400"/>
-              </a:spcBef>
-              <a:spcAft>
-                <a:spcPts val="400"/>
-              </a:spcAft>
-              <a:defRPr sz="1800">
+              <a:defRPr sz="1400" b="0">
                 <a:solidFill>
                   <a:srgbClr val="333333"/>
                 </a:solidFill>
@@ -5387,14 +7276,59 @@
       </p:sp>
       <p:sp>
         <p:nvSpPr>
-          <p:cNvPr id="4" name="TextBox 3"/>
+          <p:cNvPr id="4" name="Rectangle 3"/>
+          <p:cNvSpPr/>
+          <p:nvPr/>
+        </p:nvSpPr>
+        <p:spPr>
+          <a:xfrm>
+            <a:off x="731520" y="1097280"/>
+            <a:ext cx="7680960" cy="3474720"/>
+          </a:xfrm>
+          <a:prstGeom prst="rect">
+            <a:avLst/>
+          </a:prstGeom>
+          <a:solidFill>
+            <a:srgbClr val="DCF0FF"/>
+          </a:solidFill>
+          <a:ln w="25400">
+            <a:solidFill>
+              <a:srgbClr val="4682B4"/>
+            </a:solidFill>
+          </a:ln>
+        </p:spPr>
+        <p:style>
+          <a:lnRef idx="1">
+            <a:schemeClr val="accent1"/>
+          </a:lnRef>
+          <a:fillRef idx="3">
+            <a:schemeClr val="accent1"/>
+          </a:fillRef>
+          <a:effectRef idx="2">
+            <a:schemeClr val="accent1"/>
+          </a:effectRef>
+          <a:fontRef idx="minor">
+            <a:schemeClr val="lt1"/>
+          </a:fontRef>
+        </p:style>
+        <p:txBody>
+          <a:bodyPr rtlCol="0" anchor="ctr"/>
+          <a:lstStyle/>
+          <a:p>
+            <a:pPr algn="ctr"/>
+          </a:p>
+        </p:txBody>
+      </p:sp>
+      <p:sp>
+        <p:nvSpPr>
+          <p:cNvPr id="5" name="TextBox 4"/>
           <p:cNvSpPr txBox="1"/>
           <p:nvPr/>
         </p:nvSpPr>
         <p:spPr>
           <a:xfrm>
-            <a:off x="731520" y="1097280"/>
-            <a:ext cx="7680960" cy="3657600"/>
+            <a:off x="1097280" y="1371600"/>
+            <a:ext cx="6949440" cy="2926080"/>
           </a:xfrm>
           <a:prstGeom prst="rect">
             <a:avLst/>
@@ -5402,55 +7336,37 @@
           <a:noFill/>
         </p:spPr>
         <p:txBody>
-          <a:bodyPr wrap="square">
+          <a:bodyPr wrap="none">
             <a:spAutoFit/>
           </a:bodyPr>
           <a:lstStyle/>
           <a:p>
             <a:pPr>
-              <a:spcBef>
-                <a:spcPts val="400"/>
-              </a:spcBef>
-              <a:spcAft>
-                <a:spcPts val="400"/>
-              </a:spcAft>
-              <a:defRPr sz="1800">
+              <a:defRPr sz="1600" b="1">
+                <a:solidFill>
+                  <a:srgbClr val="1E3A5F"/>
+                </a:solidFill>
+              </a:defRPr>
+            </a:pPr>
+            <a:r>
+              <a:t>実働メンバーへのレクチャー実施可能</a:t>
+            </a:r>
+          </a:p>
+          <a:p>
+            <a:pPr>
+              <a:defRPr sz="1400" b="0">
                 <a:solidFill>
                   <a:srgbClr val="333333"/>
                 </a:solidFill>
               </a:defRPr>
             </a:pPr>
             <a:r>
-              <a:t>実働メンバーへのレクチャー実施可能</a:t>
+              <a:t>・他メンバーへの指導開始</a:t>
             </a:r>
           </a:p>
           <a:p>
             <a:pPr>
-              <a:spcBef>
-                <a:spcPts val="400"/>
-              </a:spcBef>
-              <a:spcAft>
-                <a:spcPts val="400"/>
-              </a:spcAft>
-              <a:defRPr sz="1800">
-                <a:solidFill>
-                  <a:srgbClr val="333333"/>
-                </a:solidFill>
-              </a:defRPr>
-            </a:pPr>
-            <a:r>
-              <a:t>・他メンバーへの指導開始</a:t>
-            </a:r>
-          </a:p>
-          <a:p>
-            <a:pPr>
-              <a:spcBef>
-                <a:spcPts val="400"/>
-              </a:spcBef>
-              <a:spcAft>
-                <a:spcPts val="400"/>
-              </a:spcAft>
-              <a:defRPr sz="1800">
+              <a:defRPr sz="1400" b="0">
                 <a:solidFill>
                   <a:srgbClr val="333333"/>
                 </a:solidFill>
@@ -5570,14 +7486,59 @@
       </p:sp>
       <p:sp>
         <p:nvSpPr>
-          <p:cNvPr id="4" name="TextBox 3"/>
+          <p:cNvPr id="4" name="Rectangle 3"/>
+          <p:cNvSpPr/>
+          <p:nvPr/>
+        </p:nvSpPr>
+        <p:spPr>
+          <a:xfrm>
+            <a:off x="1371600" y="1097280"/>
+            <a:ext cx="6400800" cy="640080"/>
+          </a:xfrm>
+          <a:prstGeom prst="rect">
+            <a:avLst/>
+          </a:prstGeom>
+          <a:solidFill>
+            <a:srgbClr val="DCF0FF"/>
+          </a:solidFill>
+          <a:ln>
+            <a:solidFill>
+              <a:srgbClr val="4682B4"/>
+            </a:solidFill>
+          </a:ln>
+        </p:spPr>
+        <p:style>
+          <a:lnRef idx="1">
+            <a:schemeClr val="accent1"/>
+          </a:lnRef>
+          <a:fillRef idx="3">
+            <a:schemeClr val="accent1"/>
+          </a:fillRef>
+          <a:effectRef idx="2">
+            <a:schemeClr val="accent1"/>
+          </a:effectRef>
+          <a:fontRef idx="minor">
+            <a:schemeClr val="lt1"/>
+          </a:fontRef>
+        </p:style>
+        <p:txBody>
+          <a:bodyPr rtlCol="0" anchor="ctr"/>
+          <a:lstStyle/>
+          <a:p>
+            <a:pPr algn="ctr"/>
+          </a:p>
+        </p:txBody>
+      </p:sp>
+      <p:sp>
+        <p:nvSpPr>
+          <p:cNvPr id="5" name="TextBox 4"/>
           <p:cNvSpPr txBox="1"/>
           <p:nvPr/>
         </p:nvSpPr>
         <p:spPr>
           <a:xfrm>
-            <a:off x="731520" y="1097280"/>
-            <a:ext cx="7680960" cy="3657600"/>
+            <a:off x="1554480" y="1188720"/>
+            <a:ext cx="6035040" cy="457200"/>
           </a:xfrm>
           <a:prstGeom prst="rect">
             <a:avLst/>
@@ -5585,62 +7546,180 @@
           <a:noFill/>
         </p:spPr>
         <p:txBody>
-          <a:bodyPr wrap="square">
+          <a:bodyPr wrap="none">
             <a:spAutoFit/>
           </a:bodyPr>
           <a:lstStyle/>
           <a:p>
             <a:pPr>
-              <a:spcBef>
-                <a:spcPts val="400"/>
-              </a:spcBef>
-              <a:spcAft>
-                <a:spcPts val="400"/>
-              </a:spcAft>
-              <a:defRPr sz="1800">
-                <a:solidFill>
-                  <a:srgbClr val="333333"/>
+              <a:defRPr sz="1800" b="1">
+                <a:solidFill>
+                  <a:srgbClr val="1E3A5F"/>
                 </a:solidFill>
               </a:defRPr>
             </a:pPr>
             <a:r>
-              <a:t>ドメイン知識、ビジネスモデル</a:t>
-            </a:r>
-          </a:p>
+              <a:t>✓ ドメイン知識、ビジネスモデル</a:t>
+            </a:r>
+          </a:p>
+        </p:txBody>
+      </p:sp>
+      <p:sp>
+        <p:nvSpPr>
+          <p:cNvPr id="6" name="Rectangle 5"/>
+          <p:cNvSpPr/>
+          <p:nvPr/>
+        </p:nvSpPr>
+        <p:spPr>
+          <a:xfrm>
+            <a:off x="1371600" y="2011680"/>
+            <a:ext cx="6400800" cy="640080"/>
+          </a:xfrm>
+          <a:prstGeom prst="rect">
+            <a:avLst/>
+          </a:prstGeom>
+          <a:solidFill>
+            <a:srgbClr val="DCF0FF"/>
+          </a:solidFill>
+          <a:ln>
+            <a:solidFill>
+              <a:srgbClr val="4682B4"/>
+            </a:solidFill>
+          </a:ln>
+        </p:spPr>
+        <p:style>
+          <a:lnRef idx="1">
+            <a:schemeClr val="accent1"/>
+          </a:lnRef>
+          <a:fillRef idx="3">
+            <a:schemeClr val="accent1"/>
+          </a:fillRef>
+          <a:effectRef idx="2">
+            <a:schemeClr val="accent1"/>
+          </a:effectRef>
+          <a:fontRef idx="minor">
+            <a:schemeClr val="lt1"/>
+          </a:fontRef>
+        </p:style>
+        <p:txBody>
+          <a:bodyPr rtlCol="0" anchor="ctr"/>
+          <a:lstStyle/>
+          <a:p>
+            <a:pPr algn="ctr"/>
+          </a:p>
+        </p:txBody>
+      </p:sp>
+      <p:sp>
+        <p:nvSpPr>
+          <p:cNvPr id="7" name="TextBox 6"/>
+          <p:cNvSpPr txBox="1"/>
+          <p:nvPr/>
+        </p:nvSpPr>
+        <p:spPr>
+          <a:xfrm>
+            <a:off x="1554480" y="2103120"/>
+            <a:ext cx="6035040" cy="457200"/>
+          </a:xfrm>
+          <a:prstGeom prst="rect">
+            <a:avLst/>
+          </a:prstGeom>
+          <a:noFill/>
+        </p:spPr>
+        <p:txBody>
+          <a:bodyPr wrap="none">
+            <a:spAutoFit/>
+          </a:bodyPr>
+          <a:lstStyle/>
           <a:p>
             <a:pPr>
-              <a:spcBef>
-                <a:spcPts val="400"/>
-              </a:spcBef>
-              <a:spcAft>
-                <a:spcPts val="400"/>
-              </a:spcAft>
-              <a:defRPr sz="1800">
-                <a:solidFill>
-                  <a:srgbClr val="333333"/>
+              <a:defRPr sz="1800" b="1">
+                <a:solidFill>
+                  <a:srgbClr val="1E3A5F"/>
                 </a:solidFill>
               </a:defRPr>
             </a:pPr>
             <a:r>
-              <a:t>組織図、プロダクト</a:t>
-            </a:r>
-          </a:p>
+              <a:t>✓ 組織図、プロダクト</a:t>
+            </a:r>
+          </a:p>
+        </p:txBody>
+      </p:sp>
+      <p:sp>
+        <p:nvSpPr>
+          <p:cNvPr id="8" name="Rectangle 7"/>
+          <p:cNvSpPr/>
+          <p:nvPr/>
+        </p:nvSpPr>
+        <p:spPr>
+          <a:xfrm>
+            <a:off x="1371600" y="2926080"/>
+            <a:ext cx="6400800" cy="640080"/>
+          </a:xfrm>
+          <a:prstGeom prst="rect">
+            <a:avLst/>
+          </a:prstGeom>
+          <a:solidFill>
+            <a:srgbClr val="DCF0FF"/>
+          </a:solidFill>
+          <a:ln>
+            <a:solidFill>
+              <a:srgbClr val="4682B4"/>
+            </a:solidFill>
+          </a:ln>
+        </p:spPr>
+        <p:style>
+          <a:lnRef idx="1">
+            <a:schemeClr val="accent1"/>
+          </a:lnRef>
+          <a:fillRef idx="3">
+            <a:schemeClr val="accent1"/>
+          </a:fillRef>
+          <a:effectRef idx="2">
+            <a:schemeClr val="accent1"/>
+          </a:effectRef>
+          <a:fontRef idx="minor">
+            <a:schemeClr val="lt1"/>
+          </a:fontRef>
+        </p:style>
+        <p:txBody>
+          <a:bodyPr rtlCol="0" anchor="ctr"/>
+          <a:lstStyle/>
+          <a:p>
+            <a:pPr algn="ctr"/>
+          </a:p>
+        </p:txBody>
+      </p:sp>
+      <p:sp>
+        <p:nvSpPr>
+          <p:cNvPr id="9" name="TextBox 8"/>
+          <p:cNvSpPr txBox="1"/>
+          <p:nvPr/>
+        </p:nvSpPr>
+        <p:spPr>
+          <a:xfrm>
+            <a:off x="1554480" y="3017520"/>
+            <a:ext cx="6035040" cy="457200"/>
+          </a:xfrm>
+          <a:prstGeom prst="rect">
+            <a:avLst/>
+          </a:prstGeom>
+          <a:noFill/>
+        </p:spPr>
+        <p:txBody>
+          <a:bodyPr wrap="none">
+            <a:spAutoFit/>
+          </a:bodyPr>
+          <a:lstStyle/>
           <a:p>
             <a:pPr>
-              <a:spcBef>
-                <a:spcPts val="400"/>
-              </a:spcBef>
-              <a:spcAft>
-                <a:spcPts val="400"/>
-              </a:spcAft>
-              <a:defRPr sz="1800">
-                <a:solidFill>
-                  <a:srgbClr val="333333"/>
+              <a:defRPr sz="1800" b="1">
+                <a:solidFill>
+                  <a:srgbClr val="1E3A5F"/>
                 </a:solidFill>
               </a:defRPr>
             </a:pPr>
             <a:r>
-              <a:t>CS業務フロー、テックエキスパート業務</a:t>
+              <a:t>✓ CS業務フロー、テックエキスパート業務</a:t>
             </a:r>
           </a:p>
         </p:txBody>
